--- a/Proposal_Report_Presentation/RTBDP_Presentation_Kodanda_Challa.pptx
+++ b/Proposal_Report_Presentation/RTBDP_Presentation_Kodanda_Challa.pptx
@@ -13,18 +13,18 @@
   <p:sldIdLst>
     <p:sldId id="256" r:id="rId2"/>
     <p:sldId id="270" r:id="rId3"/>
-    <p:sldId id="258" r:id="rId4"/>
-    <p:sldId id="259" r:id="rId5"/>
+    <p:sldId id="259" r:id="rId4"/>
+    <p:sldId id="258" r:id="rId5"/>
     <p:sldId id="260" r:id="rId6"/>
     <p:sldId id="261" r:id="rId7"/>
     <p:sldId id="262" r:id="rId8"/>
     <p:sldId id="263" r:id="rId9"/>
     <p:sldId id="276" r:id="rId10"/>
-    <p:sldId id="264" r:id="rId11"/>
-    <p:sldId id="275" r:id="rId12"/>
-    <p:sldId id="265" r:id="rId13"/>
-    <p:sldId id="277" r:id="rId14"/>
-    <p:sldId id="266" r:id="rId15"/>
+    <p:sldId id="277" r:id="rId11"/>
+    <p:sldId id="279" r:id="rId12"/>
+    <p:sldId id="266" r:id="rId13"/>
+    <p:sldId id="264" r:id="rId14"/>
+    <p:sldId id="275" r:id="rId15"/>
     <p:sldId id="278" r:id="rId16"/>
     <p:sldId id="268" r:id="rId17"/>
     <p:sldId id="269" r:id="rId18"/>
@@ -243,7 +243,7 @@
           <a:p>
             <a:fld id="{BA320A74-E58F-4B13-94F4-DA56DB9AFBA1}" type="datetimeFigureOut">
               <a:rPr lang="en-IN" smtClean="0"/>
-              <a:t>23-06-2026</a:t>
+              <a:t>30-06-2026</a:t>
             </a:fld>
             <a:endParaRPr lang="en-IN"/>
           </a:p>
@@ -558,7 +558,7 @@
             <a:spLocks noGrp="1" noRot="1" noChangeAspect="1"/>
           </p:cNvSpPr>
           <p:nvPr>
-            <p:ph type="sldImg" idx="2"/>
+            <p:ph type="sldImg"/>
           </p:nvPr>
         </p:nvSpPr>
         <p:spPr/>
@@ -570,7 +570,7 @@
             <a:spLocks noGrp="1"/>
           </p:cNvSpPr>
           <p:nvPr>
-            <p:ph type="body" sz="quarter" idx="3"/>
+            <p:ph type="body" idx="1"/>
           </p:nvPr>
         </p:nvSpPr>
         <p:spPr/>
@@ -579,7 +579,8 @@
           <a:lstStyle/>
           <a:p>
             <a:r>
-              <a:t>[8:15–9:15] Second idea. Traders read 'candles' — a candle summarises a short time as four numbers: open (first price), high, low, and close (last price). Flink groups every minute (and every 5 minutes) of trades into one candle. Crucially it uses each trade's real timestamp, not the arrival time, so a trade that arrives a little late still lands in the correct candle. That keeps results correct and repeatable.</a:t>
+              <a:rPr lang="en-US" dirty="0"/>
+              <a:t>Explain each pattern. For the exam: mention ListState vs ValueState, why bounded at 60 entries, key isolation.</a:t>
             </a:r>
           </a:p>
         </p:txBody>
@@ -591,12 +592,88 @@
             <a:spLocks noGrp="1"/>
           </p:cNvSpPr>
           <p:nvPr>
-            <p:ph type="sldNum" sz="quarter" idx="5"/>
+            <p:ph type="sldNum" sz="quarter" idx="10"/>
           </p:nvPr>
         </p:nvSpPr>
         <p:spPr/>
+        <p:txBody>
+          <a:bodyPr/>
+          <a:lstStyle/>
+          <a:p>
+            <a:pPr marL="0" marR="0" lvl="0" indent="0" algn="l" defTabSz="914400" rtl="0" eaLnBrk="1" fontAlgn="auto" latinLnBrk="0" hangingPunct="1">
+              <a:lnSpc>
+                <a:spcPct val="100000"/>
+              </a:lnSpc>
+              <a:spcBef>
+                <a:spcPts val="0"/>
+              </a:spcBef>
+              <a:spcAft>
+                <a:spcPts val="0"/>
+              </a:spcAft>
+              <a:buClrTx/>
+              <a:buSzTx/>
+              <a:buFontTx/>
+              <a:buNone/>
+              <a:tabLst/>
+              <a:defRPr/>
+            </a:pPr>
+            <a:fld id="{F7021451-1387-4CA6-816F-3879F97B5CBC}" type="slidenum">
+              <a:rPr kumimoji="0" lang="en-US" sz="1800" b="0" i="0" u="none" strike="noStrike" kern="1200" cap="none" spc="0" normalizeH="0" baseline="0" noProof="0">
+                <a:ln>
+                  <a:noFill/>
+                </a:ln>
+                <a:solidFill>
+                  <a:prstClr val="black"/>
+                </a:solidFill>
+                <a:effectLst/>
+                <a:uLnTx/>
+                <a:uFillTx/>
+                <a:latin typeface="Aptos" panose="02110004020202020204"/>
+                <a:ea typeface="+mn-ea"/>
+                <a:cs typeface="+mn-cs"/>
+              </a:rPr>
+              <a:pPr marL="0" marR="0" lvl="0" indent="0" algn="l" defTabSz="914400" rtl="0" eaLnBrk="1" fontAlgn="auto" latinLnBrk="0" hangingPunct="1">
+                <a:lnSpc>
+                  <a:spcPct val="100000"/>
+                </a:lnSpc>
+                <a:spcBef>
+                  <a:spcPts val="0"/>
+                </a:spcBef>
+                <a:spcAft>
+                  <a:spcPts val="0"/>
+                </a:spcAft>
+                <a:buClrTx/>
+                <a:buSzTx/>
+                <a:buFontTx/>
+                <a:buNone/>
+                <a:tabLst/>
+                <a:defRPr/>
+              </a:pPr>
+              <a:t>10</a:t>
+            </a:fld>
+            <a:endParaRPr kumimoji="0" lang="en-US" sz="1800" b="0" i="0" u="none" strike="noStrike" kern="1200" cap="none" spc="0" normalizeH="0" baseline="0" noProof="0">
+              <a:ln>
+                <a:noFill/>
+              </a:ln>
+              <a:solidFill>
+                <a:prstClr val="black"/>
+              </a:solidFill>
+              <a:effectLst/>
+              <a:uLnTx/>
+              <a:uFillTx/>
+              <a:latin typeface="Aptos" panose="02110004020202020204"/>
+              <a:ea typeface="+mn-ea"/>
+              <a:cs typeface="+mn-cs"/>
+            </a:endParaRPr>
+          </a:p>
+        </p:txBody>
       </p:sp>
     </p:spTree>
+    <p:extLst>
+      <p:ext uri="{BB962C8B-B14F-4D97-AF65-F5344CB8AC3E}">
+        <p14:creationId xmlns:p14="http://schemas.microsoft.com/office/powerpoint/2010/main" val="1024086991"/>
+      </p:ext>
+    </p:extLst>
   </p:cSld>
   <p:clrMapOvr>
     <a:masterClrMapping/>
@@ -609,7 +686,13 @@
   <p:cSld>
     <p:spTree>
       <p:nvGrpSpPr>
-        <p:cNvPr id="1" name=""/>
+        <p:cNvPr id="1" name="">
+          <a:extLst>
+            <a:ext uri="{FF2B5EF4-FFF2-40B4-BE49-F238E27FC236}">
+              <a16:creationId xmlns:a16="http://schemas.microsoft.com/office/drawing/2014/main" id="{A1B23907-509E-3941-9072-23847A42EB17}"/>
+            </a:ext>
+          </a:extLst>
+        </p:cNvPr>
         <p:cNvGrpSpPr/>
         <p:nvPr/>
       </p:nvGrpSpPr>
@@ -623,7 +706,13 @@
       </p:grpSpPr>
       <p:sp>
         <p:nvSpPr>
-          <p:cNvPr id="2" name="Slide Image Placeholder 1"/>
+          <p:cNvPr id="2" name="Slide Image Placeholder 1">
+            <a:extLst>
+              <a:ext uri="{FF2B5EF4-FFF2-40B4-BE49-F238E27FC236}">
+                <a16:creationId xmlns:a16="http://schemas.microsoft.com/office/drawing/2014/main" id="{D7801291-D57D-490A-48D3-5E04D1D0A9E6}"/>
+              </a:ext>
+            </a:extLst>
+          </p:cNvPr>
           <p:cNvSpPr>
             <a:spLocks noGrp="1" noRot="1" noChangeAspect="1"/>
           </p:cNvSpPr>
@@ -635,7 +724,13 @@
       </p:sp>
       <p:sp>
         <p:nvSpPr>
-          <p:cNvPr id="3" name="Notes Placeholder 2"/>
+          <p:cNvPr id="3" name="Notes Placeholder 2">
+            <a:extLst>
+              <a:ext uri="{FF2B5EF4-FFF2-40B4-BE49-F238E27FC236}">
+                <a16:creationId xmlns:a16="http://schemas.microsoft.com/office/drawing/2014/main" id="{93620945-C006-A1BC-0ECB-4A429C6FB77E}"/>
+              </a:ext>
+            </a:extLst>
+          </p:cNvPr>
           <p:cNvSpPr>
             <a:spLocks noGrp="1"/>
           </p:cNvSpPr>
@@ -650,14 +745,20 @@
           <a:p>
             <a:r>
               <a:rPr lang="en-US" dirty="0"/>
-              <a:t>Explain: tumbling windows, event-time, watermarks, idleness. These are the core course concepts all visible in one slide.</a:t>
-            </a:r>
-          </a:p>
-        </p:txBody>
-      </p:sp>
-      <p:sp>
-        <p:nvSpPr>
-          <p:cNvPr id="4" name="Slide Number Placeholder 3"/>
+              <a:t>Walk through the diagram. Key message: key_by creates 30 isolated state spaces. BTCUSDT state NEVER mixes with DOGEUSDT.</a:t>
+            </a:r>
+          </a:p>
+        </p:txBody>
+      </p:sp>
+      <p:sp>
+        <p:nvSpPr>
+          <p:cNvPr id="4" name="Slide Number Placeholder 3">
+            <a:extLst>
+              <a:ext uri="{FF2B5EF4-FFF2-40B4-BE49-F238E27FC236}">
+                <a16:creationId xmlns:a16="http://schemas.microsoft.com/office/drawing/2014/main" id="{D2B4F223-A4B4-56F7-4453-C8B3C31FB0A2}"/>
+              </a:ext>
+            </a:extLst>
+          </p:cNvPr>
           <p:cNvSpPr>
             <a:spLocks noGrp="1"/>
           </p:cNvSpPr>
@@ -741,7 +842,7 @@
     </p:spTree>
     <p:extLst>
       <p:ext uri="{BB962C8B-B14F-4D97-AF65-F5344CB8AC3E}">
-        <p14:creationId xmlns:p14="http://schemas.microsoft.com/office/powerpoint/2010/main" val="1024086991"/>
+        <p14:creationId xmlns:p14="http://schemas.microsoft.com/office/powerpoint/2010/main" val="2551880225"/>
       </p:ext>
     </p:extLst>
   </p:cSld>
@@ -796,7 +897,7 @@
           <a:lstStyle/>
           <a:p>
             <a:r>
-              <a:t>[9:15–10:45] This is the heart of the project — three patterns. Wash trade: the price wiggles up and down while the traded amount is far above normal — fake activity. Pump and dump: the price shoots up and then crashes within four minutes — a trap for other buyers. Volume spike: the number of trades in 10 seconds is at least double the recent average — a sudden burst. Each match becomes a MEDIUM or HIGH alert on the dashboard within seconds. The limits are tuned sensitive so alerts show during a demo.</a:t>
+              <a:t>[10:45–11:45] Everything the user needs is on one Grafana dashboard, refreshing every 5 seconds. Five panels: live price per coin with green/red; the candle chart; volume per coin; how many alerts in the last hour; and a live table of detected cheating with time, coin, pattern and severity. Two menus at the top pick the coin and the candle size. Let me show it live now.</a:t>
             </a:r>
           </a:p>
         </p:txBody>
@@ -845,7 +946,7 @@
             <a:spLocks noGrp="1" noRot="1" noChangeAspect="1"/>
           </p:cNvSpPr>
           <p:nvPr>
-            <p:ph type="sldImg"/>
+            <p:ph type="sldImg" idx="2"/>
           </p:nvPr>
         </p:nvSpPr>
         <p:spPr/>
@@ -857,7 +958,7 @@
             <a:spLocks noGrp="1"/>
           </p:cNvSpPr>
           <p:nvPr>
-            <p:ph type="body" idx="1"/>
+            <p:ph type="body" sz="quarter" idx="3"/>
           </p:nvPr>
         </p:nvSpPr>
         <p:spPr/>
@@ -866,8 +967,7 @@
           <a:lstStyle/>
           <a:p>
             <a:r>
-              <a:rPr lang="en-US" dirty="0"/>
-              <a:t>Explain each pattern. For the exam: mention ListState vs ValueState, why bounded at 60 entries, key isolation.</a:t>
+              <a:t>[8:15–9:15] Second idea. Traders read 'candles' — a candle summarises a short time as four numbers: open (first price), high, low, and close (last price). Flink groups every minute (and every 5 minutes) of trades into one candle. Crucially it uses each trade's real timestamp, not the arrival time, so a trade that arrives a little late still lands in the correct candle. That keeps results correct and repeatable.</a:t>
             </a:r>
           </a:p>
         </p:txBody>
@@ -879,88 +979,12 @@
             <a:spLocks noGrp="1"/>
           </p:cNvSpPr>
           <p:nvPr>
-            <p:ph type="sldNum" sz="quarter" idx="10"/>
+            <p:ph type="sldNum" sz="quarter" idx="5"/>
           </p:nvPr>
         </p:nvSpPr>
         <p:spPr/>
-        <p:txBody>
-          <a:bodyPr/>
-          <a:lstStyle/>
-          <a:p>
-            <a:pPr marL="0" marR="0" lvl="0" indent="0" algn="l" defTabSz="914400" rtl="0" eaLnBrk="1" fontAlgn="auto" latinLnBrk="0" hangingPunct="1">
-              <a:lnSpc>
-                <a:spcPct val="100000"/>
-              </a:lnSpc>
-              <a:spcBef>
-                <a:spcPts val="0"/>
-              </a:spcBef>
-              <a:spcAft>
-                <a:spcPts val="0"/>
-              </a:spcAft>
-              <a:buClrTx/>
-              <a:buSzTx/>
-              <a:buFontTx/>
-              <a:buNone/>
-              <a:tabLst/>
-              <a:defRPr/>
-            </a:pPr>
-            <a:fld id="{F7021451-1387-4CA6-816F-3879F97B5CBC}" type="slidenum">
-              <a:rPr kumimoji="0" lang="en-US" sz="1800" b="0" i="0" u="none" strike="noStrike" kern="1200" cap="none" spc="0" normalizeH="0" baseline="0" noProof="0">
-                <a:ln>
-                  <a:noFill/>
-                </a:ln>
-                <a:solidFill>
-                  <a:prstClr val="black"/>
-                </a:solidFill>
-                <a:effectLst/>
-                <a:uLnTx/>
-                <a:uFillTx/>
-                <a:latin typeface="Aptos" panose="02110004020202020204"/>
-                <a:ea typeface="+mn-ea"/>
-                <a:cs typeface="+mn-cs"/>
-              </a:rPr>
-              <a:pPr marL="0" marR="0" lvl="0" indent="0" algn="l" defTabSz="914400" rtl="0" eaLnBrk="1" fontAlgn="auto" latinLnBrk="0" hangingPunct="1">
-                <a:lnSpc>
-                  <a:spcPct val="100000"/>
-                </a:lnSpc>
-                <a:spcBef>
-                  <a:spcPts val="0"/>
-                </a:spcBef>
-                <a:spcAft>
-                  <a:spcPts val="0"/>
-                </a:spcAft>
-                <a:buClrTx/>
-                <a:buSzTx/>
-                <a:buFontTx/>
-                <a:buNone/>
-                <a:tabLst/>
-                <a:defRPr/>
-              </a:pPr>
-              <a:t>13</a:t>
-            </a:fld>
-            <a:endParaRPr kumimoji="0" lang="en-US" sz="1800" b="0" i="0" u="none" strike="noStrike" kern="1200" cap="none" spc="0" normalizeH="0" baseline="0" noProof="0">
-              <a:ln>
-                <a:noFill/>
-              </a:ln>
-              <a:solidFill>
-                <a:prstClr val="black"/>
-              </a:solidFill>
-              <a:effectLst/>
-              <a:uLnTx/>
-              <a:uFillTx/>
-              <a:latin typeface="Aptos" panose="02110004020202020204"/>
-              <a:ea typeface="+mn-ea"/>
-              <a:cs typeface="+mn-cs"/>
-            </a:endParaRPr>
-          </a:p>
-        </p:txBody>
       </p:sp>
     </p:spTree>
-    <p:extLst>
-      <p:ext uri="{BB962C8B-B14F-4D97-AF65-F5344CB8AC3E}">
-        <p14:creationId xmlns:p14="http://schemas.microsoft.com/office/powerpoint/2010/main" val="1024086991"/>
-      </p:ext>
-    </p:extLst>
   </p:cSld>
   <p:clrMapOvr>
     <a:masterClrMapping/>
@@ -992,7 +1016,7 @@
             <a:spLocks noGrp="1" noRot="1" noChangeAspect="1"/>
           </p:cNvSpPr>
           <p:nvPr>
-            <p:ph type="sldImg" idx="2"/>
+            <p:ph type="sldImg"/>
           </p:nvPr>
         </p:nvSpPr>
         <p:spPr/>
@@ -1004,7 +1028,7 @@
             <a:spLocks noGrp="1"/>
           </p:cNvSpPr>
           <p:nvPr>
-            <p:ph type="body" sz="quarter" idx="3"/>
+            <p:ph type="body" idx="1"/>
           </p:nvPr>
         </p:nvSpPr>
         <p:spPr/>
@@ -1013,7 +1037,8 @@
           <a:lstStyle/>
           <a:p>
             <a:r>
-              <a:t>[10:45–11:45] Everything the user needs is on one Grafana dashboard, refreshing every 5 seconds. Five panels: live price per coin with green/red; the candle chart; volume per coin; how many alerts in the last hour; and a live table of detected cheating with time, coin, pattern and severity. Two menus at the top pick the coin and the candle size. Let me show it live now.</a:t>
+              <a:rPr lang="en-US" dirty="0"/>
+              <a:t>Explain: tumbling windows, event-time, watermarks, idleness. These are the core course concepts all visible in one slide.</a:t>
             </a:r>
           </a:p>
         </p:txBody>
@@ -1025,12 +1050,88 @@
             <a:spLocks noGrp="1"/>
           </p:cNvSpPr>
           <p:nvPr>
-            <p:ph type="sldNum" sz="quarter" idx="5"/>
+            <p:ph type="sldNum" sz="quarter" idx="10"/>
           </p:nvPr>
         </p:nvSpPr>
         <p:spPr/>
+        <p:txBody>
+          <a:bodyPr/>
+          <a:lstStyle/>
+          <a:p>
+            <a:pPr marL="0" marR="0" lvl="0" indent="0" algn="l" defTabSz="914400" rtl="0" eaLnBrk="1" fontAlgn="auto" latinLnBrk="0" hangingPunct="1">
+              <a:lnSpc>
+                <a:spcPct val="100000"/>
+              </a:lnSpc>
+              <a:spcBef>
+                <a:spcPts val="0"/>
+              </a:spcBef>
+              <a:spcAft>
+                <a:spcPts val="0"/>
+              </a:spcAft>
+              <a:buClrTx/>
+              <a:buSzTx/>
+              <a:buFontTx/>
+              <a:buNone/>
+              <a:tabLst/>
+              <a:defRPr/>
+            </a:pPr>
+            <a:fld id="{F7021451-1387-4CA6-816F-3879F97B5CBC}" type="slidenum">
+              <a:rPr kumimoji="0" lang="en-US" sz="1800" b="0" i="0" u="none" strike="noStrike" kern="1200" cap="none" spc="0" normalizeH="0" baseline="0" noProof="0">
+                <a:ln>
+                  <a:noFill/>
+                </a:ln>
+                <a:solidFill>
+                  <a:prstClr val="black"/>
+                </a:solidFill>
+                <a:effectLst/>
+                <a:uLnTx/>
+                <a:uFillTx/>
+                <a:latin typeface="Aptos" panose="02110004020202020204"/>
+                <a:ea typeface="+mn-ea"/>
+                <a:cs typeface="+mn-cs"/>
+              </a:rPr>
+              <a:pPr marL="0" marR="0" lvl="0" indent="0" algn="l" defTabSz="914400" rtl="0" eaLnBrk="1" fontAlgn="auto" latinLnBrk="0" hangingPunct="1">
+                <a:lnSpc>
+                  <a:spcPct val="100000"/>
+                </a:lnSpc>
+                <a:spcBef>
+                  <a:spcPts val="0"/>
+                </a:spcBef>
+                <a:spcAft>
+                  <a:spcPts val="0"/>
+                </a:spcAft>
+                <a:buClrTx/>
+                <a:buSzTx/>
+                <a:buFontTx/>
+                <a:buNone/>
+                <a:tabLst/>
+                <a:defRPr/>
+              </a:pPr>
+              <a:t>14</a:t>
+            </a:fld>
+            <a:endParaRPr kumimoji="0" lang="en-US" sz="1800" b="0" i="0" u="none" strike="noStrike" kern="1200" cap="none" spc="0" normalizeH="0" baseline="0" noProof="0">
+              <a:ln>
+                <a:noFill/>
+              </a:ln>
+              <a:solidFill>
+                <a:prstClr val="black"/>
+              </a:solidFill>
+              <a:effectLst/>
+              <a:uLnTx/>
+              <a:uFillTx/>
+              <a:latin typeface="Aptos" panose="02110004020202020204"/>
+              <a:ea typeface="+mn-ea"/>
+              <a:cs typeface="+mn-cs"/>
+            </a:endParaRPr>
+          </a:p>
+        </p:txBody>
       </p:sp>
     </p:spTree>
+    <p:extLst>
+      <p:ext uri="{BB962C8B-B14F-4D97-AF65-F5344CB8AC3E}">
+        <p14:creationId xmlns:p14="http://schemas.microsoft.com/office/powerpoint/2010/main" val="1024086991"/>
+      </p:ext>
+    </p:extLst>
   </p:cSld>
   <p:clrMapOvr>
     <a:masterClrMapping/>
@@ -1664,7 +1765,7 @@
           <a:lstStyle/>
           <a:p>
             <a:r>
-              <a:t>[2:00–3:00] Here's the whole idea in six steps. Get the data from Binance, collect it into Kafka, store the stream, analyse it with Flink, save results to a database, and show them in Grafana. Live trades enter on the left; a live dashboard comes out on the right. Each box is a standard tool.</a:t>
+              <a:t>[3:00–4:00] All data comes from one place: Binance's free public trade feed — no API key. One always-open WebSocket gives every trade for all six coins. Each message is tiny: coin, price, amount, and the exact time. Three things matter: it's fast and never stops, there's plenty of it, and it can arrive slightly out of order — which the system is built to handle.</a:t>
             </a:r>
           </a:p>
         </p:txBody>
@@ -1734,7 +1835,7 @@
           <a:lstStyle/>
           <a:p>
             <a:r>
-              <a:t>[3:00–4:00] All data comes from one place: Binance's free public trade feed — no API key. One always-open WebSocket gives every trade for all six coins. Each message is tiny: coin, price, amount, and the exact time. Three things matter: it's fast and never stops, there's plenty of it, and it can arrive slightly out of order — which the system is built to handle.</a:t>
+              <a:t>[2:00–3:00] Here's the whole idea in six steps. Get the data from Binance, collect it into Kafka, store the stream, analyse it with Flink, save results to a database, and show them in Grafana. Live trades enter on the left; a live dashboard comes out on the right. Each box is a standard tool.</a:t>
             </a:r>
           </a:p>
         </p:txBody>
@@ -2365,7 +2466,7 @@
           <a:p>
             <a:fld id="{5BCAD085-E8A6-8845-BD4E-CB4CCA059FC4}" type="datetimeFigureOut">
               <a:rPr lang="en-US" smtClean="0"/>
-              <a:t>6/23/2026</a:t>
+              <a:t>6/30/2026</a:t>
             </a:fld>
             <a:endParaRPr lang="en-US"/>
           </a:p>
@@ -2533,7 +2634,7 @@
           <a:p>
             <a:fld id="{5BCAD085-E8A6-8845-BD4E-CB4CCA059FC4}" type="datetimeFigureOut">
               <a:rPr lang="en-US" smtClean="0"/>
-              <a:t>6/23/2026</a:t>
+              <a:t>6/30/2026</a:t>
             </a:fld>
             <a:endParaRPr lang="en-US"/>
           </a:p>
@@ -2711,7 +2812,7 @@
           <a:p>
             <a:fld id="{5BCAD085-E8A6-8845-BD4E-CB4CCA059FC4}" type="datetimeFigureOut">
               <a:rPr lang="en-US" smtClean="0"/>
-              <a:t>6/23/2026</a:t>
+              <a:t>6/30/2026</a:t>
             </a:fld>
             <a:endParaRPr lang="en-US"/>
           </a:p>
@@ -2915,7 +3016,7 @@
           <a:p>
             <a:fld id="{5BCAD085-E8A6-8845-BD4E-CB4CCA059FC4}" type="datetimeFigureOut">
               <a:rPr lang="en-US" smtClean="0"/>
-              <a:t>6/23/2026</a:t>
+              <a:t>6/30/2026</a:t>
             </a:fld>
             <a:endParaRPr lang="en-US"/>
           </a:p>
@@ -3160,7 +3261,7 @@
           <a:p>
             <a:fld id="{5BCAD085-E8A6-8845-BD4E-CB4CCA059FC4}" type="datetimeFigureOut">
               <a:rPr lang="en-US" smtClean="0"/>
-              <a:t>6/23/2026</a:t>
+              <a:t>6/30/2026</a:t>
             </a:fld>
             <a:endParaRPr lang="en-US"/>
           </a:p>
@@ -3445,7 +3546,7 @@
           <a:p>
             <a:fld id="{5BCAD085-E8A6-8845-BD4E-CB4CCA059FC4}" type="datetimeFigureOut">
               <a:rPr lang="en-US" smtClean="0"/>
-              <a:t>6/23/2026</a:t>
+              <a:t>6/30/2026</a:t>
             </a:fld>
             <a:endParaRPr lang="en-US"/>
           </a:p>
@@ -3864,7 +3965,7 @@
           <a:p>
             <a:fld id="{5BCAD085-E8A6-8845-BD4E-CB4CCA059FC4}" type="datetimeFigureOut">
               <a:rPr lang="en-US" smtClean="0"/>
-              <a:t>6/23/2026</a:t>
+              <a:t>6/30/2026</a:t>
             </a:fld>
             <a:endParaRPr lang="en-US"/>
           </a:p>
@@ -3981,7 +4082,7 @@
           <a:p>
             <a:fld id="{5BCAD085-E8A6-8845-BD4E-CB4CCA059FC4}" type="datetimeFigureOut">
               <a:rPr lang="en-US" smtClean="0"/>
-              <a:t>6/23/2026</a:t>
+              <a:t>6/30/2026</a:t>
             </a:fld>
             <a:endParaRPr lang="en-US"/>
           </a:p>
@@ -4085,7 +4186,7 @@
             <a:fld id="{5BCAD085-E8A6-8845-BD4E-CB4CCA059FC4}" type="datetimeFigureOut">
               <a:rPr lang="en-US" smtClean="0"/>
               <a:pPr/>
-              <a:t>6/23/2026</a:t>
+              <a:t>6/30/2026</a:t>
             </a:fld>
             <a:endParaRPr lang="en-US" dirty="0"/>
           </a:p>
@@ -4381,7 +4482,7 @@
           <a:p>
             <a:fld id="{5BCAD085-E8A6-8845-BD4E-CB4CCA059FC4}" type="datetimeFigureOut">
               <a:rPr lang="en-US" smtClean="0"/>
-              <a:t>6/23/2026</a:t>
+              <a:t>6/30/2026</a:t>
             </a:fld>
             <a:endParaRPr lang="en-US"/>
           </a:p>
@@ -4633,7 +4734,7 @@
           <a:p>
             <a:fld id="{5BCAD085-E8A6-8845-BD4E-CB4CCA059FC4}" type="datetimeFigureOut">
               <a:rPr lang="en-US" smtClean="0"/>
-              <a:t>6/23/2026</a:t>
+              <a:t>6/30/2026</a:t>
             </a:fld>
             <a:endParaRPr lang="en-US"/>
           </a:p>
@@ -4844,7 +4945,7 @@
           <a:p>
             <a:fld id="{5BCAD085-E8A6-8845-BD4E-CB4CCA059FC4}" type="datetimeFigureOut">
               <a:rPr lang="en-US" smtClean="0"/>
-              <a:t>6/23/2026</a:t>
+              <a:t>6/30/2026</a:t>
             </a:fld>
             <a:endParaRPr lang="en-US"/>
           </a:p>
@@ -5261,7 +5362,7 @@
           <a:lstStyle/>
           <a:p>
             <a:pPr algn="ctr"/>
-            <a:endParaRPr/>
+            <a:endParaRPr lang="en-IN"/>
           </a:p>
         </p:txBody>
       </p:sp>
@@ -5650,282 +5751,6 @@
 </file>
 
 <file path=ppt/slides/slide10.xml><?xml version="1.0" encoding="utf-8"?>
-<p:sld xmlns:a="http://schemas.openxmlformats.org/drawingml/2006/main" xmlns:r="http://schemas.openxmlformats.org/officeDocument/2006/relationships" xmlns:p="http://schemas.openxmlformats.org/presentationml/2006/main">
-  <p:cSld>
-    <p:spTree>
-      <p:nvGrpSpPr>
-        <p:cNvPr id="1" name=""/>
-        <p:cNvGrpSpPr/>
-        <p:nvPr/>
-      </p:nvGrpSpPr>
-      <p:grpSpPr>
-        <a:xfrm>
-          <a:off x="0" y="0"/>
-          <a:ext cx="0" cy="0"/>
-          <a:chOff x="0" y="0"/>
-          <a:chExt cx="0" cy="0"/>
-        </a:xfrm>
-      </p:grpSpPr>
-      <p:sp>
-        <p:nvSpPr>
-          <p:cNvPr id="2" name="Rectangle 1"/>
-          <p:cNvSpPr/>
-          <p:nvPr/>
-        </p:nvSpPr>
-        <p:spPr>
-          <a:xfrm>
-            <a:off x="0" y="0"/>
-            <a:ext cx="12191695" cy="6858000"/>
-          </a:xfrm>
-          <a:prstGeom prst="rect">
-            <a:avLst/>
-          </a:prstGeom>
-          <a:solidFill>
-            <a:srgbClr val="0E1726"/>
-          </a:solidFill>
-          <a:ln>
-            <a:noFill/>
-          </a:ln>
-          <a:effectLst/>
-        </p:spPr>
-        <p:style>
-          <a:lnRef idx="1">
-            <a:schemeClr val="accent1"/>
-          </a:lnRef>
-          <a:fillRef idx="3">
-            <a:schemeClr val="accent1"/>
-          </a:fillRef>
-          <a:effectRef idx="2">
-            <a:schemeClr val="accent1"/>
-          </a:effectRef>
-          <a:fontRef idx="minor">
-            <a:schemeClr val="lt1"/>
-          </a:fontRef>
-        </p:style>
-        <p:txBody>
-          <a:bodyPr rtlCol="0" anchor="ctr"/>
-          <a:lstStyle/>
-          <a:p>
-            <a:pPr algn="ctr"/>
-            <a:endParaRPr/>
-          </a:p>
-        </p:txBody>
-      </p:sp>
-      <p:sp>
-        <p:nvSpPr>
-          <p:cNvPr id="3" name="TextBox 2"/>
-          <p:cNvSpPr txBox="1"/>
-          <p:nvPr/>
-        </p:nvSpPr>
-        <p:spPr>
-          <a:xfrm>
-            <a:off x="777240" y="502920"/>
-            <a:ext cx="10058400" cy="365760"/>
-          </a:xfrm>
-          <a:prstGeom prst="rect">
-            <a:avLst/>
-          </a:prstGeom>
-          <a:noFill/>
-        </p:spPr>
-        <p:txBody>
-          <a:bodyPr wrap="square" lIns="0" tIns="0" rIns="0" bIns="0" anchor="t">
-            <a:spAutoFit/>
-          </a:bodyPr>
-          <a:lstStyle/>
-          <a:p>
-            <a:pPr algn="l">
-              <a:lnSpc>
-                <a:spcPct val="100000"/>
-              </a:lnSpc>
-              <a:spcBef>
-                <a:spcPts val="0"/>
-              </a:spcBef>
-              <a:spcAft>
-                <a:spcPts val="600"/>
-              </a:spcAft>
-            </a:pPr>
-            <a:r>
-              <a:rPr sz="1300" b="1" i="0" dirty="0">
-                <a:solidFill>
-                  <a:srgbClr val="2EE6A6"/>
-                </a:solidFill>
-                <a:latin typeface="Calibri"/>
-              </a:rPr>
-              <a:t>IDEA 2</a:t>
-            </a:r>
-          </a:p>
-        </p:txBody>
-      </p:sp>
-      <p:sp>
-        <p:nvSpPr>
-          <p:cNvPr id="4" name="TextBox 3"/>
-          <p:cNvSpPr txBox="1"/>
-          <p:nvPr/>
-        </p:nvSpPr>
-        <p:spPr>
-          <a:xfrm>
-            <a:off x="777240" y="868680"/>
-            <a:ext cx="10607040" cy="914400"/>
-          </a:xfrm>
-          <a:prstGeom prst="rect">
-            <a:avLst/>
-          </a:prstGeom>
-          <a:noFill/>
-        </p:spPr>
-        <p:txBody>
-          <a:bodyPr wrap="square" lIns="0" tIns="0" rIns="0" bIns="0" anchor="t">
-            <a:spAutoFit/>
-          </a:bodyPr>
-          <a:lstStyle/>
-          <a:p>
-            <a:pPr algn="l">
-              <a:lnSpc>
-                <a:spcPct val="100000"/>
-              </a:lnSpc>
-              <a:spcBef>
-                <a:spcPts val="0"/>
-              </a:spcBef>
-              <a:spcAft>
-                <a:spcPts val="600"/>
-              </a:spcAft>
-            </a:pPr>
-            <a:r>
-              <a:rPr sz="3000" b="1" i="0">
-                <a:solidFill>
-                  <a:srgbClr val="FFFFFF"/>
-                </a:solidFill>
-                <a:latin typeface="Cambria"/>
-              </a:rPr>
-              <a:t>Turning trades into price candles</a:t>
-            </a:r>
-          </a:p>
-        </p:txBody>
-      </p:sp>
-      <p:sp>
-        <p:nvSpPr>
-          <p:cNvPr id="5" name="Rounded Rectangle 4"/>
-          <p:cNvSpPr/>
-          <p:nvPr/>
-        </p:nvSpPr>
-        <p:spPr>
-          <a:xfrm>
-            <a:off x="1503273" y="1810512"/>
-            <a:ext cx="9154972" cy="3419856"/>
-          </a:xfrm>
-          <a:prstGeom prst="roundRect">
-            <a:avLst>
-              <a:gd name="adj" fmla="val 6000"/>
-            </a:avLst>
-          </a:prstGeom>
-          <a:solidFill>
-            <a:srgbClr val="FFFFFF"/>
-          </a:solidFill>
-          <a:ln>
-            <a:noFill/>
-          </a:ln>
-          <a:effectLst/>
-        </p:spPr>
-        <p:style>
-          <a:lnRef idx="1">
-            <a:schemeClr val="accent1"/>
-          </a:lnRef>
-          <a:fillRef idx="3">
-            <a:schemeClr val="accent1"/>
-          </a:fillRef>
-          <a:effectRef idx="2">
-            <a:schemeClr val="accent1"/>
-          </a:effectRef>
-          <a:fontRef idx="minor">
-            <a:schemeClr val="lt1"/>
-          </a:fontRef>
-        </p:style>
-        <p:txBody>
-          <a:bodyPr rtlCol="0" anchor="ctr"/>
-          <a:lstStyle/>
-          <a:p>
-            <a:pPr algn="ctr"/>
-            <a:endParaRPr/>
-          </a:p>
-        </p:txBody>
-      </p:sp>
-      <p:pic>
-        <p:nvPicPr>
-          <p:cNvPr id="6" name="Picture 5" descr="fig_candle.png"/>
-          <p:cNvPicPr>
-            <a:picLocks noChangeAspect="1"/>
-          </p:cNvPicPr>
-          <p:nvPr/>
-        </p:nvPicPr>
-        <p:blipFill>
-          <a:blip r:embed="rId3"/>
-          <a:stretch>
-            <a:fillRect/>
-          </a:stretch>
-        </p:blipFill>
-        <p:spPr>
-          <a:xfrm>
-            <a:off x="1613001" y="1920240"/>
-            <a:ext cx="8935516" cy="3200400"/>
-          </a:xfrm>
-          <a:prstGeom prst="rect">
-            <a:avLst/>
-          </a:prstGeom>
-        </p:spPr>
-      </p:pic>
-      <p:sp>
-        <p:nvSpPr>
-          <p:cNvPr id="7" name="TextBox 6"/>
-          <p:cNvSpPr txBox="1"/>
-          <p:nvPr/>
-        </p:nvSpPr>
-        <p:spPr>
-          <a:xfrm>
-            <a:off x="777240" y="5486400"/>
-            <a:ext cx="10607040" cy="822960"/>
-          </a:xfrm>
-          <a:prstGeom prst="rect">
-            <a:avLst/>
-          </a:prstGeom>
-          <a:noFill/>
-        </p:spPr>
-        <p:txBody>
-          <a:bodyPr wrap="square" lIns="0" tIns="0" rIns="0" bIns="0" anchor="t">
-            <a:spAutoFit/>
-          </a:bodyPr>
-          <a:lstStyle/>
-          <a:p>
-            <a:pPr algn="ctr">
-              <a:lnSpc>
-                <a:spcPct val="100000"/>
-              </a:lnSpc>
-              <a:spcBef>
-                <a:spcPts val="0"/>
-              </a:spcBef>
-              <a:spcAft>
-                <a:spcPts val="600"/>
-              </a:spcAft>
-            </a:pPr>
-            <a:r>
-              <a:rPr sz="1500" b="0" i="0">
-                <a:solidFill>
-                  <a:srgbClr val="EAF0F8"/>
-                </a:solidFill>
-                <a:latin typeface="Calibri"/>
-              </a:rPr>
-              <a:t>Flink groups one minute of trades into a single candle: first, highest, lowest and last price. It uses each trade's real time, so late trades still land in the right candle.</a:t>
-            </a:r>
-          </a:p>
-        </p:txBody>
-      </p:sp>
-    </p:spTree>
-  </p:cSld>
-  <p:clrMapOvr>
-    <a:masterClrMapping/>
-  </p:clrMapOvr>
-</p:sld>
-</file>
-
-<file path=ppt/slides/slide11.xml><?xml version="1.0" encoding="utf-8"?>
 <p:sld xmlns:a="http://schemas.openxmlformats.org/drawingml/2006/main" xmlns:r="http://schemas.openxmlformats.org/officeDocument/2006/relationships" xmlns:p="http://schemas.openxmlformats.org/presentationml/2006/main">
   <p:cSld>
     <p:bg>
@@ -5958,47 +5783,8 @@
         </p:nvSpPr>
         <p:spPr>
           <a:xfrm>
-            <a:off x="756824" y="609600"/>
-            <a:ext cx="2438400" cy="200055"/>
-          </a:xfrm>
-          <a:prstGeom prst="rect">
-            <a:avLst/>
-          </a:prstGeom>
-          <a:noFill/>
-        </p:spPr>
-        <p:txBody>
-          <a:bodyPr wrap="square" lIns="0" tIns="0" rIns="0" bIns="0" anchor="t">
-            <a:spAutoFit/>
-          </a:bodyPr>
-          <a:lstStyle/>
-          <a:p>
-            <a:pPr>
-              <a:spcAft>
-                <a:spcPts val="600"/>
-              </a:spcAft>
-            </a:pPr>
-            <a:r>
-              <a:rPr lang="en-US" sz="1300" b="1" dirty="0">
-                <a:solidFill>
-                  <a:srgbClr val="2EE6A6"/>
-                </a:solidFill>
-                <a:latin typeface="Calibri"/>
-              </a:rPr>
-              <a:t>IDEA 2</a:t>
-            </a:r>
-          </a:p>
-        </p:txBody>
-      </p:sp>
-      <p:sp>
-        <p:nvSpPr>
-          <p:cNvPr id="3" name="Text 1"/>
-          <p:cNvSpPr/>
-          <p:nvPr/>
-        </p:nvSpPr>
-        <p:spPr>
-          <a:xfrm>
-            <a:off x="670560" y="670560"/>
-            <a:ext cx="10850880" cy="914400"/>
+            <a:off x="670560" y="341376"/>
+            <a:ext cx="2438400" cy="341376"/>
           </a:xfrm>
           <a:prstGeom prst="rect">
             <a:avLst/>
@@ -6012,17 +5798,17 @@
           <a:p>
             <a:pPr defTabSz="1219170"/>
             <a:r>
-              <a:rPr lang="en-US" sz="3000" b="1" dirty="0">
-                <a:solidFill>
-                  <a:srgbClr val="FFFFFF"/>
-                </a:solidFill>
-                <a:latin typeface="Georgia" pitchFamily="34" charset="0"/>
-                <a:ea typeface="Georgia" pitchFamily="34" charset="-122"/>
-                <a:cs typeface="Georgia" pitchFamily="34" charset="-120"/>
-              </a:rPr>
-              <a:t>Turning trades into price candles</a:t>
-            </a:r>
-            <a:endParaRPr lang="en-US" sz="3000" dirty="0">
+              <a:rPr lang="en-US" sz="1200" b="1" kern="0" spc="400" dirty="0">
+                <a:solidFill>
+                  <a:srgbClr val="00C896"/>
+                </a:solidFill>
+                <a:latin typeface="Calibri" pitchFamily="34" charset="0"/>
+                <a:ea typeface="Calibri" pitchFamily="34" charset="-122"/>
+                <a:cs typeface="Calibri" pitchFamily="34" charset="-120"/>
+              </a:rPr>
+              <a:t>THE CORE</a:t>
+            </a:r>
+            <a:endParaRPr lang="en-US" sz="1200" dirty="0">
               <a:solidFill>
                 <a:prstClr val="black"/>
               </a:solidFill>
@@ -6033,14 +5819,14 @@
       </p:sp>
       <p:sp>
         <p:nvSpPr>
-          <p:cNvPr id="4" name="Text 2"/>
+          <p:cNvPr id="3" name="Text 1"/>
           <p:cNvSpPr/>
           <p:nvPr/>
         </p:nvSpPr>
         <p:spPr>
           <a:xfrm>
-            <a:off x="670560" y="1597151"/>
-            <a:ext cx="10972800" cy="550825"/>
+            <a:off x="670560" y="670560"/>
+            <a:ext cx="10850880" cy="914400"/>
           </a:xfrm>
           <a:prstGeom prst="rect">
             <a:avLst/>
@@ -6049,22 +5835,22 @@
           <a:ln/>
         </p:spPr>
         <p:txBody>
-          <a:bodyPr wrap="square" rtlCol="0" anchor="t"/>
+          <a:bodyPr wrap="square" rtlCol="0" anchor="ctr"/>
           <a:lstStyle/>
           <a:p>
             <a:pPr defTabSz="1219170"/>
             <a:r>
-              <a:rPr lang="en-US" sz="1600" dirty="0">
-                <a:solidFill>
-                  <a:srgbClr val="8FA8C8"/>
-                </a:solidFill>
-                <a:latin typeface="Calibri" pitchFamily="34" charset="0"/>
-                <a:ea typeface="Calibri" pitchFamily="34" charset="-122"/>
-                <a:cs typeface="Calibri" pitchFamily="34" charset="-120"/>
-              </a:rPr>
-              <a:t>Traders read price candles. A candle is a simple summary of a short period: the first price (open), the highest, the lowest, and the last price (close). Flink groups all trades in each window into a single candle using TumblingEventTimeWindows.</a:t>
-            </a:r>
-            <a:endParaRPr lang="en-US" sz="1600" dirty="0">
+              <a:rPr lang="en-US" sz="4267" b="1" dirty="0">
+                <a:solidFill>
+                  <a:srgbClr val="FFFFFF"/>
+                </a:solidFill>
+                <a:latin typeface="Georgia" pitchFamily="34" charset="0"/>
+                <a:ea typeface="Georgia" pitchFamily="34" charset="-122"/>
+                <a:cs typeface="Georgia" pitchFamily="34" charset="-120"/>
+              </a:rPr>
+              <a:t>The three cheating patterns we detect</a:t>
+            </a:r>
+            <a:endParaRPr lang="en-US" sz="4267" dirty="0">
               <a:solidFill>
                 <a:prstClr val="black"/>
               </a:solidFill>
@@ -6075,18 +5861,686 @@
       </p:sp>
       <p:sp>
         <p:nvSpPr>
-          <p:cNvPr id="5" name="Shape 3"/>
+          <p:cNvPr id="4" name="Shape 2"/>
           <p:cNvSpPr/>
           <p:nvPr/>
         </p:nvSpPr>
         <p:spPr>
           <a:xfrm>
-            <a:off x="670560" y="2438400"/>
-            <a:ext cx="5364480" cy="1584960"/>
+            <a:off x="365760" y="1767840"/>
+            <a:ext cx="3718560" cy="4657344"/>
           </a:xfrm>
           <a:prstGeom prst="roundRect">
             <a:avLst>
-              <a:gd name="adj" fmla="val 6154"/>
+              <a:gd name="adj" fmla="val 2623"/>
+            </a:avLst>
+          </a:prstGeom>
+          <a:solidFill>
+            <a:srgbClr val="1A2840"/>
+          </a:solidFill>
+          <a:ln w="6350">
+            <a:solidFill>
+              <a:srgbClr val="FFB300"/>
+            </a:solidFill>
+            <a:prstDash val="solid"/>
+          </a:ln>
+        </p:spPr>
+        <p:txBody>
+          <a:bodyPr/>
+          <a:lstStyle/>
+          <a:p>
+            <a:pPr defTabSz="1219170"/>
+            <a:endParaRPr lang="en-IN" sz="2400">
+              <a:solidFill>
+                <a:prstClr val="black"/>
+              </a:solidFill>
+              <a:latin typeface="Calibri" panose="020F0502020204030204"/>
+            </a:endParaRPr>
+          </a:p>
+        </p:txBody>
+      </p:sp>
+      <p:sp>
+        <p:nvSpPr>
+          <p:cNvPr id="5" name="Text 3"/>
+          <p:cNvSpPr/>
+          <p:nvPr/>
+        </p:nvSpPr>
+        <p:spPr>
+          <a:xfrm>
+            <a:off x="548640" y="1926336"/>
+            <a:ext cx="3352800" cy="548640"/>
+          </a:xfrm>
+          <a:prstGeom prst="rect">
+            <a:avLst/>
+          </a:prstGeom>
+          <a:noFill/>
+          <a:ln/>
+        </p:spPr>
+        <p:txBody>
+          <a:bodyPr wrap="square" rtlCol="0" anchor="ctr"/>
+          <a:lstStyle/>
+          <a:p>
+            <a:pPr defTabSz="1219170"/>
+            <a:r>
+              <a:rPr lang="en-US" sz="1867" b="1" dirty="0">
+                <a:solidFill>
+                  <a:srgbClr val="FFB300"/>
+                </a:solidFill>
+                <a:latin typeface="Calibri" pitchFamily="34" charset="0"/>
+                <a:ea typeface="Calibri" pitchFamily="34" charset="-122"/>
+                <a:cs typeface="Calibri" pitchFamily="34" charset="-120"/>
+              </a:rPr>
+              <a:t>〰  Wash trade</a:t>
+            </a:r>
+            <a:endParaRPr lang="en-US" sz="1867" dirty="0">
+              <a:solidFill>
+                <a:prstClr val="black"/>
+              </a:solidFill>
+              <a:latin typeface="Calibri" panose="020F0502020204030204"/>
+            </a:endParaRPr>
+          </a:p>
+        </p:txBody>
+      </p:sp>
+      <p:sp>
+        <p:nvSpPr>
+          <p:cNvPr id="6" name="Text 4"/>
+          <p:cNvSpPr/>
+          <p:nvPr/>
+        </p:nvSpPr>
+        <p:spPr>
+          <a:xfrm>
+            <a:off x="548640" y="2560320"/>
+            <a:ext cx="3352800" cy="304800"/>
+          </a:xfrm>
+          <a:prstGeom prst="rect">
+            <a:avLst/>
+          </a:prstGeom>
+          <a:noFill/>
+          <a:ln/>
+        </p:spPr>
+        <p:txBody>
+          <a:bodyPr wrap="square" rtlCol="0" anchor="ctr"/>
+          <a:lstStyle/>
+          <a:p>
+            <a:pPr defTabSz="1219170"/>
+            <a:r>
+              <a:rPr lang="en-US" sz="1333" dirty="0">
+                <a:solidFill>
+                  <a:srgbClr val="5A7A9A"/>
+                </a:solidFill>
+                <a:latin typeface="Calibri" pitchFamily="34" charset="0"/>
+                <a:ea typeface="Calibri" pitchFamily="34" charset="-122"/>
+                <a:cs typeface="Calibri" pitchFamily="34" charset="-120"/>
+              </a:rPr>
+              <a:t>What it is:</a:t>
+            </a:r>
+            <a:endParaRPr lang="en-US" sz="1333" dirty="0">
+              <a:solidFill>
+                <a:prstClr val="black"/>
+              </a:solidFill>
+              <a:latin typeface="Calibri" panose="020F0502020204030204"/>
+            </a:endParaRPr>
+          </a:p>
+        </p:txBody>
+      </p:sp>
+      <p:sp>
+        <p:nvSpPr>
+          <p:cNvPr id="7" name="Text 5"/>
+          <p:cNvSpPr/>
+          <p:nvPr/>
+        </p:nvSpPr>
+        <p:spPr>
+          <a:xfrm>
+            <a:off x="548640" y="2865120"/>
+            <a:ext cx="3352800" cy="914400"/>
+          </a:xfrm>
+          <a:prstGeom prst="rect">
+            <a:avLst/>
+          </a:prstGeom>
+          <a:noFill/>
+          <a:ln/>
+        </p:spPr>
+        <p:txBody>
+          <a:bodyPr wrap="square" rtlCol="0" anchor="t"/>
+          <a:lstStyle/>
+          <a:p>
+            <a:pPr defTabSz="1219170"/>
+            <a:r>
+              <a:rPr lang="en-US" sz="1333" dirty="0">
+                <a:solidFill>
+                  <a:srgbClr val="FFFFFF"/>
+                </a:solidFill>
+                <a:latin typeface="Calibri" pitchFamily="34" charset="0"/>
+                <a:ea typeface="Calibri" pitchFamily="34" charset="-122"/>
+                <a:cs typeface="Calibri" pitchFamily="34" charset="-120"/>
+              </a:rPr>
+              <a:t>A person quietly buys and sells to themselves to make a coin look busier than it really is.</a:t>
+            </a:r>
+            <a:endParaRPr lang="en-US" sz="1333" dirty="0">
+              <a:solidFill>
+                <a:prstClr val="black"/>
+              </a:solidFill>
+              <a:latin typeface="Calibri" panose="020F0502020204030204"/>
+            </a:endParaRPr>
+          </a:p>
+        </p:txBody>
+      </p:sp>
+      <p:sp>
+        <p:nvSpPr>
+          <p:cNvPr id="8" name="Text 6"/>
+          <p:cNvSpPr/>
+          <p:nvPr/>
+        </p:nvSpPr>
+        <p:spPr>
+          <a:xfrm>
+            <a:off x="548640" y="3840480"/>
+            <a:ext cx="3352800" cy="304800"/>
+          </a:xfrm>
+          <a:prstGeom prst="rect">
+            <a:avLst/>
+          </a:prstGeom>
+          <a:noFill/>
+          <a:ln/>
+        </p:spPr>
+        <p:txBody>
+          <a:bodyPr wrap="square" rtlCol="0" anchor="ctr"/>
+          <a:lstStyle/>
+          <a:p>
+            <a:pPr defTabSz="1219170"/>
+            <a:r>
+              <a:rPr lang="en-US" sz="1333" dirty="0">
+                <a:solidFill>
+                  <a:srgbClr val="5A7A9A"/>
+                </a:solidFill>
+                <a:latin typeface="Calibri" pitchFamily="34" charset="0"/>
+                <a:ea typeface="Calibri" pitchFamily="34" charset="-122"/>
+                <a:cs typeface="Calibri" pitchFamily="34" charset="-120"/>
+              </a:rPr>
+              <a:t>Detection:</a:t>
+            </a:r>
+            <a:endParaRPr lang="en-US" sz="1333" dirty="0">
+              <a:solidFill>
+                <a:prstClr val="black"/>
+              </a:solidFill>
+              <a:latin typeface="Calibri" panose="020F0502020204030204"/>
+            </a:endParaRPr>
+          </a:p>
+        </p:txBody>
+      </p:sp>
+      <p:sp>
+        <p:nvSpPr>
+          <p:cNvPr id="9" name="Text 7"/>
+          <p:cNvSpPr/>
+          <p:nvPr/>
+        </p:nvSpPr>
+        <p:spPr>
+          <a:xfrm>
+            <a:off x="548640" y="4120896"/>
+            <a:ext cx="3352800" cy="755904"/>
+          </a:xfrm>
+          <a:prstGeom prst="rect">
+            <a:avLst/>
+          </a:prstGeom>
+          <a:noFill/>
+          <a:ln/>
+        </p:spPr>
+        <p:txBody>
+          <a:bodyPr wrap="square" rtlCol="0" anchor="t"/>
+          <a:lstStyle/>
+          <a:p>
+            <a:pPr defTabSz="1219170"/>
+            <a:r>
+              <a:rPr lang="en-US" sz="1333" dirty="0">
+                <a:solidFill>
+                  <a:srgbClr val="8FA8C8"/>
+                </a:solidFill>
+                <a:latin typeface="Calibri" pitchFamily="34" charset="0"/>
+                <a:ea typeface="Calibri" pitchFamily="34" charset="-122"/>
+                <a:cs typeface="Calibri" pitchFamily="34" charset="-120"/>
+              </a:rPr>
+              <a:t>Price swings ±0.3% AND volume is 1.5× the rolling average across last 60 trades.</a:t>
+            </a:r>
+            <a:endParaRPr lang="en-US" sz="1333" dirty="0">
+              <a:solidFill>
+                <a:prstClr val="black"/>
+              </a:solidFill>
+              <a:latin typeface="Calibri" panose="020F0502020204030204"/>
+            </a:endParaRPr>
+          </a:p>
+        </p:txBody>
+      </p:sp>
+      <p:sp>
+        <p:nvSpPr>
+          <p:cNvPr id="10" name="Text 8"/>
+          <p:cNvSpPr/>
+          <p:nvPr/>
+        </p:nvSpPr>
+        <p:spPr>
+          <a:xfrm>
+            <a:off x="548640" y="4901184"/>
+            <a:ext cx="3352800" cy="304800"/>
+          </a:xfrm>
+          <a:prstGeom prst="rect">
+            <a:avLst/>
+          </a:prstGeom>
+          <a:noFill/>
+          <a:ln/>
+        </p:spPr>
+        <p:txBody>
+          <a:bodyPr wrap="square" rtlCol="0" anchor="ctr"/>
+          <a:lstStyle/>
+          <a:p>
+            <a:pPr defTabSz="1219170"/>
+            <a:r>
+              <a:rPr lang="en-US" sz="1333" dirty="0">
+                <a:solidFill>
+                  <a:srgbClr val="5A7A9A"/>
+                </a:solidFill>
+                <a:latin typeface="Calibri" pitchFamily="34" charset="0"/>
+                <a:ea typeface="Calibri" pitchFamily="34" charset="-122"/>
+                <a:cs typeface="Calibri" pitchFamily="34" charset="-120"/>
+              </a:rPr>
+              <a:t>Flink state:</a:t>
+            </a:r>
+            <a:endParaRPr lang="en-US" sz="1333" dirty="0">
+              <a:solidFill>
+                <a:prstClr val="black"/>
+              </a:solidFill>
+              <a:latin typeface="Calibri" panose="020F0502020204030204"/>
+            </a:endParaRPr>
+          </a:p>
+        </p:txBody>
+      </p:sp>
+      <p:sp>
+        <p:nvSpPr>
+          <p:cNvPr id="11" name="Text 9"/>
+          <p:cNvSpPr/>
+          <p:nvPr/>
+        </p:nvSpPr>
+        <p:spPr>
+          <a:xfrm>
+            <a:off x="548640" y="5181600"/>
+            <a:ext cx="3352800" cy="877824"/>
+          </a:xfrm>
+          <a:prstGeom prst="rect">
+            <a:avLst/>
+          </a:prstGeom>
+          <a:noFill/>
+          <a:ln/>
+        </p:spPr>
+        <p:txBody>
+          <a:bodyPr wrap="square" rtlCol="0" anchor="t"/>
+          <a:lstStyle/>
+          <a:p>
+            <a:pPr defTabSz="1219170"/>
+            <a:r>
+              <a:rPr lang="en-US" sz="1333" dirty="0">
+                <a:solidFill>
+                  <a:srgbClr val="8FA8C8"/>
+                </a:solidFill>
+                <a:latin typeface="Calibri" pitchFamily="34" charset="0"/>
+                <a:ea typeface="Calibri" pitchFamily="34" charset="-122"/>
+                <a:cs typeface="Calibri" pitchFamily="34" charset="-120"/>
+              </a:rPr>
+              <a:t>ListState — rolling price and volume history, capped at 60 entries per coin.</a:t>
+            </a:r>
+            <a:endParaRPr lang="en-US" sz="1333" dirty="0">
+              <a:solidFill>
+                <a:prstClr val="black"/>
+              </a:solidFill>
+              <a:latin typeface="Calibri" panose="020F0502020204030204"/>
+            </a:endParaRPr>
+          </a:p>
+        </p:txBody>
+      </p:sp>
+      <p:sp>
+        <p:nvSpPr>
+          <p:cNvPr id="12" name="Shape 10"/>
+          <p:cNvSpPr/>
+          <p:nvPr/>
+        </p:nvSpPr>
+        <p:spPr>
+          <a:xfrm>
+            <a:off x="4267200" y="1767840"/>
+            <a:ext cx="3718560" cy="4657344"/>
+          </a:xfrm>
+          <a:prstGeom prst="roundRect">
+            <a:avLst>
+              <a:gd name="adj" fmla="val 2623"/>
+            </a:avLst>
+          </a:prstGeom>
+          <a:solidFill>
+            <a:srgbClr val="1A2840"/>
+          </a:solidFill>
+          <a:ln w="6350">
+            <a:solidFill>
+              <a:srgbClr val="FF5252"/>
+            </a:solidFill>
+            <a:prstDash val="solid"/>
+          </a:ln>
+        </p:spPr>
+        <p:txBody>
+          <a:bodyPr/>
+          <a:lstStyle/>
+          <a:p>
+            <a:pPr defTabSz="1219170"/>
+            <a:endParaRPr lang="en-IN" sz="2400">
+              <a:solidFill>
+                <a:prstClr val="black"/>
+              </a:solidFill>
+              <a:latin typeface="Calibri" panose="020F0502020204030204"/>
+            </a:endParaRPr>
+          </a:p>
+        </p:txBody>
+      </p:sp>
+      <p:sp>
+        <p:nvSpPr>
+          <p:cNvPr id="13" name="Text 11"/>
+          <p:cNvSpPr/>
+          <p:nvPr/>
+        </p:nvSpPr>
+        <p:spPr>
+          <a:xfrm>
+            <a:off x="4450080" y="1926336"/>
+            <a:ext cx="3352800" cy="548640"/>
+          </a:xfrm>
+          <a:prstGeom prst="rect">
+            <a:avLst/>
+          </a:prstGeom>
+          <a:noFill/>
+          <a:ln/>
+        </p:spPr>
+        <p:txBody>
+          <a:bodyPr wrap="square" rtlCol="0" anchor="ctr"/>
+          <a:lstStyle/>
+          <a:p>
+            <a:pPr defTabSz="1219170"/>
+            <a:r>
+              <a:rPr lang="en-US" sz="1867" b="1" dirty="0">
+                <a:solidFill>
+                  <a:srgbClr val="FF5252"/>
+                </a:solidFill>
+                <a:latin typeface="Calibri" pitchFamily="34" charset="0"/>
+                <a:ea typeface="Calibri" pitchFamily="34" charset="-122"/>
+                <a:cs typeface="Calibri" pitchFamily="34" charset="-120"/>
+              </a:rPr>
+              <a:t>📈  Pump &amp; dump</a:t>
+            </a:r>
+            <a:endParaRPr lang="en-US" sz="1867" dirty="0">
+              <a:solidFill>
+                <a:prstClr val="black"/>
+              </a:solidFill>
+              <a:latin typeface="Calibri" panose="020F0502020204030204"/>
+            </a:endParaRPr>
+          </a:p>
+        </p:txBody>
+      </p:sp>
+      <p:sp>
+        <p:nvSpPr>
+          <p:cNvPr id="14" name="Text 12"/>
+          <p:cNvSpPr/>
+          <p:nvPr/>
+        </p:nvSpPr>
+        <p:spPr>
+          <a:xfrm>
+            <a:off x="4450080" y="2560320"/>
+            <a:ext cx="3352800" cy="304800"/>
+          </a:xfrm>
+          <a:prstGeom prst="rect">
+            <a:avLst/>
+          </a:prstGeom>
+          <a:noFill/>
+          <a:ln/>
+        </p:spPr>
+        <p:txBody>
+          <a:bodyPr wrap="square" rtlCol="0" anchor="ctr"/>
+          <a:lstStyle/>
+          <a:p>
+            <a:pPr defTabSz="1219170"/>
+            <a:r>
+              <a:rPr lang="en-US" sz="1333" dirty="0">
+                <a:solidFill>
+                  <a:srgbClr val="5A7A9A"/>
+                </a:solidFill>
+                <a:latin typeface="Calibri" pitchFamily="34" charset="0"/>
+                <a:ea typeface="Calibri" pitchFamily="34" charset="-122"/>
+                <a:cs typeface="Calibri" pitchFamily="34" charset="-120"/>
+              </a:rPr>
+              <a:t>What it is:</a:t>
+            </a:r>
+            <a:endParaRPr lang="en-US" sz="1333" dirty="0">
+              <a:solidFill>
+                <a:prstClr val="black"/>
+              </a:solidFill>
+              <a:latin typeface="Calibri" panose="020F0502020204030204"/>
+            </a:endParaRPr>
+          </a:p>
+        </p:txBody>
+      </p:sp>
+      <p:sp>
+        <p:nvSpPr>
+          <p:cNvPr id="15" name="Text 13"/>
+          <p:cNvSpPr/>
+          <p:nvPr/>
+        </p:nvSpPr>
+        <p:spPr>
+          <a:xfrm>
+            <a:off x="4450080" y="2865120"/>
+            <a:ext cx="3352800" cy="914400"/>
+          </a:xfrm>
+          <a:prstGeom prst="rect">
+            <a:avLst/>
+          </a:prstGeom>
+          <a:noFill/>
+          <a:ln/>
+        </p:spPr>
+        <p:txBody>
+          <a:bodyPr wrap="square" rtlCol="0" anchor="t"/>
+          <a:lstStyle/>
+          <a:p>
+            <a:pPr defTabSz="1219170"/>
+            <a:r>
+              <a:rPr lang="en-US" sz="1333" dirty="0">
+                <a:solidFill>
+                  <a:srgbClr val="FFFFFF"/>
+                </a:solidFill>
+                <a:latin typeface="Calibri" pitchFamily="34" charset="0"/>
+                <a:ea typeface="Calibri" pitchFamily="34" charset="-122"/>
+                <a:cs typeface="Calibri" pitchFamily="34" charset="-120"/>
+              </a:rPr>
+              <a:t>A group pushes a price up fast, then sells everything at the top, leaving buyers with losses.</a:t>
+            </a:r>
+            <a:endParaRPr lang="en-US" sz="1333" dirty="0">
+              <a:solidFill>
+                <a:prstClr val="black"/>
+              </a:solidFill>
+              <a:latin typeface="Calibri" panose="020F0502020204030204"/>
+            </a:endParaRPr>
+          </a:p>
+        </p:txBody>
+      </p:sp>
+      <p:sp>
+        <p:nvSpPr>
+          <p:cNvPr id="16" name="Text 14"/>
+          <p:cNvSpPr/>
+          <p:nvPr/>
+        </p:nvSpPr>
+        <p:spPr>
+          <a:xfrm>
+            <a:off x="4450080" y="3840480"/>
+            <a:ext cx="3352800" cy="304800"/>
+          </a:xfrm>
+          <a:prstGeom prst="rect">
+            <a:avLst/>
+          </a:prstGeom>
+          <a:noFill/>
+          <a:ln/>
+        </p:spPr>
+        <p:txBody>
+          <a:bodyPr wrap="square" rtlCol="0" anchor="ctr"/>
+          <a:lstStyle/>
+          <a:p>
+            <a:pPr defTabSz="1219170"/>
+            <a:r>
+              <a:rPr lang="en-US" sz="1333" dirty="0">
+                <a:solidFill>
+                  <a:srgbClr val="5A7A9A"/>
+                </a:solidFill>
+                <a:latin typeface="Calibri" pitchFamily="34" charset="0"/>
+                <a:ea typeface="Calibri" pitchFamily="34" charset="-122"/>
+                <a:cs typeface="Calibri" pitchFamily="34" charset="-120"/>
+              </a:rPr>
+              <a:t>Detection:</a:t>
+            </a:r>
+            <a:endParaRPr lang="en-US" sz="1333" dirty="0">
+              <a:solidFill>
+                <a:prstClr val="black"/>
+              </a:solidFill>
+              <a:latin typeface="Calibri" panose="020F0502020204030204"/>
+            </a:endParaRPr>
+          </a:p>
+        </p:txBody>
+      </p:sp>
+      <p:sp>
+        <p:nvSpPr>
+          <p:cNvPr id="17" name="Text 15"/>
+          <p:cNvSpPr/>
+          <p:nvPr/>
+        </p:nvSpPr>
+        <p:spPr>
+          <a:xfrm>
+            <a:off x="4450080" y="4120896"/>
+            <a:ext cx="3352800" cy="755904"/>
+          </a:xfrm>
+          <a:prstGeom prst="rect">
+            <a:avLst/>
+          </a:prstGeom>
+          <a:noFill/>
+          <a:ln/>
+        </p:spPr>
+        <p:txBody>
+          <a:bodyPr wrap="square" rtlCol="0" anchor="t"/>
+          <a:lstStyle/>
+          <a:p>
+            <a:pPr defTabSz="1219170"/>
+            <a:r>
+              <a:rPr lang="en-US" sz="1333" dirty="0">
+                <a:solidFill>
+                  <a:srgbClr val="8FA8C8"/>
+                </a:solidFill>
+                <a:latin typeface="Calibri" pitchFamily="34" charset="0"/>
+                <a:ea typeface="Calibri" pitchFamily="34" charset="-122"/>
+                <a:cs typeface="Calibri" pitchFamily="34" charset="-120"/>
+              </a:rPr>
+              <a:t>Price rises 0.4%, then drops 0.3% from the peak within 4 minutes.</a:t>
+            </a:r>
+            <a:endParaRPr lang="en-US" sz="1333" dirty="0">
+              <a:solidFill>
+                <a:prstClr val="black"/>
+              </a:solidFill>
+              <a:latin typeface="Calibri" panose="020F0502020204030204"/>
+            </a:endParaRPr>
+          </a:p>
+        </p:txBody>
+      </p:sp>
+      <p:sp>
+        <p:nvSpPr>
+          <p:cNvPr id="18" name="Text 16"/>
+          <p:cNvSpPr/>
+          <p:nvPr/>
+        </p:nvSpPr>
+        <p:spPr>
+          <a:xfrm>
+            <a:off x="4450080" y="4901184"/>
+            <a:ext cx="3352800" cy="304800"/>
+          </a:xfrm>
+          <a:prstGeom prst="rect">
+            <a:avLst/>
+          </a:prstGeom>
+          <a:noFill/>
+          <a:ln/>
+        </p:spPr>
+        <p:txBody>
+          <a:bodyPr wrap="square" rtlCol="0" anchor="ctr"/>
+          <a:lstStyle/>
+          <a:p>
+            <a:pPr defTabSz="1219170"/>
+            <a:r>
+              <a:rPr lang="en-US" sz="1333" dirty="0">
+                <a:solidFill>
+                  <a:srgbClr val="5A7A9A"/>
+                </a:solidFill>
+                <a:latin typeface="Calibri" pitchFamily="34" charset="0"/>
+                <a:ea typeface="Calibri" pitchFamily="34" charset="-122"/>
+                <a:cs typeface="Calibri" pitchFamily="34" charset="-120"/>
+              </a:rPr>
+              <a:t>Flink state:</a:t>
+            </a:r>
+            <a:endParaRPr lang="en-US" sz="1333" dirty="0">
+              <a:solidFill>
+                <a:prstClr val="black"/>
+              </a:solidFill>
+              <a:latin typeface="Calibri" panose="020F0502020204030204"/>
+            </a:endParaRPr>
+          </a:p>
+        </p:txBody>
+      </p:sp>
+      <p:sp>
+        <p:nvSpPr>
+          <p:cNvPr id="19" name="Text 17"/>
+          <p:cNvSpPr/>
+          <p:nvPr/>
+        </p:nvSpPr>
+        <p:spPr>
+          <a:xfrm>
+            <a:off x="4450080" y="5181600"/>
+            <a:ext cx="3352800" cy="877824"/>
+          </a:xfrm>
+          <a:prstGeom prst="rect">
+            <a:avLst/>
+          </a:prstGeom>
+          <a:noFill/>
+          <a:ln/>
+        </p:spPr>
+        <p:txBody>
+          <a:bodyPr wrap="square" rtlCol="0" anchor="t"/>
+          <a:lstStyle/>
+          <a:p>
+            <a:pPr defTabSz="1219170"/>
+            <a:r>
+              <a:rPr lang="en-US" sz="1333" dirty="0">
+                <a:solidFill>
+                  <a:srgbClr val="8FA8C8"/>
+                </a:solidFill>
+                <a:latin typeface="Calibri" pitchFamily="34" charset="0"/>
+                <a:ea typeface="Calibri" pitchFamily="34" charset="-122"/>
+                <a:cs typeface="Calibri" pitchFamily="34" charset="-120"/>
+              </a:rPr>
+              <a:t>ValueState — 3-phase state machine: WATCHING → PUMP_CONFIRMED → ALERT.</a:t>
+            </a:r>
+            <a:endParaRPr lang="en-US" sz="1333" dirty="0">
+              <a:solidFill>
+                <a:prstClr val="black"/>
+              </a:solidFill>
+              <a:latin typeface="Calibri" panose="020F0502020204030204"/>
+            </a:endParaRPr>
+          </a:p>
+        </p:txBody>
+      </p:sp>
+      <p:sp>
+        <p:nvSpPr>
+          <p:cNvPr id="20" name="Shape 18"/>
+          <p:cNvSpPr/>
+          <p:nvPr/>
+        </p:nvSpPr>
+        <p:spPr>
+          <a:xfrm>
+            <a:off x="8168640" y="1767840"/>
+            <a:ext cx="3718560" cy="4657344"/>
+          </a:xfrm>
+          <a:prstGeom prst="roundRect">
+            <a:avLst>
+              <a:gd name="adj" fmla="val 2623"/>
             </a:avLst>
           </a:prstGeom>
           <a:solidFill>
@@ -6115,14 +6569,14 @@
       </p:sp>
       <p:sp>
         <p:nvSpPr>
-          <p:cNvPr id="6" name="Text 4"/>
+          <p:cNvPr id="21" name="Text 19"/>
           <p:cNvSpPr/>
           <p:nvPr/>
         </p:nvSpPr>
         <p:spPr>
           <a:xfrm>
-            <a:off x="853440" y="2584704"/>
-            <a:ext cx="4998720" cy="463296"/>
+            <a:off x="8351520" y="1926336"/>
+            <a:ext cx="3352800" cy="548640"/>
           </a:xfrm>
           <a:prstGeom prst="rect">
             <a:avLst/>
@@ -6136,7 +6590,7 @@
           <a:p>
             <a:pPr defTabSz="1219170"/>
             <a:r>
-              <a:rPr lang="en-US" sz="1733" b="1" dirty="0">
+              <a:rPr lang="en-US" sz="1867" b="1" dirty="0">
                 <a:solidFill>
                   <a:srgbClr val="4FC3F7"/>
                 </a:solidFill>
@@ -6144,9 +6598,9 @@
                 <a:ea typeface="Calibri" pitchFamily="34" charset="-122"/>
                 <a:cs typeface="Calibri" pitchFamily="34" charset="-120"/>
               </a:rPr>
-              <a:t>1-min window</a:t>
-            </a:r>
-            <a:endParaRPr lang="en-US" sz="1733" dirty="0">
+              <a:t>🌊  Volume spike</a:t>
+            </a:r>
+            <a:endParaRPr lang="en-US" sz="1867" dirty="0">
               <a:solidFill>
                 <a:prstClr val="black"/>
               </a:solidFill>
@@ -6157,14 +6611,14 @@
       </p:sp>
       <p:sp>
         <p:nvSpPr>
-          <p:cNvPr id="7" name="Text 5"/>
+          <p:cNvPr id="22" name="Text 20"/>
           <p:cNvSpPr/>
           <p:nvPr/>
         </p:nvSpPr>
         <p:spPr>
           <a:xfrm>
-            <a:off x="853440" y="3108960"/>
-            <a:ext cx="4998720" cy="365760"/>
+            <a:off x="8351520" y="2560320"/>
+            <a:ext cx="3352800" cy="304800"/>
           </a:xfrm>
           <a:prstGeom prst="rect">
             <a:avLst/>
@@ -6178,57 +6632,15 @@
           <a:p>
             <a:pPr defTabSz="1219170"/>
             <a:r>
-              <a:rPr lang="en-US" sz="1467" dirty="0">
-                <a:solidFill>
-                  <a:srgbClr val="8FA8C8"/>
+              <a:rPr lang="en-US" sz="1333" dirty="0">
+                <a:solidFill>
+                  <a:srgbClr val="5A7A9A"/>
                 </a:solidFill>
                 <a:latin typeface="Calibri" pitchFamily="34" charset="0"/>
                 <a:ea typeface="Calibri" pitchFamily="34" charset="-122"/>
                 <a:cs typeface="Calibri" pitchFamily="34" charset="-120"/>
               </a:rPr>
-              <a:t>open · high · low · close · volume · count</a:t>
-            </a:r>
-            <a:endParaRPr lang="en-US" sz="1467" dirty="0">
-              <a:solidFill>
-                <a:prstClr val="black"/>
-              </a:solidFill>
-              <a:latin typeface="Calibri" panose="020F0502020204030204"/>
-            </a:endParaRPr>
-          </a:p>
-        </p:txBody>
-      </p:sp>
-      <p:sp>
-        <p:nvSpPr>
-          <p:cNvPr id="8" name="Text 6"/>
-          <p:cNvSpPr/>
-          <p:nvPr/>
-        </p:nvSpPr>
-        <p:spPr>
-          <a:xfrm>
-            <a:off x="853440" y="3511296"/>
-            <a:ext cx="4998720" cy="365760"/>
-          </a:xfrm>
-          <a:prstGeom prst="rect">
-            <a:avLst/>
-          </a:prstGeom>
-          <a:noFill/>
-          <a:ln/>
-        </p:spPr>
-        <p:txBody>
-          <a:bodyPr wrap="square" rtlCol="0" anchor="ctr"/>
-          <a:lstStyle/>
-          <a:p>
-            <a:pPr defTabSz="1219170"/>
-            <a:r>
-              <a:rPr lang="en-US" sz="1333" i="1" dirty="0">
-                <a:solidFill>
-                  <a:srgbClr val="5A7A9A"/>
-                </a:solidFill>
-                <a:latin typeface="Calibri" pitchFamily="34" charset="0"/>
-                <a:ea typeface="Calibri" pitchFamily="34" charset="-122"/>
-                <a:cs typeface="Calibri" pitchFamily="34" charset="-120"/>
-              </a:rPr>
-              <a:t>→ Grafana candlestick chart</a:t>
+              <a:t>What it is:</a:t>
             </a:r>
             <a:endParaRPr lang="en-US" sz="1333" dirty="0">
               <a:solidFill>
@@ -6241,54 +6653,14 @@
       </p:sp>
       <p:sp>
         <p:nvSpPr>
-          <p:cNvPr id="9" name="Shape 7"/>
+          <p:cNvPr id="23" name="Text 21"/>
           <p:cNvSpPr/>
           <p:nvPr/>
         </p:nvSpPr>
         <p:spPr>
           <a:xfrm>
-            <a:off x="6339840" y="2438400"/>
-            <a:ext cx="5364480" cy="1584960"/>
-          </a:xfrm>
-          <a:prstGeom prst="roundRect">
-            <a:avLst>
-              <a:gd name="adj" fmla="val 6154"/>
-            </a:avLst>
-          </a:prstGeom>
-          <a:solidFill>
-            <a:srgbClr val="1A2840"/>
-          </a:solidFill>
-          <a:ln w="6350">
-            <a:solidFill>
-              <a:srgbClr val="26A69A"/>
-            </a:solidFill>
-            <a:prstDash val="solid"/>
-          </a:ln>
-        </p:spPr>
-        <p:txBody>
-          <a:bodyPr/>
-          <a:lstStyle/>
-          <a:p>
-            <a:pPr defTabSz="1219170"/>
-            <a:endParaRPr lang="en-IN" sz="2400">
-              <a:solidFill>
-                <a:prstClr val="black"/>
-              </a:solidFill>
-              <a:latin typeface="Calibri" panose="020F0502020204030204"/>
-            </a:endParaRPr>
-          </a:p>
-        </p:txBody>
-      </p:sp>
-      <p:sp>
-        <p:nvSpPr>
-          <p:cNvPr id="10" name="Text 8"/>
-          <p:cNvSpPr/>
-          <p:nvPr/>
-        </p:nvSpPr>
-        <p:spPr>
-          <a:xfrm>
-            <a:off x="6522720" y="2584704"/>
-            <a:ext cx="4998720" cy="463296"/>
+            <a:off x="8351520" y="2865120"/>
+            <a:ext cx="3352800" cy="914400"/>
           </a:xfrm>
           <a:prstGeom prst="rect">
             <a:avLst/>
@@ -6297,104 +6669,20 @@
           <a:ln/>
         </p:spPr>
         <p:txBody>
-          <a:bodyPr wrap="square" rtlCol="0" anchor="ctr"/>
+          <a:bodyPr wrap="square" rtlCol="0" anchor="t"/>
           <a:lstStyle/>
           <a:p>
             <a:pPr defTabSz="1219170"/>
             <a:r>
-              <a:rPr lang="en-US" sz="1733" b="1" dirty="0">
-                <a:solidFill>
-                  <a:srgbClr val="26A69A"/>
+              <a:rPr lang="en-US" sz="1333" dirty="0">
+                <a:solidFill>
+                  <a:srgbClr val="FFFFFF"/>
                 </a:solidFill>
                 <a:latin typeface="Calibri" pitchFamily="34" charset="0"/>
                 <a:ea typeface="Calibri" pitchFamily="34" charset="-122"/>
                 <a:cs typeface="Calibri" pitchFamily="34" charset="-120"/>
               </a:rPr>
-              <a:t>5-min window</a:t>
-            </a:r>
-            <a:endParaRPr lang="en-US" sz="1733" dirty="0">
-              <a:solidFill>
-                <a:prstClr val="black"/>
-              </a:solidFill>
-              <a:latin typeface="Calibri" panose="020F0502020204030204"/>
-            </a:endParaRPr>
-          </a:p>
-        </p:txBody>
-      </p:sp>
-      <p:sp>
-        <p:nvSpPr>
-          <p:cNvPr id="11" name="Text 9"/>
-          <p:cNvSpPr/>
-          <p:nvPr/>
-        </p:nvSpPr>
-        <p:spPr>
-          <a:xfrm>
-            <a:off x="6522720" y="3108960"/>
-            <a:ext cx="4998720" cy="365760"/>
-          </a:xfrm>
-          <a:prstGeom prst="rect">
-            <a:avLst/>
-          </a:prstGeom>
-          <a:noFill/>
-          <a:ln/>
-        </p:spPr>
-        <p:txBody>
-          <a:bodyPr wrap="square" rtlCol="0" anchor="ctr"/>
-          <a:lstStyle/>
-          <a:p>
-            <a:pPr defTabSz="1219170"/>
-            <a:r>
-              <a:rPr lang="en-US" sz="1467" dirty="0">
-                <a:solidFill>
-                  <a:srgbClr val="8FA8C8"/>
-                </a:solidFill>
-                <a:latin typeface="Calibri" pitchFamily="34" charset="0"/>
-                <a:ea typeface="Calibri" pitchFamily="34" charset="-122"/>
-                <a:cs typeface="Calibri" pitchFamily="34" charset="-120"/>
-              </a:rPr>
-              <a:t>open · high · low · close · volume · count</a:t>
-            </a:r>
-            <a:endParaRPr lang="en-US" sz="1467" dirty="0">
-              <a:solidFill>
-                <a:prstClr val="black"/>
-              </a:solidFill>
-              <a:latin typeface="Calibri" panose="020F0502020204030204"/>
-            </a:endParaRPr>
-          </a:p>
-        </p:txBody>
-      </p:sp>
-      <p:sp>
-        <p:nvSpPr>
-          <p:cNvPr id="12" name="Text 10"/>
-          <p:cNvSpPr/>
-          <p:nvPr/>
-        </p:nvSpPr>
-        <p:spPr>
-          <a:xfrm>
-            <a:off x="6522720" y="3511296"/>
-            <a:ext cx="4998720" cy="365760"/>
-          </a:xfrm>
-          <a:prstGeom prst="rect">
-            <a:avLst/>
-          </a:prstGeom>
-          <a:noFill/>
-          <a:ln/>
-        </p:spPr>
-        <p:txBody>
-          <a:bodyPr wrap="square" rtlCol="0" anchor="ctr"/>
-          <a:lstStyle/>
-          <a:p>
-            <a:pPr defTabSz="1219170"/>
-            <a:r>
-              <a:rPr lang="en-US" sz="1333" i="1" dirty="0">
-                <a:solidFill>
-                  <a:srgbClr val="5A7A9A"/>
-                </a:solidFill>
-                <a:latin typeface="Calibri" pitchFamily="34" charset="0"/>
-                <a:ea typeface="Calibri" pitchFamily="34" charset="-122"/>
-                <a:cs typeface="Calibri" pitchFamily="34" charset="-120"/>
-              </a:rPr>
-              <a:t>→ Broader trend analysis</a:t>
+              <a:t>A sudden flood of trades — can signal the beginning of a flash crash or manipulation.</a:t>
             </a:r>
             <a:endParaRPr lang="en-US" sz="1333" dirty="0">
               <a:solidFill>
@@ -6407,14 +6695,14 @@
       </p:sp>
       <p:sp>
         <p:nvSpPr>
-          <p:cNvPr id="13" name="Text 11"/>
+          <p:cNvPr id="24" name="Text 22"/>
           <p:cNvSpPr/>
           <p:nvPr/>
         </p:nvSpPr>
         <p:spPr>
           <a:xfrm>
-            <a:off x="670560" y="4206240"/>
-            <a:ext cx="10972800" cy="426720"/>
+            <a:off x="8351520" y="3840480"/>
+            <a:ext cx="3352800" cy="304800"/>
           </a:xfrm>
           <a:prstGeom prst="rect">
             <a:avLst/>
@@ -6423,144 +6711,20 @@
           <a:ln/>
         </p:spPr>
         <p:txBody>
-          <a:bodyPr wrap="square" rtlCol="0" anchor="t"/>
+          <a:bodyPr wrap="square" rtlCol="0" anchor="ctr"/>
           <a:lstStyle/>
           <a:p>
             <a:pPr defTabSz="1219170"/>
             <a:r>
-              <a:rPr lang="en-US" sz="1467" dirty="0">
-                <a:solidFill>
-                  <a:srgbClr val="FFB300"/>
+              <a:rPr lang="en-US" sz="1333" dirty="0">
+                <a:solidFill>
+                  <a:srgbClr val="5A7A9A"/>
                 </a:solidFill>
                 <a:latin typeface="Calibri" pitchFamily="34" charset="0"/>
                 <a:ea typeface="Calibri" pitchFamily="34" charset="-122"/>
                 <a:cs typeface="Calibri" pitchFamily="34" charset="-120"/>
               </a:rPr>
-              <a:t>The Grafana dashboard has a $candle_size dropdown — switch between 1-minute and 5-minute candles without any code change.</a:t>
-            </a:r>
-            <a:endParaRPr lang="en-US" sz="1467" dirty="0">
-              <a:solidFill>
-                <a:prstClr val="black"/>
-              </a:solidFill>
-              <a:latin typeface="Calibri" panose="020F0502020204030204"/>
-            </a:endParaRPr>
-          </a:p>
-        </p:txBody>
-      </p:sp>
-      <p:sp>
-        <p:nvSpPr>
-          <p:cNvPr id="14" name="Shape 12"/>
-          <p:cNvSpPr/>
-          <p:nvPr/>
-        </p:nvSpPr>
-        <p:spPr>
-          <a:xfrm>
-            <a:off x="670560" y="4779264"/>
-            <a:ext cx="3535680" cy="1609344"/>
-          </a:xfrm>
-          <a:prstGeom prst="roundRect">
-            <a:avLst>
-              <a:gd name="adj" fmla="val 6061"/>
-            </a:avLst>
-          </a:prstGeom>
-          <a:solidFill>
-            <a:srgbClr val="1A2840"/>
-          </a:solidFill>
-          <a:ln w="6350">
-            <a:solidFill>
-              <a:srgbClr val="00C896"/>
-            </a:solidFill>
-            <a:prstDash val="solid"/>
-          </a:ln>
-        </p:spPr>
-        <p:txBody>
-          <a:bodyPr/>
-          <a:lstStyle/>
-          <a:p>
-            <a:pPr defTabSz="1219170"/>
-            <a:endParaRPr lang="en-IN" sz="2400">
-              <a:solidFill>
-                <a:prstClr val="black"/>
-              </a:solidFill>
-              <a:latin typeface="Calibri" panose="020F0502020204030204"/>
-            </a:endParaRPr>
-          </a:p>
-        </p:txBody>
-      </p:sp>
-      <p:sp>
-        <p:nvSpPr>
-          <p:cNvPr id="15" name="Text 13"/>
-          <p:cNvSpPr/>
-          <p:nvPr/>
-        </p:nvSpPr>
-        <p:spPr>
-          <a:xfrm>
-            <a:off x="853440" y="4925568"/>
-            <a:ext cx="3169920" cy="426720"/>
-          </a:xfrm>
-          <a:prstGeom prst="rect">
-            <a:avLst/>
-          </a:prstGeom>
-          <a:noFill/>
-          <a:ln/>
-        </p:spPr>
-        <p:txBody>
-          <a:bodyPr wrap="square" rtlCol="0" anchor="ctr"/>
-          <a:lstStyle/>
-          <a:p>
-            <a:pPr defTabSz="1219170"/>
-            <a:r>
-              <a:rPr lang="en-US" sz="1467" b="1" dirty="0">
-                <a:solidFill>
-                  <a:srgbClr val="00C896"/>
-                </a:solidFill>
-                <a:latin typeface="Calibri" pitchFamily="34" charset="0"/>
-                <a:ea typeface="Calibri" pitchFamily="34" charset="-122"/>
-                <a:cs typeface="Calibri" pitchFamily="34" charset="-120"/>
-              </a:rPr>
-              <a:t>Green candle</a:t>
-            </a:r>
-            <a:endParaRPr lang="en-US" sz="1467" dirty="0">
-              <a:solidFill>
-                <a:prstClr val="black"/>
-              </a:solidFill>
-              <a:latin typeface="Calibri" panose="020F0502020204030204"/>
-            </a:endParaRPr>
-          </a:p>
-        </p:txBody>
-      </p:sp>
-      <p:sp>
-        <p:nvSpPr>
-          <p:cNvPr id="16" name="Text 14"/>
-          <p:cNvSpPr/>
-          <p:nvPr/>
-        </p:nvSpPr>
-        <p:spPr>
-          <a:xfrm>
-            <a:off x="853440" y="5413248"/>
-            <a:ext cx="3169920" cy="914400"/>
-          </a:xfrm>
-          <a:prstGeom prst="rect">
-            <a:avLst/>
-          </a:prstGeom>
-          <a:noFill/>
-          <a:ln/>
-        </p:spPr>
-        <p:txBody>
-          <a:bodyPr wrap="square" rtlCol="0" anchor="t"/>
-          <a:lstStyle/>
-          <a:p>
-            <a:pPr defTabSz="1219170"/>
-            <a:r>
-              <a:rPr lang="en-US" sz="1333" dirty="0">
-                <a:solidFill>
-                  <a:srgbClr val="8FA8C8"/>
-                </a:solidFill>
-                <a:latin typeface="Calibri" pitchFamily="34" charset="0"/>
-                <a:ea typeface="Calibri" pitchFamily="34" charset="-122"/>
-                <a:cs typeface="Calibri" pitchFamily="34" charset="-120"/>
-              </a:rPr>
-              <a:t>Close price &gt; open price — buyers were in control that minute</a:t>
+              <a:t>Detection:</a:t>
             </a:r>
             <a:endParaRPr lang="en-US" sz="1333" dirty="0">
               <a:solidFill>
@@ -6573,54 +6737,14 @@
       </p:sp>
       <p:sp>
         <p:nvSpPr>
-          <p:cNvPr id="17" name="Shape 15"/>
+          <p:cNvPr id="25" name="Text 23"/>
           <p:cNvSpPr/>
           <p:nvPr/>
         </p:nvSpPr>
         <p:spPr>
           <a:xfrm>
-            <a:off x="4450080" y="4779264"/>
-            <a:ext cx="3535680" cy="1609344"/>
-          </a:xfrm>
-          <a:prstGeom prst="roundRect">
-            <a:avLst>
-              <a:gd name="adj" fmla="val 6061"/>
-            </a:avLst>
-          </a:prstGeom>
-          <a:solidFill>
-            <a:srgbClr val="1A2840"/>
-          </a:solidFill>
-          <a:ln w="6350">
-            <a:solidFill>
-              <a:srgbClr val="FF5252"/>
-            </a:solidFill>
-            <a:prstDash val="solid"/>
-          </a:ln>
-        </p:spPr>
-        <p:txBody>
-          <a:bodyPr/>
-          <a:lstStyle/>
-          <a:p>
-            <a:pPr defTabSz="1219170"/>
-            <a:endParaRPr lang="en-IN" sz="2400">
-              <a:solidFill>
-                <a:prstClr val="black"/>
-              </a:solidFill>
-              <a:latin typeface="Calibri" panose="020F0502020204030204"/>
-            </a:endParaRPr>
-          </a:p>
-        </p:txBody>
-      </p:sp>
-      <p:sp>
-        <p:nvSpPr>
-          <p:cNvPr id="18" name="Text 16"/>
-          <p:cNvSpPr/>
-          <p:nvPr/>
-        </p:nvSpPr>
-        <p:spPr>
-          <a:xfrm>
-            <a:off x="4632960" y="4925568"/>
-            <a:ext cx="3169920" cy="426720"/>
+            <a:off x="8351520" y="4120896"/>
+            <a:ext cx="3352800" cy="755904"/>
           </a:xfrm>
           <a:prstGeom prst="rect">
             <a:avLst/>
@@ -6629,62 +6753,20 @@
           <a:ln/>
         </p:spPr>
         <p:txBody>
-          <a:bodyPr wrap="square" rtlCol="0" anchor="ctr"/>
+          <a:bodyPr wrap="square" rtlCol="0" anchor="t"/>
           <a:lstStyle/>
           <a:p>
             <a:pPr defTabSz="1219170"/>
             <a:r>
-              <a:rPr lang="en-US" sz="1467" b="1" dirty="0">
-                <a:solidFill>
-                  <a:srgbClr val="FF5252"/>
+              <a:rPr lang="en-US" sz="1333" dirty="0">
+                <a:solidFill>
+                  <a:srgbClr val="8FA8C8"/>
                 </a:solidFill>
                 <a:latin typeface="Calibri" pitchFamily="34" charset="0"/>
                 <a:ea typeface="Calibri" pitchFamily="34" charset="-122"/>
                 <a:cs typeface="Calibri" pitchFamily="34" charset="-120"/>
               </a:rPr>
-              <a:t>Red candle</a:t>
-            </a:r>
-            <a:endParaRPr lang="en-US" sz="1467" dirty="0">
-              <a:solidFill>
-                <a:prstClr val="black"/>
-              </a:solidFill>
-              <a:latin typeface="Calibri" panose="020F0502020204030204"/>
-            </a:endParaRPr>
-          </a:p>
-        </p:txBody>
-      </p:sp>
-      <p:sp>
-        <p:nvSpPr>
-          <p:cNvPr id="19" name="Text 17"/>
-          <p:cNvSpPr/>
-          <p:nvPr/>
-        </p:nvSpPr>
-        <p:spPr>
-          <a:xfrm>
-            <a:off x="4632960" y="5413248"/>
-            <a:ext cx="3169920" cy="914400"/>
-          </a:xfrm>
-          <a:prstGeom prst="rect">
-            <a:avLst/>
-          </a:prstGeom>
-          <a:noFill/>
-          <a:ln/>
-        </p:spPr>
-        <p:txBody>
-          <a:bodyPr wrap="square" rtlCol="0" anchor="t"/>
-          <a:lstStyle/>
-          <a:p>
-            <a:pPr defTabSz="1219170"/>
-            <a:r>
-              <a:rPr lang="en-US" sz="1333" dirty="0">
-                <a:solidFill>
-                  <a:srgbClr val="8FA8C8"/>
-                </a:solidFill>
-                <a:latin typeface="Calibri" pitchFamily="34" charset="0"/>
-                <a:ea typeface="Calibri" pitchFamily="34" charset="-122"/>
-                <a:cs typeface="Calibri" pitchFamily="34" charset="-120"/>
-              </a:rPr>
-              <a:t>Close price &lt; open price — sellers were in control that minute</a:t>
+              <a:t>Trade count in 10 seconds exceeds 2× the 10-minute rolling average. 30s cooldown.</a:t>
             </a:r>
             <a:endParaRPr lang="en-US" sz="1333" dirty="0">
               <a:solidFill>
@@ -6697,54 +6779,14 @@
       </p:sp>
       <p:sp>
         <p:nvSpPr>
-          <p:cNvPr id="20" name="Shape 18"/>
+          <p:cNvPr id="26" name="Text 24"/>
           <p:cNvSpPr/>
           <p:nvPr/>
         </p:nvSpPr>
         <p:spPr>
           <a:xfrm>
-            <a:off x="8229600" y="4779264"/>
-            <a:ext cx="3535680" cy="1609344"/>
-          </a:xfrm>
-          <a:prstGeom prst="roundRect">
-            <a:avLst>
-              <a:gd name="adj" fmla="val 6061"/>
-            </a:avLst>
-          </a:prstGeom>
-          <a:solidFill>
-            <a:srgbClr val="1A2840"/>
-          </a:solidFill>
-          <a:ln w="6350">
-            <a:solidFill>
-              <a:srgbClr val="4FC3F7"/>
-            </a:solidFill>
-            <a:prstDash val="solid"/>
-          </a:ln>
-        </p:spPr>
-        <p:txBody>
-          <a:bodyPr/>
-          <a:lstStyle/>
-          <a:p>
-            <a:pPr defTabSz="1219170"/>
-            <a:endParaRPr lang="en-IN" sz="2400">
-              <a:solidFill>
-                <a:prstClr val="black"/>
-              </a:solidFill>
-              <a:latin typeface="Calibri" panose="020F0502020204030204"/>
-            </a:endParaRPr>
-          </a:p>
-        </p:txBody>
-      </p:sp>
-      <p:sp>
-        <p:nvSpPr>
-          <p:cNvPr id="21" name="Text 19"/>
-          <p:cNvSpPr/>
-          <p:nvPr/>
-        </p:nvSpPr>
-        <p:spPr>
-          <a:xfrm>
-            <a:off x="8412480" y="4925568"/>
-            <a:ext cx="3169920" cy="426720"/>
+            <a:off x="8351520" y="4901184"/>
+            <a:ext cx="3352800" cy="304800"/>
           </a:xfrm>
           <a:prstGeom prst="rect">
             <a:avLst/>
@@ -6758,57 +6800,15 @@
           <a:p>
             <a:pPr defTabSz="1219170"/>
             <a:r>
-              <a:rPr lang="en-US" sz="1467" b="1" dirty="0">
-                <a:solidFill>
-                  <a:srgbClr val="4FC3F7"/>
+              <a:rPr lang="en-US" sz="1333" dirty="0">
+                <a:solidFill>
+                  <a:srgbClr val="5A7A9A"/>
                 </a:solidFill>
                 <a:latin typeface="Calibri" pitchFamily="34" charset="0"/>
                 <a:ea typeface="Calibri" pitchFamily="34" charset="-122"/>
                 <a:cs typeface="Calibri" pitchFamily="34" charset="-120"/>
               </a:rPr>
-              <a:t>Getting it right</a:t>
-            </a:r>
-            <a:endParaRPr lang="en-US" sz="1467" dirty="0">
-              <a:solidFill>
-                <a:prstClr val="black"/>
-              </a:solidFill>
-              <a:latin typeface="Calibri" panose="020F0502020204030204"/>
-            </a:endParaRPr>
-          </a:p>
-        </p:txBody>
-      </p:sp>
-      <p:sp>
-        <p:nvSpPr>
-          <p:cNvPr id="22" name="Text 20"/>
-          <p:cNvSpPr/>
-          <p:nvPr/>
-        </p:nvSpPr>
-        <p:spPr>
-          <a:xfrm>
-            <a:off x="8412480" y="5255672"/>
-            <a:ext cx="3169920" cy="914400"/>
-          </a:xfrm>
-          <a:prstGeom prst="rect">
-            <a:avLst/>
-          </a:prstGeom>
-          <a:noFill/>
-          <a:ln/>
-        </p:spPr>
-        <p:txBody>
-          <a:bodyPr wrap="square" rtlCol="0" anchor="t"/>
-          <a:lstStyle/>
-          <a:p>
-            <a:pPr algn="just" defTabSz="1219170"/>
-            <a:r>
-              <a:rPr lang="en-US" sz="1333" dirty="0">
-                <a:solidFill>
-                  <a:srgbClr val="8FA8C8"/>
-                </a:solidFill>
-                <a:latin typeface="Calibri" pitchFamily="34" charset="0"/>
-                <a:ea typeface="Calibri" pitchFamily="34" charset="-122"/>
-                <a:cs typeface="Calibri" pitchFamily="34" charset="-120"/>
-              </a:rPr>
-              <a:t>We use the trade's exchange timestamp, not arrival time. A 3-second watermark absorbs late messages. A 10-second idleness setting stops a quiet coin from freezing all windows.</a:t>
+              <a:t>Flink state:</a:t>
             </a:r>
             <a:endParaRPr lang="en-US" sz="1333" dirty="0">
               <a:solidFill>
@@ -6819,11 +6819,798 @@
           </a:p>
         </p:txBody>
       </p:sp>
+      <p:sp>
+        <p:nvSpPr>
+          <p:cNvPr id="27" name="Text 25"/>
+          <p:cNvSpPr/>
+          <p:nvPr/>
+        </p:nvSpPr>
+        <p:spPr>
+          <a:xfrm>
+            <a:off x="8351520" y="5181600"/>
+            <a:ext cx="3352800" cy="877824"/>
+          </a:xfrm>
+          <a:prstGeom prst="rect">
+            <a:avLst/>
+          </a:prstGeom>
+          <a:noFill/>
+          <a:ln/>
+        </p:spPr>
+        <p:txBody>
+          <a:bodyPr wrap="square" rtlCol="0" anchor="t"/>
+          <a:lstStyle/>
+          <a:p>
+            <a:pPr defTabSz="1219170"/>
+            <a:r>
+              <a:rPr lang="en-US" sz="1333" dirty="0">
+                <a:solidFill>
+                  <a:srgbClr val="8FA8C8"/>
+                </a:solidFill>
+                <a:latin typeface="Calibri" pitchFamily="34" charset="0"/>
+                <a:ea typeface="Calibri" pitchFamily="34" charset="-122"/>
+                <a:cs typeface="Calibri" pitchFamily="34" charset="-120"/>
+              </a:rPr>
+              <a:t>ListState — sliding 10s window + 60-bucket rolling history per coin.</a:t>
+            </a:r>
+            <a:endParaRPr lang="en-US" sz="1333" dirty="0">
+              <a:solidFill>
+                <a:prstClr val="black"/>
+              </a:solidFill>
+              <a:latin typeface="Calibri" panose="020F0502020204030204"/>
+            </a:endParaRPr>
+          </a:p>
+        </p:txBody>
+      </p:sp>
+      <p:sp>
+        <p:nvSpPr>
+          <p:cNvPr id="28" name="Text 26"/>
+          <p:cNvSpPr/>
+          <p:nvPr/>
+        </p:nvSpPr>
+        <p:spPr>
+          <a:xfrm>
+            <a:off x="365760" y="6522720"/>
+            <a:ext cx="11460480" cy="304800"/>
+          </a:xfrm>
+          <a:prstGeom prst="rect">
+            <a:avLst/>
+          </a:prstGeom>
+          <a:noFill/>
+          <a:ln/>
+        </p:spPr>
+        <p:txBody>
+          <a:bodyPr wrap="square" rtlCol="0" anchor="t"/>
+          <a:lstStyle/>
+          <a:p>
+            <a:pPr defTabSz="1219170"/>
+            <a:r>
+              <a:rPr lang="en-US" sz="1333" dirty="0">
+                <a:solidFill>
+                  <a:srgbClr val="5A7A9A"/>
+                </a:solidFill>
+                <a:latin typeface="Calibri" pitchFamily="34" charset="0"/>
+                <a:ea typeface="Calibri" pitchFamily="34" charset="-122"/>
+                <a:cs typeface="Calibri" pitchFamily="34" charset="-120"/>
+              </a:rPr>
+              <a:t>Each match is saved as MEDIUM or HIGH severity and appears in the dashboard alerts table within seconds.</a:t>
+            </a:r>
+            <a:endParaRPr lang="en-US" sz="1333" dirty="0">
+              <a:solidFill>
+                <a:prstClr val="black"/>
+              </a:solidFill>
+              <a:latin typeface="Calibri" panose="020F0502020204030204"/>
+            </a:endParaRPr>
+          </a:p>
+        </p:txBody>
+      </p:sp>
     </p:spTree>
   </p:cSld>
   <p:clrMapOvr>
     <a:masterClrMapping/>
   </p:clrMapOvr>
+</p:sld>
+</file>
+
+<file path=ppt/slides/slide11.xml><?xml version="1.0" encoding="utf-8"?>
+<p:sld xmlns:a="http://schemas.openxmlformats.org/drawingml/2006/main" xmlns:r="http://schemas.openxmlformats.org/officeDocument/2006/relationships" xmlns:p="http://schemas.openxmlformats.org/presentationml/2006/main">
+  <p:cSld>
+    <p:bg>
+      <p:bgPr>
+        <a:solidFill>
+          <a:srgbClr val="0D1320"/>
+        </a:solidFill>
+        <a:effectLst/>
+      </p:bgPr>
+    </p:bg>
+    <p:spTree>
+      <p:nvGrpSpPr>
+        <p:cNvPr id="1" name="">
+          <a:extLst>
+            <a:ext uri="{FF2B5EF4-FFF2-40B4-BE49-F238E27FC236}">
+              <a16:creationId xmlns:a16="http://schemas.microsoft.com/office/drawing/2014/main" id="{DE6DA5FC-1A12-E122-560F-651099C0094F}"/>
+            </a:ext>
+          </a:extLst>
+        </p:cNvPr>
+        <p:cNvGrpSpPr/>
+        <p:nvPr/>
+      </p:nvGrpSpPr>
+      <p:grpSpPr>
+        <a:xfrm>
+          <a:off x="0" y="0"/>
+          <a:ext cx="0" cy="0"/>
+          <a:chOff x="0" y="0"/>
+          <a:chExt cx="0" cy="0"/>
+        </a:xfrm>
+      </p:grpSpPr>
+      <p:sp>
+        <p:nvSpPr>
+          <p:cNvPr id="2" name="Text 0">
+            <a:extLst>
+              <a:ext uri="{FF2B5EF4-FFF2-40B4-BE49-F238E27FC236}">
+                <a16:creationId xmlns:a16="http://schemas.microsoft.com/office/drawing/2014/main" id="{FBCD2309-BF44-F22B-8671-23E3A215EBEA}"/>
+              </a:ext>
+            </a:extLst>
+          </p:cNvPr>
+          <p:cNvSpPr/>
+          <p:nvPr/>
+        </p:nvSpPr>
+        <p:spPr>
+          <a:xfrm>
+            <a:off x="774077" y="548640"/>
+            <a:ext cx="2438400" cy="200055"/>
+          </a:xfrm>
+          <a:prstGeom prst="rect">
+            <a:avLst/>
+          </a:prstGeom>
+          <a:noFill/>
+        </p:spPr>
+        <p:txBody>
+          <a:bodyPr wrap="square" lIns="0" tIns="0" rIns="0" bIns="0" anchor="t">
+            <a:spAutoFit/>
+          </a:bodyPr>
+          <a:lstStyle/>
+          <a:p>
+            <a:pPr marL="0" marR="0" lvl="0" indent="0" algn="l" defTabSz="457200" rtl="0" eaLnBrk="1" fontAlgn="auto" latinLnBrk="0" hangingPunct="1">
+              <a:lnSpc>
+                <a:spcPct val="100000"/>
+              </a:lnSpc>
+              <a:spcBef>
+                <a:spcPts val="0"/>
+              </a:spcBef>
+              <a:spcAft>
+                <a:spcPts val="600"/>
+              </a:spcAft>
+              <a:buClrTx/>
+              <a:buSzTx/>
+              <a:buFontTx/>
+              <a:buNone/>
+              <a:tabLst/>
+              <a:defRPr/>
+            </a:pPr>
+            <a:r>
+              <a:rPr kumimoji="0" lang="en-US" sz="1300" b="1" i="0" u="none" strike="noStrike" kern="1200" cap="none" spc="0" normalizeH="0" baseline="0" noProof="0" dirty="0">
+                <a:ln>
+                  <a:noFill/>
+                </a:ln>
+                <a:solidFill>
+                  <a:srgbClr val="2EE6A6"/>
+                </a:solidFill>
+                <a:effectLst/>
+                <a:uLnTx/>
+                <a:uFillTx/>
+                <a:latin typeface="Calibri"/>
+                <a:ea typeface="+mn-ea"/>
+                <a:cs typeface="+mn-cs"/>
+              </a:rPr>
+              <a:t>INSIDE </a:t>
+            </a:r>
+            <a:r>
+              <a:rPr lang="en-US" sz="1300" b="1" dirty="0">
+                <a:solidFill>
+                  <a:srgbClr val="2EE6A6"/>
+                </a:solidFill>
+                <a:latin typeface="Calibri"/>
+              </a:rPr>
+              <a:t>POSTGRESQL</a:t>
+            </a:r>
+            <a:endParaRPr kumimoji="0" lang="en-US" sz="1300" b="1" i="0" u="none" strike="noStrike" kern="1200" cap="none" spc="0" normalizeH="0" baseline="0" noProof="0" dirty="0">
+              <a:ln>
+                <a:noFill/>
+              </a:ln>
+              <a:solidFill>
+                <a:srgbClr val="2EE6A6"/>
+              </a:solidFill>
+              <a:effectLst/>
+              <a:uLnTx/>
+              <a:uFillTx/>
+              <a:latin typeface="Calibri"/>
+              <a:ea typeface="+mn-ea"/>
+              <a:cs typeface="+mn-cs"/>
+            </a:endParaRPr>
+          </a:p>
+        </p:txBody>
+      </p:sp>
+      <p:sp>
+        <p:nvSpPr>
+          <p:cNvPr id="3" name="Text 1">
+            <a:extLst>
+              <a:ext uri="{FF2B5EF4-FFF2-40B4-BE49-F238E27FC236}">
+                <a16:creationId xmlns:a16="http://schemas.microsoft.com/office/drawing/2014/main" id="{9D3A8824-D87C-465D-CE9B-09E44E372EA4}"/>
+              </a:ext>
+            </a:extLst>
+          </p:cNvPr>
+          <p:cNvSpPr/>
+          <p:nvPr/>
+        </p:nvSpPr>
+        <p:spPr>
+          <a:xfrm>
+            <a:off x="670560" y="548640"/>
+            <a:ext cx="10850880" cy="914400"/>
+          </a:xfrm>
+          <a:prstGeom prst="rect">
+            <a:avLst/>
+          </a:prstGeom>
+          <a:noFill/>
+          <a:ln/>
+        </p:spPr>
+        <p:txBody>
+          <a:bodyPr wrap="square" rtlCol="0" anchor="ctr"/>
+          <a:lstStyle/>
+          <a:p>
+            <a:pPr marL="0" marR="0" lvl="0" indent="0" algn="l" defTabSz="1219170" rtl="0" eaLnBrk="1" fontAlgn="auto" latinLnBrk="0" hangingPunct="1">
+              <a:lnSpc>
+                <a:spcPct val="100000"/>
+              </a:lnSpc>
+              <a:spcBef>
+                <a:spcPts val="0"/>
+              </a:spcBef>
+              <a:spcAft>
+                <a:spcPts val="0"/>
+              </a:spcAft>
+              <a:buClrTx/>
+              <a:buSzTx/>
+              <a:buFontTx/>
+              <a:buNone/>
+              <a:tabLst/>
+              <a:defRPr/>
+            </a:pPr>
+            <a:r>
+              <a:rPr lang="en-US" sz="3000" b="1" dirty="0">
+                <a:solidFill>
+                  <a:srgbClr val="FFFFFF"/>
+                </a:solidFill>
+                <a:latin typeface="Georgia" pitchFamily="34" charset="0"/>
+              </a:rPr>
+              <a:t>3 Tables on PostgreSQL</a:t>
+            </a:r>
+            <a:endParaRPr kumimoji="0" lang="en-US" sz="3000" b="0" i="0" u="none" strike="noStrike" kern="1200" cap="none" spc="0" normalizeH="0" baseline="0" noProof="0" dirty="0">
+              <a:ln>
+                <a:noFill/>
+              </a:ln>
+              <a:solidFill>
+                <a:prstClr val="black"/>
+              </a:solidFill>
+              <a:effectLst/>
+              <a:uLnTx/>
+              <a:uFillTx/>
+              <a:latin typeface="Calibri" panose="020F0502020204030204"/>
+              <a:ea typeface="+mn-ea"/>
+              <a:cs typeface="+mn-cs"/>
+            </a:endParaRPr>
+          </a:p>
+        </p:txBody>
+      </p:sp>
+      <p:pic>
+        <p:nvPicPr>
+          <p:cNvPr id="6" name="Picture 5">
+            <a:extLst>
+              <a:ext uri="{FF2B5EF4-FFF2-40B4-BE49-F238E27FC236}">
+                <a16:creationId xmlns:a16="http://schemas.microsoft.com/office/drawing/2014/main" id="{1DEA6FD3-894A-96D1-AB73-A8A1E22F68AB}"/>
+              </a:ext>
+            </a:extLst>
+          </p:cNvPr>
+          <p:cNvPicPr>
+            <a:picLocks noChangeAspect="1"/>
+          </p:cNvPicPr>
+          <p:nvPr/>
+        </p:nvPicPr>
+        <p:blipFill>
+          <a:blip r:embed="rId3"/>
+          <a:stretch>
+            <a:fillRect/>
+          </a:stretch>
+        </p:blipFill>
+        <p:spPr>
+          <a:xfrm>
+            <a:off x="254000" y="3001573"/>
+            <a:ext cx="4511431" cy="1379340"/>
+          </a:xfrm>
+          <a:prstGeom prst="rect">
+            <a:avLst/>
+          </a:prstGeom>
+        </p:spPr>
+      </p:pic>
+      <p:pic>
+        <p:nvPicPr>
+          <p:cNvPr id="9" name="Picture 8">
+            <a:extLst>
+              <a:ext uri="{FF2B5EF4-FFF2-40B4-BE49-F238E27FC236}">
+                <a16:creationId xmlns:a16="http://schemas.microsoft.com/office/drawing/2014/main" id="{34A9E667-53D2-467B-0E68-4B4DE4B5BF5C}"/>
+              </a:ext>
+            </a:extLst>
+          </p:cNvPr>
+          <p:cNvPicPr>
+            <a:picLocks noChangeAspect="1"/>
+          </p:cNvPicPr>
+          <p:nvPr/>
+        </p:nvPicPr>
+        <p:blipFill>
+          <a:blip r:embed="rId4"/>
+          <a:stretch>
+            <a:fillRect/>
+          </a:stretch>
+        </p:blipFill>
+        <p:spPr>
+          <a:xfrm>
+            <a:off x="6078004" y="5132505"/>
+            <a:ext cx="5356985" cy="1407753"/>
+          </a:xfrm>
+          <a:prstGeom prst="rect">
+            <a:avLst/>
+          </a:prstGeom>
+        </p:spPr>
+      </p:pic>
+      <p:pic>
+        <p:nvPicPr>
+          <p:cNvPr id="12" name="Picture 11">
+            <a:extLst>
+              <a:ext uri="{FF2B5EF4-FFF2-40B4-BE49-F238E27FC236}">
+                <a16:creationId xmlns:a16="http://schemas.microsoft.com/office/drawing/2014/main" id="{DC713B7A-A200-35A2-EDD2-C61284492265}"/>
+              </a:ext>
+            </a:extLst>
+          </p:cNvPr>
+          <p:cNvPicPr>
+            <a:picLocks noChangeAspect="1"/>
+          </p:cNvPicPr>
+          <p:nvPr/>
+        </p:nvPicPr>
+        <p:blipFill>
+          <a:blip r:embed="rId5"/>
+          <a:srcRect r="2517"/>
+          <a:stretch>
+            <a:fillRect/>
+          </a:stretch>
+        </p:blipFill>
+        <p:spPr>
+          <a:xfrm>
+            <a:off x="6095999" y="2989946"/>
+            <a:ext cx="5374981" cy="1670112"/>
+          </a:xfrm>
+          <a:prstGeom prst="rect">
+            <a:avLst/>
+          </a:prstGeom>
+        </p:spPr>
+      </p:pic>
+      <p:pic>
+        <p:nvPicPr>
+          <p:cNvPr id="16" name="Picture 15">
+            <a:extLst>
+              <a:ext uri="{FF2B5EF4-FFF2-40B4-BE49-F238E27FC236}">
+                <a16:creationId xmlns:a16="http://schemas.microsoft.com/office/drawing/2014/main" id="{0F97B1EE-E2C7-E872-316C-B4F8521C8273}"/>
+              </a:ext>
+            </a:extLst>
+          </p:cNvPr>
+          <p:cNvPicPr>
+            <a:picLocks noChangeAspect="1"/>
+          </p:cNvPicPr>
+          <p:nvPr/>
+        </p:nvPicPr>
+        <p:blipFill>
+          <a:blip r:embed="rId6"/>
+          <a:stretch>
+            <a:fillRect/>
+          </a:stretch>
+        </p:blipFill>
+        <p:spPr>
+          <a:xfrm>
+            <a:off x="6096000" y="637298"/>
+            <a:ext cx="5374981" cy="1880201"/>
+          </a:xfrm>
+          <a:prstGeom prst="rect">
+            <a:avLst/>
+          </a:prstGeom>
+        </p:spPr>
+      </p:pic>
+      <p:cxnSp>
+        <p:nvCxnSpPr>
+          <p:cNvPr id="20" name="Straight Arrow Connector 19">
+            <a:extLst>
+              <a:ext uri="{FF2B5EF4-FFF2-40B4-BE49-F238E27FC236}">
+                <a16:creationId xmlns:a16="http://schemas.microsoft.com/office/drawing/2014/main" id="{2E832690-D3C8-5C0F-788A-A63C91D8FCBB}"/>
+              </a:ext>
+            </a:extLst>
+          </p:cNvPr>
+          <p:cNvCxnSpPr>
+            <a:endCxn id="16" idx="1"/>
+          </p:cNvCxnSpPr>
+          <p:nvPr/>
+        </p:nvCxnSpPr>
+        <p:spPr>
+          <a:xfrm flipV="1">
+            <a:off x="2153920" y="1577399"/>
+            <a:ext cx="3942080" cy="2113844"/>
+          </a:xfrm>
+          <a:prstGeom prst="straightConnector1">
+            <a:avLst/>
+          </a:prstGeom>
+          <a:ln w="28575">
+            <a:solidFill>
+              <a:srgbClr val="C00000"/>
+            </a:solidFill>
+            <a:tailEnd type="triangle"/>
+          </a:ln>
+        </p:spPr>
+        <p:style>
+          <a:lnRef idx="2">
+            <a:schemeClr val="accent1"/>
+          </a:lnRef>
+          <a:fillRef idx="0">
+            <a:schemeClr val="accent1"/>
+          </a:fillRef>
+          <a:effectRef idx="1">
+            <a:schemeClr val="accent1"/>
+          </a:effectRef>
+          <a:fontRef idx="minor">
+            <a:schemeClr val="tx1"/>
+          </a:fontRef>
+        </p:style>
+      </p:cxnSp>
+      <p:cxnSp>
+        <p:nvCxnSpPr>
+          <p:cNvPr id="21" name="Straight Arrow Connector 20">
+            <a:extLst>
+              <a:ext uri="{FF2B5EF4-FFF2-40B4-BE49-F238E27FC236}">
+                <a16:creationId xmlns:a16="http://schemas.microsoft.com/office/drawing/2014/main" id="{11B71240-1C57-92D8-091D-F8FDCA9ECFA3}"/>
+              </a:ext>
+            </a:extLst>
+          </p:cNvPr>
+          <p:cNvCxnSpPr>
+            <a:cxnSpLocks/>
+            <a:endCxn id="12" idx="1"/>
+          </p:cNvCxnSpPr>
+          <p:nvPr/>
+        </p:nvCxnSpPr>
+        <p:spPr>
+          <a:xfrm flipV="1">
+            <a:off x="1975282" y="3825002"/>
+            <a:ext cx="4120717" cy="125896"/>
+          </a:xfrm>
+          <a:prstGeom prst="straightConnector1">
+            <a:avLst/>
+          </a:prstGeom>
+          <a:ln w="28575">
+            <a:solidFill>
+              <a:srgbClr val="C00000"/>
+            </a:solidFill>
+            <a:tailEnd type="triangle"/>
+          </a:ln>
+        </p:spPr>
+        <p:style>
+          <a:lnRef idx="2">
+            <a:schemeClr val="accent1"/>
+          </a:lnRef>
+          <a:fillRef idx="0">
+            <a:schemeClr val="accent1"/>
+          </a:fillRef>
+          <a:effectRef idx="1">
+            <a:schemeClr val="accent1"/>
+          </a:effectRef>
+          <a:fontRef idx="minor">
+            <a:schemeClr val="tx1"/>
+          </a:fontRef>
+        </p:style>
+      </p:cxnSp>
+      <p:cxnSp>
+        <p:nvCxnSpPr>
+          <p:cNvPr id="22" name="Straight Arrow Connector 21">
+            <a:extLst>
+              <a:ext uri="{FF2B5EF4-FFF2-40B4-BE49-F238E27FC236}">
+                <a16:creationId xmlns:a16="http://schemas.microsoft.com/office/drawing/2014/main" id="{EC159B88-58B5-8AEE-B1DD-3B7C78963D23}"/>
+              </a:ext>
+            </a:extLst>
+          </p:cNvPr>
+          <p:cNvCxnSpPr>
+            <a:cxnSpLocks/>
+            <a:endCxn id="9" idx="1"/>
+          </p:cNvCxnSpPr>
+          <p:nvPr/>
+        </p:nvCxnSpPr>
+        <p:spPr>
+          <a:xfrm>
+            <a:off x="1993277" y="4110402"/>
+            <a:ext cx="4084727" cy="1725980"/>
+          </a:xfrm>
+          <a:prstGeom prst="straightConnector1">
+            <a:avLst/>
+          </a:prstGeom>
+          <a:ln w="28575">
+            <a:solidFill>
+              <a:srgbClr val="C00000"/>
+            </a:solidFill>
+            <a:tailEnd type="triangle"/>
+          </a:ln>
+        </p:spPr>
+        <p:style>
+          <a:lnRef idx="2">
+            <a:schemeClr val="accent1"/>
+          </a:lnRef>
+          <a:fillRef idx="0">
+            <a:schemeClr val="accent1"/>
+          </a:fillRef>
+          <a:effectRef idx="1">
+            <a:schemeClr val="accent1"/>
+          </a:effectRef>
+          <a:fontRef idx="minor">
+            <a:schemeClr val="tx1"/>
+          </a:fontRef>
+        </p:style>
+      </p:cxnSp>
+    </p:spTree>
+    <p:extLst>
+      <p:ext uri="{BB962C8B-B14F-4D97-AF65-F5344CB8AC3E}">
+        <p14:creationId xmlns:p14="http://schemas.microsoft.com/office/powerpoint/2010/main" val="165974181"/>
+      </p:ext>
+    </p:extLst>
+  </p:cSld>
+  <p:clrMapOvr>
+    <a:masterClrMapping/>
+  </p:clrMapOvr>
+  <p:timing>
+    <p:tnLst>
+      <p:par>
+        <p:cTn id="1" dur="indefinite" restart="never" nodeType="tmRoot">
+          <p:childTnLst>
+            <p:seq concurrent="1" nextAc="seek">
+              <p:cTn id="2" dur="indefinite" nodeType="mainSeq">
+                <p:childTnLst>
+                  <p:par>
+                    <p:cTn id="3" fill="hold">
+                      <p:stCondLst>
+                        <p:cond delay="indefinite"/>
+                      </p:stCondLst>
+                      <p:childTnLst>
+                        <p:par>
+                          <p:cTn id="4" fill="hold">
+                            <p:stCondLst>
+                              <p:cond delay="0"/>
+                            </p:stCondLst>
+                            <p:childTnLst>
+                              <p:par>
+                                <p:cTn id="5" presetID="1" presetClass="entr" presetSubtype="0" fill="hold" nodeType="clickEffect">
+                                  <p:stCondLst>
+                                    <p:cond delay="0"/>
+                                  </p:stCondLst>
+                                  <p:childTnLst>
+                                    <p:set>
+                                      <p:cBhvr>
+                                        <p:cTn id="6" dur="1" fill="hold">
+                                          <p:stCondLst>
+                                            <p:cond delay="0"/>
+                                          </p:stCondLst>
+                                        </p:cTn>
+                                        <p:tgtEl>
+                                          <p:spTgt spid="22"/>
+                                        </p:tgtEl>
+                                        <p:attrNameLst>
+                                          <p:attrName>style.visibility</p:attrName>
+                                        </p:attrNameLst>
+                                      </p:cBhvr>
+                                      <p:to>
+                                        <p:strVal val="visible"/>
+                                      </p:to>
+                                    </p:set>
+                                  </p:childTnLst>
+                                </p:cTn>
+                              </p:par>
+                              <p:par>
+                                <p:cTn id="7" presetID="1" presetClass="entr" presetSubtype="0" fill="hold" nodeType="withEffect">
+                                  <p:stCondLst>
+                                    <p:cond delay="0"/>
+                                  </p:stCondLst>
+                                  <p:childTnLst>
+                                    <p:set>
+                                      <p:cBhvr>
+                                        <p:cTn id="8" dur="1" fill="hold">
+                                          <p:stCondLst>
+                                            <p:cond delay="0"/>
+                                          </p:stCondLst>
+                                        </p:cTn>
+                                        <p:tgtEl>
+                                          <p:spTgt spid="9"/>
+                                        </p:tgtEl>
+                                        <p:attrNameLst>
+                                          <p:attrName>style.visibility</p:attrName>
+                                        </p:attrNameLst>
+                                      </p:cBhvr>
+                                      <p:to>
+                                        <p:strVal val="visible"/>
+                                      </p:to>
+                                    </p:set>
+                                  </p:childTnLst>
+                                </p:cTn>
+                              </p:par>
+                            </p:childTnLst>
+                          </p:cTn>
+                        </p:par>
+                      </p:childTnLst>
+                    </p:cTn>
+                  </p:par>
+                  <p:par>
+                    <p:cTn id="9" fill="hold">
+                      <p:stCondLst>
+                        <p:cond delay="indefinite"/>
+                      </p:stCondLst>
+                      <p:childTnLst>
+                        <p:par>
+                          <p:cTn id="10" fill="hold">
+                            <p:stCondLst>
+                              <p:cond delay="0"/>
+                            </p:stCondLst>
+                            <p:childTnLst>
+                              <p:par>
+                                <p:cTn id="11" presetID="1" presetClass="entr" presetSubtype="0" fill="hold" nodeType="clickEffect">
+                                  <p:stCondLst>
+                                    <p:cond delay="0"/>
+                                  </p:stCondLst>
+                                  <p:childTnLst>
+                                    <p:set>
+                                      <p:cBhvr>
+                                        <p:cTn id="12" dur="1" fill="hold">
+                                          <p:stCondLst>
+                                            <p:cond delay="0"/>
+                                          </p:stCondLst>
+                                        </p:cTn>
+                                        <p:tgtEl>
+                                          <p:spTgt spid="21"/>
+                                        </p:tgtEl>
+                                        <p:attrNameLst>
+                                          <p:attrName>style.visibility</p:attrName>
+                                        </p:attrNameLst>
+                                      </p:cBhvr>
+                                      <p:to>
+                                        <p:strVal val="visible"/>
+                                      </p:to>
+                                    </p:set>
+                                  </p:childTnLst>
+                                </p:cTn>
+                              </p:par>
+                              <p:par>
+                                <p:cTn id="13" presetID="1" presetClass="entr" presetSubtype="0" fill="hold" nodeType="withEffect">
+                                  <p:stCondLst>
+                                    <p:cond delay="0"/>
+                                  </p:stCondLst>
+                                  <p:childTnLst>
+                                    <p:set>
+                                      <p:cBhvr>
+                                        <p:cTn id="14" dur="1" fill="hold">
+                                          <p:stCondLst>
+                                            <p:cond delay="0"/>
+                                          </p:stCondLst>
+                                        </p:cTn>
+                                        <p:tgtEl>
+                                          <p:spTgt spid="12"/>
+                                        </p:tgtEl>
+                                        <p:attrNameLst>
+                                          <p:attrName>style.visibility</p:attrName>
+                                        </p:attrNameLst>
+                                      </p:cBhvr>
+                                      <p:to>
+                                        <p:strVal val="visible"/>
+                                      </p:to>
+                                    </p:set>
+                                  </p:childTnLst>
+                                </p:cTn>
+                              </p:par>
+                            </p:childTnLst>
+                          </p:cTn>
+                        </p:par>
+                      </p:childTnLst>
+                    </p:cTn>
+                  </p:par>
+                  <p:par>
+                    <p:cTn id="15" fill="hold">
+                      <p:stCondLst>
+                        <p:cond delay="indefinite"/>
+                      </p:stCondLst>
+                      <p:childTnLst>
+                        <p:par>
+                          <p:cTn id="16" fill="hold">
+                            <p:stCondLst>
+                              <p:cond delay="0"/>
+                            </p:stCondLst>
+                            <p:childTnLst>
+                              <p:par>
+                                <p:cTn id="17" presetID="1" presetClass="entr" presetSubtype="0" fill="hold" nodeType="clickEffect">
+                                  <p:stCondLst>
+                                    <p:cond delay="0"/>
+                                  </p:stCondLst>
+                                  <p:childTnLst>
+                                    <p:set>
+                                      <p:cBhvr>
+                                        <p:cTn id="18" dur="1" fill="hold">
+                                          <p:stCondLst>
+                                            <p:cond delay="0"/>
+                                          </p:stCondLst>
+                                        </p:cTn>
+                                        <p:tgtEl>
+                                          <p:spTgt spid="20"/>
+                                        </p:tgtEl>
+                                        <p:attrNameLst>
+                                          <p:attrName>style.visibility</p:attrName>
+                                        </p:attrNameLst>
+                                      </p:cBhvr>
+                                      <p:to>
+                                        <p:strVal val="visible"/>
+                                      </p:to>
+                                    </p:set>
+                                  </p:childTnLst>
+                                </p:cTn>
+                              </p:par>
+                              <p:par>
+                                <p:cTn id="19" presetID="1" presetClass="entr" presetSubtype="0" fill="hold" nodeType="withEffect">
+                                  <p:stCondLst>
+                                    <p:cond delay="0"/>
+                                  </p:stCondLst>
+                                  <p:childTnLst>
+                                    <p:set>
+                                      <p:cBhvr>
+                                        <p:cTn id="20" dur="1" fill="hold">
+                                          <p:stCondLst>
+                                            <p:cond delay="0"/>
+                                          </p:stCondLst>
+                                        </p:cTn>
+                                        <p:tgtEl>
+                                          <p:spTgt spid="16"/>
+                                        </p:tgtEl>
+                                        <p:attrNameLst>
+                                          <p:attrName>style.visibility</p:attrName>
+                                        </p:attrNameLst>
+                                      </p:cBhvr>
+                                      <p:to>
+                                        <p:strVal val="visible"/>
+                                      </p:to>
+                                    </p:set>
+                                  </p:childTnLst>
+                                </p:cTn>
+                              </p:par>
+                            </p:childTnLst>
+                          </p:cTn>
+                        </p:par>
+                      </p:childTnLst>
+                    </p:cTn>
+                  </p:par>
+                </p:childTnLst>
+              </p:cTn>
+              <p:prevCondLst>
+                <p:cond evt="onPrev" delay="0">
+                  <p:tgtEl>
+                    <p:sldTgt/>
+                  </p:tgtEl>
+                </p:cond>
+              </p:prevCondLst>
+              <p:nextCondLst>
+                <p:cond evt="onNext" delay="0">
+                  <p:tgtEl>
+                    <p:sldTgt/>
+                  </p:tgtEl>
+                </p:cond>
+              </p:nextCondLst>
+            </p:seq>
+          </p:childTnLst>
+        </p:cTn>
+      </p:par>
+    </p:tnLst>
+  </p:timing>
 </p:sld>
 </file>
 
@@ -6852,7 +7639,7 @@
         </p:nvSpPr>
         <p:spPr>
           <a:xfrm>
-            <a:off x="0" y="0"/>
+            <a:off x="305" y="0"/>
             <a:ext cx="12191695" cy="6858000"/>
           </a:xfrm>
           <a:prstGeom prst="rect">
@@ -6929,7 +7716,7 @@
                 </a:solidFill>
                 <a:latin typeface="Calibri"/>
               </a:rPr>
-              <a:t>THE CORE</a:t>
+              <a:t>WHAT THE USER SEES</a:t>
             </a:r>
           </a:p>
         </p:txBody>
@@ -6974,7 +7761,7 @@
                 </a:solidFill>
                 <a:latin typeface="Cambria"/>
               </a:rPr>
-              <a:t>The three cheating patterns we detect</a:t>
+              <a:t>The live dashboard</a:t>
             </a:r>
           </a:p>
         </p:txBody>
@@ -6987,8 +7774,8 @@
         </p:nvSpPr>
         <p:spPr>
           <a:xfrm>
-            <a:off x="1853282" y="1764791"/>
-            <a:ext cx="8454955" cy="3328415"/>
+            <a:off x="667512" y="1673352"/>
+            <a:ext cx="7717536" cy="4227666"/>
           </a:xfrm>
           <a:prstGeom prst="roundRect">
             <a:avLst>
@@ -7026,9 +7813,462 @@
           </a:p>
         </p:txBody>
       </p:sp>
+      <p:sp>
+        <p:nvSpPr>
+          <p:cNvPr id="7" name="TextBox 6"/>
+          <p:cNvSpPr txBox="1"/>
+          <p:nvPr/>
+        </p:nvSpPr>
+        <p:spPr>
+          <a:xfrm>
+            <a:off x="9189720" y="1143000"/>
+            <a:ext cx="3291840" cy="457200"/>
+          </a:xfrm>
+          <a:prstGeom prst="rect">
+            <a:avLst/>
+          </a:prstGeom>
+          <a:noFill/>
+        </p:spPr>
+        <p:txBody>
+          <a:bodyPr wrap="square" lIns="0" tIns="0" rIns="0" bIns="0" anchor="t">
+            <a:spAutoFit/>
+          </a:bodyPr>
+          <a:lstStyle/>
+          <a:p>
+            <a:pPr algn="l">
+              <a:lnSpc>
+                <a:spcPct val="100000"/>
+              </a:lnSpc>
+              <a:spcBef>
+                <a:spcPts val="0"/>
+              </a:spcBef>
+              <a:spcAft>
+                <a:spcPts val="600"/>
+              </a:spcAft>
+            </a:pPr>
+            <a:r>
+              <a:rPr sz="1600" b="1" i="0">
+                <a:solidFill>
+                  <a:srgbClr val="2EE6A6"/>
+                </a:solidFill>
+                <a:latin typeface="Calibri"/>
+              </a:rPr>
+              <a:t>Five live panels</a:t>
+            </a:r>
+          </a:p>
+        </p:txBody>
+      </p:sp>
+      <p:sp>
+        <p:nvSpPr>
+          <p:cNvPr id="8" name="TextBox 7"/>
+          <p:cNvSpPr txBox="1"/>
+          <p:nvPr/>
+        </p:nvSpPr>
+        <p:spPr>
+          <a:xfrm>
+            <a:off x="9189720" y="1737360"/>
+            <a:ext cx="3291840" cy="415498"/>
+          </a:xfrm>
+          <a:prstGeom prst="rect">
+            <a:avLst/>
+          </a:prstGeom>
+          <a:noFill/>
+        </p:spPr>
+        <p:txBody>
+          <a:bodyPr wrap="square" lIns="0" tIns="0" rIns="0" bIns="0" anchor="t">
+            <a:spAutoFit/>
+          </a:bodyPr>
+          <a:lstStyle/>
+          <a:p>
+            <a:pPr algn="l">
+              <a:lnSpc>
+                <a:spcPct val="100000"/>
+              </a:lnSpc>
+              <a:spcBef>
+                <a:spcPts val="0"/>
+              </a:spcBef>
+              <a:spcAft>
+                <a:spcPts val="0"/>
+              </a:spcAft>
+            </a:pPr>
+            <a:r>
+              <a:rPr sz="1450" b="1" i="0" dirty="0">
+                <a:solidFill>
+                  <a:srgbClr val="EAF0F8"/>
+                </a:solidFill>
+                <a:latin typeface="Calibri"/>
+              </a:rPr>
+              <a:t>Price ticker</a:t>
+            </a:r>
+          </a:p>
+          <a:p>
+            <a:pPr algn="l">
+              <a:lnSpc>
+                <a:spcPct val="100000"/>
+              </a:lnSpc>
+              <a:spcBef>
+                <a:spcPts val="0"/>
+              </a:spcBef>
+              <a:spcAft>
+                <a:spcPts val="0"/>
+              </a:spcAft>
+            </a:pPr>
+            <a:r>
+              <a:rPr sz="1250" b="0" i="0" dirty="0">
+                <a:solidFill>
+                  <a:srgbClr val="9AA8BD"/>
+                </a:solidFill>
+                <a:latin typeface="Calibri"/>
+              </a:rPr>
+              <a:t>price</a:t>
+            </a:r>
+          </a:p>
+        </p:txBody>
+      </p:sp>
+      <p:sp>
+        <p:nvSpPr>
+          <p:cNvPr id="9" name="TextBox 8"/>
+          <p:cNvSpPr txBox="1"/>
+          <p:nvPr/>
+        </p:nvSpPr>
+        <p:spPr>
+          <a:xfrm>
+            <a:off x="9189720" y="2487168"/>
+            <a:ext cx="3291840" cy="731520"/>
+          </a:xfrm>
+          <a:prstGeom prst="rect">
+            <a:avLst/>
+          </a:prstGeom>
+          <a:noFill/>
+        </p:spPr>
+        <p:txBody>
+          <a:bodyPr wrap="square" lIns="0" tIns="0" rIns="0" bIns="0" anchor="t">
+            <a:spAutoFit/>
+          </a:bodyPr>
+          <a:lstStyle/>
+          <a:p>
+            <a:pPr algn="l">
+              <a:lnSpc>
+                <a:spcPct val="100000"/>
+              </a:lnSpc>
+              <a:spcBef>
+                <a:spcPts val="0"/>
+              </a:spcBef>
+              <a:spcAft>
+                <a:spcPts val="0"/>
+              </a:spcAft>
+            </a:pPr>
+            <a:r>
+              <a:rPr sz="1450" b="1" i="0">
+                <a:solidFill>
+                  <a:srgbClr val="EAF0F8"/>
+                </a:solidFill>
+                <a:latin typeface="Calibri"/>
+              </a:rPr>
+              <a:t>Candles</a:t>
+            </a:r>
+          </a:p>
+          <a:p>
+            <a:pPr algn="l">
+              <a:lnSpc>
+                <a:spcPct val="100000"/>
+              </a:lnSpc>
+              <a:spcBef>
+                <a:spcPts val="0"/>
+              </a:spcBef>
+              <a:spcAft>
+                <a:spcPts val="0"/>
+              </a:spcAft>
+            </a:pPr>
+            <a:r>
+              <a:rPr sz="1250" b="0" i="0">
+                <a:solidFill>
+                  <a:srgbClr val="9AA8BD"/>
+                </a:solidFill>
+                <a:latin typeface="Calibri"/>
+              </a:rPr>
+              <a:t>1-min or 5-min</a:t>
+            </a:r>
+          </a:p>
+        </p:txBody>
+      </p:sp>
+      <p:sp>
+        <p:nvSpPr>
+          <p:cNvPr id="10" name="TextBox 9"/>
+          <p:cNvSpPr txBox="1"/>
+          <p:nvPr/>
+        </p:nvSpPr>
+        <p:spPr>
+          <a:xfrm>
+            <a:off x="9189720" y="3236976"/>
+            <a:ext cx="3291840" cy="731520"/>
+          </a:xfrm>
+          <a:prstGeom prst="rect">
+            <a:avLst/>
+          </a:prstGeom>
+          <a:noFill/>
+        </p:spPr>
+        <p:txBody>
+          <a:bodyPr wrap="square" lIns="0" tIns="0" rIns="0" bIns="0" anchor="t">
+            <a:spAutoFit/>
+          </a:bodyPr>
+          <a:lstStyle/>
+          <a:p>
+            <a:pPr algn="l">
+              <a:lnSpc>
+                <a:spcPct val="100000"/>
+              </a:lnSpc>
+              <a:spcBef>
+                <a:spcPts val="0"/>
+              </a:spcBef>
+              <a:spcAft>
+                <a:spcPts val="0"/>
+              </a:spcAft>
+            </a:pPr>
+            <a:r>
+              <a:rPr sz="1450" b="1" i="0">
+                <a:solidFill>
+                  <a:srgbClr val="EAF0F8"/>
+                </a:solidFill>
+                <a:latin typeface="Calibri"/>
+              </a:rPr>
+              <a:t>Volume bars</a:t>
+            </a:r>
+          </a:p>
+          <a:p>
+            <a:pPr algn="l">
+              <a:lnSpc>
+                <a:spcPct val="100000"/>
+              </a:lnSpc>
+              <a:spcBef>
+                <a:spcPts val="0"/>
+              </a:spcBef>
+              <a:spcAft>
+                <a:spcPts val="0"/>
+              </a:spcAft>
+            </a:pPr>
+            <a:r>
+              <a:rPr sz="1250" b="0" i="0">
+                <a:solidFill>
+                  <a:srgbClr val="9AA8BD"/>
+                </a:solidFill>
+                <a:latin typeface="Calibri"/>
+              </a:rPr>
+              <a:t>per coin</a:t>
+            </a:r>
+          </a:p>
+        </p:txBody>
+      </p:sp>
+      <p:sp>
+        <p:nvSpPr>
+          <p:cNvPr id="11" name="TextBox 10"/>
+          <p:cNvSpPr txBox="1"/>
+          <p:nvPr/>
+        </p:nvSpPr>
+        <p:spPr>
+          <a:xfrm>
+            <a:off x="9189720" y="3986784"/>
+            <a:ext cx="3291840" cy="731520"/>
+          </a:xfrm>
+          <a:prstGeom prst="rect">
+            <a:avLst/>
+          </a:prstGeom>
+          <a:noFill/>
+        </p:spPr>
+        <p:txBody>
+          <a:bodyPr wrap="square" lIns="0" tIns="0" rIns="0" bIns="0" anchor="t">
+            <a:spAutoFit/>
+          </a:bodyPr>
+          <a:lstStyle/>
+          <a:p>
+            <a:pPr algn="l">
+              <a:lnSpc>
+                <a:spcPct val="100000"/>
+              </a:lnSpc>
+              <a:spcBef>
+                <a:spcPts val="0"/>
+              </a:spcBef>
+              <a:spcAft>
+                <a:spcPts val="0"/>
+              </a:spcAft>
+            </a:pPr>
+            <a:r>
+              <a:rPr sz="1450" b="1" i="0">
+                <a:solidFill>
+                  <a:srgbClr val="EAF0F8"/>
+                </a:solidFill>
+                <a:latin typeface="Calibri"/>
+              </a:rPr>
+              <a:t>Alert count</a:t>
+            </a:r>
+          </a:p>
+          <a:p>
+            <a:pPr algn="l">
+              <a:lnSpc>
+                <a:spcPct val="100000"/>
+              </a:lnSpc>
+              <a:spcBef>
+                <a:spcPts val="0"/>
+              </a:spcBef>
+              <a:spcAft>
+                <a:spcPts val="0"/>
+              </a:spcAft>
+            </a:pPr>
+            <a:r>
+              <a:rPr sz="1250" b="0" i="0">
+                <a:solidFill>
+                  <a:srgbClr val="9AA8BD"/>
+                </a:solidFill>
+                <a:latin typeface="Calibri"/>
+              </a:rPr>
+              <a:t>last hour</a:t>
+            </a:r>
+          </a:p>
+        </p:txBody>
+      </p:sp>
+      <p:sp>
+        <p:nvSpPr>
+          <p:cNvPr id="12" name="TextBox 11"/>
+          <p:cNvSpPr txBox="1"/>
+          <p:nvPr/>
+        </p:nvSpPr>
+        <p:spPr>
+          <a:xfrm>
+            <a:off x="9189720" y="4736592"/>
+            <a:ext cx="3291840" cy="731520"/>
+          </a:xfrm>
+          <a:prstGeom prst="rect">
+            <a:avLst/>
+          </a:prstGeom>
+          <a:noFill/>
+        </p:spPr>
+        <p:txBody>
+          <a:bodyPr wrap="square" lIns="0" tIns="0" rIns="0" bIns="0" anchor="t">
+            <a:spAutoFit/>
+          </a:bodyPr>
+          <a:lstStyle/>
+          <a:p>
+            <a:pPr algn="l">
+              <a:lnSpc>
+                <a:spcPct val="100000"/>
+              </a:lnSpc>
+              <a:spcBef>
+                <a:spcPts val="0"/>
+              </a:spcBef>
+              <a:spcAft>
+                <a:spcPts val="0"/>
+              </a:spcAft>
+            </a:pPr>
+            <a:r>
+              <a:rPr sz="1450" b="1" i="0">
+                <a:solidFill>
+                  <a:srgbClr val="EAF0F8"/>
+                </a:solidFill>
+                <a:latin typeface="Calibri"/>
+              </a:rPr>
+              <a:t>Alerts table</a:t>
+            </a:r>
+          </a:p>
+          <a:p>
+            <a:pPr algn="l">
+              <a:lnSpc>
+                <a:spcPct val="100000"/>
+              </a:lnSpc>
+              <a:spcBef>
+                <a:spcPts val="0"/>
+              </a:spcBef>
+              <a:spcAft>
+                <a:spcPts val="0"/>
+              </a:spcAft>
+            </a:pPr>
+            <a:r>
+              <a:rPr sz="1250" b="0" i="0">
+                <a:solidFill>
+                  <a:srgbClr val="9AA8BD"/>
+                </a:solidFill>
+                <a:latin typeface="Calibri"/>
+              </a:rPr>
+              <a:t>what + how serious</a:t>
+            </a:r>
+          </a:p>
+        </p:txBody>
+      </p:sp>
+      <p:sp>
+        <p:nvSpPr>
+          <p:cNvPr id="13" name="TextBox 12"/>
+          <p:cNvSpPr txBox="1"/>
+          <p:nvPr/>
+        </p:nvSpPr>
+        <p:spPr>
+          <a:xfrm>
+            <a:off x="9189720" y="5532120"/>
+            <a:ext cx="3291840" cy="457200"/>
+          </a:xfrm>
+          <a:prstGeom prst="rect">
+            <a:avLst/>
+          </a:prstGeom>
+          <a:noFill/>
+        </p:spPr>
+        <p:txBody>
+          <a:bodyPr wrap="square" lIns="0" tIns="0" rIns="0" bIns="0" anchor="t">
+            <a:spAutoFit/>
+          </a:bodyPr>
+          <a:lstStyle/>
+          <a:p>
+            <a:pPr algn="l">
+              <a:lnSpc>
+                <a:spcPct val="100000"/>
+              </a:lnSpc>
+              <a:spcBef>
+                <a:spcPts val="0"/>
+              </a:spcBef>
+              <a:spcAft>
+                <a:spcPts val="0"/>
+              </a:spcAft>
+            </a:pPr>
+            <a:r>
+              <a:rPr sz="1250" b="0" i="1">
+                <a:solidFill>
+                  <a:srgbClr val="9AA8BD"/>
+                </a:solidFill>
+                <a:latin typeface="Calibri"/>
+              </a:rPr>
+              <a:t>Pick a coin and candle</a:t>
+            </a:r>
+          </a:p>
+          <a:p>
+            <a:pPr algn="l">
+              <a:lnSpc>
+                <a:spcPct val="100000"/>
+              </a:lnSpc>
+              <a:spcBef>
+                <a:spcPts val="0"/>
+              </a:spcBef>
+              <a:spcAft>
+                <a:spcPts val="0"/>
+              </a:spcAft>
+            </a:pPr>
+            <a:r>
+              <a:rPr sz="1250" b="0" i="1">
+                <a:solidFill>
+                  <a:srgbClr val="9AA8BD"/>
+                </a:solidFill>
+                <a:latin typeface="Calibri"/>
+              </a:rPr>
+              <a:t>size from the menus.</a:t>
+            </a:r>
+          </a:p>
+        </p:txBody>
+      </p:sp>
       <p:pic>
         <p:nvPicPr>
-          <p:cNvPr id="6" name="Picture 5" descr="fig_patterns.png"/>
+          <p:cNvPr id="15" name="Picture 14">
+            <a:extLst>
+              <a:ext uri="{FF2B5EF4-FFF2-40B4-BE49-F238E27FC236}">
+                <a16:creationId xmlns:a16="http://schemas.microsoft.com/office/drawing/2014/main" id="{F41DD00E-B930-CAE0-630E-78DA6036837A}"/>
+              </a:ext>
+            </a:extLst>
+          </p:cNvPr>
           <p:cNvPicPr>
             <a:picLocks noChangeAspect="1"/>
           </p:cNvPicPr>
@@ -7042,8 +8282,245 @@
         </p:blipFill>
         <p:spPr>
           <a:xfrm>
-            <a:off x="1963010" y="1874519"/>
-            <a:ext cx="8235499" cy="3108960"/>
+            <a:off x="822942" y="1832078"/>
+            <a:ext cx="7406675" cy="3910354"/>
+          </a:xfrm>
+          <a:prstGeom prst="rect">
+            <a:avLst/>
+          </a:prstGeom>
+        </p:spPr>
+      </p:pic>
+    </p:spTree>
+  </p:cSld>
+  <p:clrMapOvr>
+    <a:masterClrMapping/>
+  </p:clrMapOvr>
+</p:sld>
+</file>
+
+<file path=ppt/slides/slide13.xml><?xml version="1.0" encoding="utf-8"?>
+<p:sld xmlns:a="http://schemas.openxmlformats.org/drawingml/2006/main" xmlns:r="http://schemas.openxmlformats.org/officeDocument/2006/relationships" xmlns:p="http://schemas.openxmlformats.org/presentationml/2006/main">
+  <p:cSld>
+    <p:spTree>
+      <p:nvGrpSpPr>
+        <p:cNvPr id="1" name=""/>
+        <p:cNvGrpSpPr/>
+        <p:nvPr/>
+      </p:nvGrpSpPr>
+      <p:grpSpPr>
+        <a:xfrm>
+          <a:off x="0" y="0"/>
+          <a:ext cx="0" cy="0"/>
+          <a:chOff x="0" y="0"/>
+          <a:chExt cx="0" cy="0"/>
+        </a:xfrm>
+      </p:grpSpPr>
+      <p:sp>
+        <p:nvSpPr>
+          <p:cNvPr id="2" name="Rectangle 1"/>
+          <p:cNvSpPr/>
+          <p:nvPr/>
+        </p:nvSpPr>
+        <p:spPr>
+          <a:xfrm>
+            <a:off x="0" y="0"/>
+            <a:ext cx="12191695" cy="6858000"/>
+          </a:xfrm>
+          <a:prstGeom prst="rect">
+            <a:avLst/>
+          </a:prstGeom>
+          <a:solidFill>
+            <a:srgbClr val="0E1726"/>
+          </a:solidFill>
+          <a:ln>
+            <a:noFill/>
+          </a:ln>
+          <a:effectLst/>
+        </p:spPr>
+        <p:style>
+          <a:lnRef idx="1">
+            <a:schemeClr val="accent1"/>
+          </a:lnRef>
+          <a:fillRef idx="3">
+            <a:schemeClr val="accent1"/>
+          </a:fillRef>
+          <a:effectRef idx="2">
+            <a:schemeClr val="accent1"/>
+          </a:effectRef>
+          <a:fontRef idx="minor">
+            <a:schemeClr val="lt1"/>
+          </a:fontRef>
+        </p:style>
+        <p:txBody>
+          <a:bodyPr rtlCol="0" anchor="ctr"/>
+          <a:lstStyle/>
+          <a:p>
+            <a:pPr algn="ctr"/>
+            <a:endParaRPr/>
+          </a:p>
+        </p:txBody>
+      </p:sp>
+      <p:sp>
+        <p:nvSpPr>
+          <p:cNvPr id="3" name="TextBox 2"/>
+          <p:cNvSpPr txBox="1"/>
+          <p:nvPr/>
+        </p:nvSpPr>
+        <p:spPr>
+          <a:xfrm>
+            <a:off x="777240" y="502920"/>
+            <a:ext cx="10058400" cy="200055"/>
+          </a:xfrm>
+          <a:prstGeom prst="rect">
+            <a:avLst/>
+          </a:prstGeom>
+          <a:noFill/>
+        </p:spPr>
+        <p:txBody>
+          <a:bodyPr wrap="square" lIns="0" tIns="0" rIns="0" bIns="0" anchor="t">
+            <a:spAutoFit/>
+          </a:bodyPr>
+          <a:lstStyle/>
+          <a:p>
+            <a:pPr algn="l">
+              <a:lnSpc>
+                <a:spcPct val="100000"/>
+              </a:lnSpc>
+              <a:spcBef>
+                <a:spcPts val="0"/>
+              </a:spcBef>
+              <a:spcAft>
+                <a:spcPts val="600"/>
+              </a:spcAft>
+            </a:pPr>
+            <a:r>
+              <a:rPr lang="en-US" sz="1300" b="1" i="0" dirty="0">
+                <a:solidFill>
+                  <a:srgbClr val="2EE6A6"/>
+                </a:solidFill>
+                <a:latin typeface="Calibri"/>
+              </a:rPr>
+              <a:t>THE CORE</a:t>
+            </a:r>
+            <a:endParaRPr sz="1300" b="1" i="0" dirty="0">
+              <a:solidFill>
+                <a:srgbClr val="2EE6A6"/>
+              </a:solidFill>
+              <a:latin typeface="Calibri"/>
+            </a:endParaRPr>
+          </a:p>
+        </p:txBody>
+      </p:sp>
+      <p:sp>
+        <p:nvSpPr>
+          <p:cNvPr id="4" name="TextBox 3"/>
+          <p:cNvSpPr txBox="1"/>
+          <p:nvPr/>
+        </p:nvSpPr>
+        <p:spPr>
+          <a:xfrm>
+            <a:off x="777240" y="868680"/>
+            <a:ext cx="10607040" cy="914400"/>
+          </a:xfrm>
+          <a:prstGeom prst="rect">
+            <a:avLst/>
+          </a:prstGeom>
+          <a:noFill/>
+        </p:spPr>
+        <p:txBody>
+          <a:bodyPr wrap="square" lIns="0" tIns="0" rIns="0" bIns="0" anchor="t">
+            <a:spAutoFit/>
+          </a:bodyPr>
+          <a:lstStyle/>
+          <a:p>
+            <a:pPr algn="l">
+              <a:lnSpc>
+                <a:spcPct val="100000"/>
+              </a:lnSpc>
+              <a:spcBef>
+                <a:spcPts val="0"/>
+              </a:spcBef>
+              <a:spcAft>
+                <a:spcPts val="600"/>
+              </a:spcAft>
+            </a:pPr>
+            <a:r>
+              <a:rPr sz="3000" b="1" i="0">
+                <a:solidFill>
+                  <a:srgbClr val="FFFFFF"/>
+                </a:solidFill>
+                <a:latin typeface="Cambria"/>
+              </a:rPr>
+              <a:t>Turning trades into price candles</a:t>
+            </a:r>
+          </a:p>
+        </p:txBody>
+      </p:sp>
+      <p:sp>
+        <p:nvSpPr>
+          <p:cNvPr id="5" name="Rounded Rectangle 4"/>
+          <p:cNvSpPr/>
+          <p:nvPr/>
+        </p:nvSpPr>
+        <p:spPr>
+          <a:xfrm>
+            <a:off x="1503273" y="1810512"/>
+            <a:ext cx="9154972" cy="3419856"/>
+          </a:xfrm>
+          <a:prstGeom prst="roundRect">
+            <a:avLst>
+              <a:gd name="adj" fmla="val 6000"/>
+            </a:avLst>
+          </a:prstGeom>
+          <a:solidFill>
+            <a:srgbClr val="FFFFFF"/>
+          </a:solidFill>
+          <a:ln>
+            <a:noFill/>
+          </a:ln>
+          <a:effectLst/>
+        </p:spPr>
+        <p:style>
+          <a:lnRef idx="1">
+            <a:schemeClr val="accent1"/>
+          </a:lnRef>
+          <a:fillRef idx="3">
+            <a:schemeClr val="accent1"/>
+          </a:fillRef>
+          <a:effectRef idx="2">
+            <a:schemeClr val="accent1"/>
+          </a:effectRef>
+          <a:fontRef idx="minor">
+            <a:schemeClr val="lt1"/>
+          </a:fontRef>
+        </p:style>
+        <p:txBody>
+          <a:bodyPr rtlCol="0" anchor="ctr"/>
+          <a:lstStyle/>
+          <a:p>
+            <a:pPr algn="ctr"/>
+            <a:endParaRPr/>
+          </a:p>
+        </p:txBody>
+      </p:sp>
+      <p:pic>
+        <p:nvPicPr>
+          <p:cNvPr id="6" name="Picture 5" descr="fig_candle.png"/>
+          <p:cNvPicPr>
+            <a:picLocks noChangeAspect="1"/>
+          </p:cNvPicPr>
+          <p:nvPr/>
+        </p:nvPicPr>
+        <p:blipFill>
+          <a:blip r:embed="rId3"/>
+          <a:stretch>
+            <a:fillRect/>
+          </a:stretch>
+        </p:blipFill>
+        <p:spPr>
+          <a:xfrm>
+            <a:off x="1613001" y="1920240"/>
+            <a:ext cx="8935516" cy="3200400"/>
           </a:xfrm>
           <a:prstGeom prst="rect">
             <a:avLst/>
@@ -7058,8 +8535,8 @@
         </p:nvSpPr>
         <p:spPr>
           <a:xfrm>
-            <a:off x="777240" y="5440680"/>
-            <a:ext cx="10607040" cy="1005840"/>
+            <a:off x="777240" y="5486400"/>
+            <a:ext cx="10607040" cy="822960"/>
           </a:xfrm>
           <a:prstGeom prst="rect">
             <a:avLst/>
@@ -7084,80 +8561,13 @@
               </a:spcAft>
             </a:pPr>
             <a:r>
-              <a:rPr sz="1400" b="1" i="0">
-                <a:solidFill>
-                  <a:srgbClr val="F2A93B"/>
+              <a:rPr sz="1500" b="0" i="0">
+                <a:solidFill>
+                  <a:srgbClr val="EAF0F8"/>
                 </a:solidFill>
                 <a:latin typeface="Calibri"/>
               </a:rPr>
-              <a:t>Wash trade: </a:t>
-            </a:r>
-            <a:r>
-              <a:rPr sz="1400" b="0" i="0">
-                <a:solidFill>
-                  <a:srgbClr val="EAF0F8"/>
-                </a:solidFill>
-                <a:latin typeface="Calibri"/>
-              </a:rPr>
-              <a:t>price wiggles + fake volume.    </a:t>
-            </a:r>
-            <a:r>
-              <a:rPr sz="1400" b="1" i="0">
-                <a:solidFill>
-                  <a:srgbClr val="E84749"/>
-                </a:solidFill>
-                <a:latin typeface="Calibri"/>
-              </a:rPr>
-              <a:t>Pump &amp; dump: </a:t>
-            </a:r>
-            <a:r>
-              <a:rPr sz="1400" b="0" i="0">
-                <a:solidFill>
-                  <a:srgbClr val="EAF0F8"/>
-                </a:solidFill>
-                <a:latin typeface="Calibri"/>
-              </a:rPr>
-              <a:t>up fast, then crash.    </a:t>
-            </a:r>
-            <a:r>
-              <a:rPr sz="1400" b="1" i="0">
-                <a:solidFill>
-                  <a:srgbClr val="3B9EFF"/>
-                </a:solidFill>
-                <a:latin typeface="Calibri"/>
-              </a:rPr>
-              <a:t>Volume spike: </a:t>
-            </a:r>
-            <a:r>
-              <a:rPr sz="1400" b="0" i="0">
-                <a:solidFill>
-                  <a:srgbClr val="EAF0F8"/>
-                </a:solidFill>
-                <a:latin typeface="Calibri"/>
-              </a:rPr>
-              <a:t>sudden flood of trades.</a:t>
-            </a:r>
-          </a:p>
-          <a:p>
-            <a:pPr algn="ctr">
-              <a:lnSpc>
-                <a:spcPct val="100000"/>
-              </a:lnSpc>
-              <a:spcBef>
-                <a:spcPts val="0"/>
-              </a:spcBef>
-              <a:spcAft>
-                <a:spcPts val="600"/>
-              </a:spcAft>
-            </a:pPr>
-            <a:r>
-              <a:rPr sz="1350" b="0" i="1">
-                <a:solidFill>
-                  <a:srgbClr val="9AA8BD"/>
-                </a:solidFill>
-                <a:latin typeface="Calibri"/>
-              </a:rPr>
-              <a:t>Each match is saved as a MEDIUM or HIGH alert and appears on the dashboard in seconds.</a:t>
+              <a:t>Flink groups one minute of trades into a single candle: first, highest, lowest and last price. It uses each trade's real time, so late trades still land in the right candle.</a:t>
             </a:r>
           </a:p>
         </p:txBody>
@@ -7170,7 +8580,7 @@
 </p:sld>
 </file>
 
-<file path=ppt/slides/slide13.xml><?xml version="1.0" encoding="utf-8"?>
+<file path=ppt/slides/slide14.xml><?xml version="1.0" encoding="utf-8"?>
 <p:sld xmlns:a="http://schemas.openxmlformats.org/drawingml/2006/main" xmlns:r="http://schemas.openxmlformats.org/officeDocument/2006/relationships" xmlns:p="http://schemas.openxmlformats.org/presentationml/2006/main">
   <p:cSld>
     <p:bg>
@@ -7203,8 +8613,47 @@
         </p:nvSpPr>
         <p:spPr>
           <a:xfrm>
-            <a:off x="670560" y="341376"/>
-            <a:ext cx="2438400" cy="341376"/>
+            <a:off x="756824" y="609600"/>
+            <a:ext cx="2438400" cy="200055"/>
+          </a:xfrm>
+          <a:prstGeom prst="rect">
+            <a:avLst/>
+          </a:prstGeom>
+          <a:noFill/>
+        </p:spPr>
+        <p:txBody>
+          <a:bodyPr wrap="square" lIns="0" tIns="0" rIns="0" bIns="0" anchor="t">
+            <a:spAutoFit/>
+          </a:bodyPr>
+          <a:lstStyle/>
+          <a:p>
+            <a:pPr>
+              <a:spcAft>
+                <a:spcPts val="600"/>
+              </a:spcAft>
+            </a:pPr>
+            <a:r>
+              <a:rPr lang="en-US" sz="1300" b="1" dirty="0">
+                <a:solidFill>
+                  <a:srgbClr val="2EE6A6"/>
+                </a:solidFill>
+                <a:latin typeface="Calibri"/>
+              </a:rPr>
+              <a:t>IDEA 2</a:t>
+            </a:r>
+          </a:p>
+        </p:txBody>
+      </p:sp>
+      <p:sp>
+        <p:nvSpPr>
+          <p:cNvPr id="3" name="Text 1"/>
+          <p:cNvSpPr/>
+          <p:nvPr/>
+        </p:nvSpPr>
+        <p:spPr>
+          <a:xfrm>
+            <a:off x="670560" y="670560"/>
+            <a:ext cx="10850880" cy="914400"/>
           </a:xfrm>
           <a:prstGeom prst="rect">
             <a:avLst/>
@@ -7218,17 +8667,17 @@
           <a:p>
             <a:pPr defTabSz="1219170"/>
             <a:r>
-              <a:rPr lang="en-US" sz="1200" b="1" kern="0" spc="400" dirty="0">
-                <a:solidFill>
-                  <a:srgbClr val="00C896"/>
-                </a:solidFill>
-                <a:latin typeface="Calibri" pitchFamily="34" charset="0"/>
-                <a:ea typeface="Calibri" pitchFamily="34" charset="-122"/>
-                <a:cs typeface="Calibri" pitchFamily="34" charset="-120"/>
-              </a:rPr>
-              <a:t>THE CORE</a:t>
-            </a:r>
-            <a:endParaRPr lang="en-US" sz="1200" dirty="0">
+              <a:rPr lang="en-US" sz="3000" b="1" dirty="0">
+                <a:solidFill>
+                  <a:srgbClr val="FFFFFF"/>
+                </a:solidFill>
+                <a:latin typeface="Georgia" pitchFamily="34" charset="0"/>
+                <a:ea typeface="Georgia" pitchFamily="34" charset="-122"/>
+                <a:cs typeface="Georgia" pitchFamily="34" charset="-120"/>
+              </a:rPr>
+              <a:t>Turning trades into price candles</a:t>
+            </a:r>
+            <a:endParaRPr lang="en-US" sz="3000" dirty="0">
               <a:solidFill>
                 <a:prstClr val="black"/>
               </a:solidFill>
@@ -7239,14 +8688,14 @@
       </p:sp>
       <p:sp>
         <p:nvSpPr>
-          <p:cNvPr id="3" name="Text 1"/>
+          <p:cNvPr id="4" name="Text 2"/>
           <p:cNvSpPr/>
           <p:nvPr/>
         </p:nvSpPr>
         <p:spPr>
           <a:xfrm>
-            <a:off x="670560" y="670560"/>
-            <a:ext cx="10850880" cy="914400"/>
+            <a:off x="670560" y="1597151"/>
+            <a:ext cx="10972800" cy="550825"/>
           </a:xfrm>
           <a:prstGeom prst="rect">
             <a:avLst/>
@@ -7255,22 +8704,22 @@
           <a:ln/>
         </p:spPr>
         <p:txBody>
-          <a:bodyPr wrap="square" rtlCol="0" anchor="ctr"/>
+          <a:bodyPr wrap="square" rtlCol="0" anchor="t"/>
           <a:lstStyle/>
           <a:p>
             <a:pPr defTabSz="1219170"/>
             <a:r>
-              <a:rPr lang="en-US" sz="4267" b="1" dirty="0">
-                <a:solidFill>
-                  <a:srgbClr val="FFFFFF"/>
-                </a:solidFill>
-                <a:latin typeface="Georgia" pitchFamily="34" charset="0"/>
-                <a:ea typeface="Georgia" pitchFamily="34" charset="-122"/>
-                <a:cs typeface="Georgia" pitchFamily="34" charset="-120"/>
-              </a:rPr>
-              <a:t>The three cheating patterns we detect</a:t>
-            </a:r>
-            <a:endParaRPr lang="en-US" sz="4267" dirty="0">
+              <a:rPr lang="en-US" sz="1600" dirty="0">
+                <a:solidFill>
+                  <a:srgbClr val="8FA8C8"/>
+                </a:solidFill>
+                <a:latin typeface="Calibri" pitchFamily="34" charset="0"/>
+                <a:ea typeface="Calibri" pitchFamily="34" charset="-122"/>
+                <a:cs typeface="Calibri" pitchFamily="34" charset="-120"/>
+              </a:rPr>
+              <a:t>Traders read price candles. A candle is a simple summary of a short period: the first price (open), the highest, the lowest, and the last price (close). Flink groups all trades in each window into a single candle using TumblingEventTimeWindows.</a:t>
+            </a:r>
+            <a:endParaRPr lang="en-US" sz="1600" dirty="0">
               <a:solidFill>
                 <a:prstClr val="black"/>
               </a:solidFill>
@@ -7281,18 +8730,18 @@
       </p:sp>
       <p:sp>
         <p:nvSpPr>
-          <p:cNvPr id="4" name="Shape 2"/>
+          <p:cNvPr id="5" name="Shape 3"/>
           <p:cNvSpPr/>
           <p:nvPr/>
         </p:nvSpPr>
         <p:spPr>
           <a:xfrm>
-            <a:off x="365760" y="1767840"/>
-            <a:ext cx="3718560" cy="4657344"/>
+            <a:off x="670560" y="2438400"/>
+            <a:ext cx="5364480" cy="1584960"/>
           </a:xfrm>
           <a:prstGeom prst="roundRect">
             <a:avLst>
-              <a:gd name="adj" fmla="val 2623"/>
+              <a:gd name="adj" fmla="val 6154"/>
             </a:avLst>
           </a:prstGeom>
           <a:solidFill>
@@ -7300,7 +8749,7 @@
           </a:solidFill>
           <a:ln w="6350">
             <a:solidFill>
-              <a:srgbClr val="FFB300"/>
+              <a:srgbClr val="4FC3F7"/>
             </a:solidFill>
             <a:prstDash val="solid"/>
           </a:ln>
@@ -7321,14 +8770,14 @@
       </p:sp>
       <p:sp>
         <p:nvSpPr>
-          <p:cNvPr id="5" name="Text 3"/>
+          <p:cNvPr id="6" name="Text 4"/>
           <p:cNvSpPr/>
           <p:nvPr/>
         </p:nvSpPr>
         <p:spPr>
           <a:xfrm>
-            <a:off x="548640" y="1926336"/>
-            <a:ext cx="3352800" cy="548640"/>
+            <a:off x="853440" y="2584704"/>
+            <a:ext cx="4998720" cy="463296"/>
           </a:xfrm>
           <a:prstGeom prst="rect">
             <a:avLst/>
@@ -7342,17 +8791,17 @@
           <a:p>
             <a:pPr defTabSz="1219170"/>
             <a:r>
-              <a:rPr lang="en-US" sz="1867" b="1" dirty="0">
-                <a:solidFill>
-                  <a:srgbClr val="FFB300"/>
+              <a:rPr lang="en-US" sz="1733" b="1" dirty="0">
+                <a:solidFill>
+                  <a:srgbClr val="4FC3F7"/>
                 </a:solidFill>
                 <a:latin typeface="Calibri" pitchFamily="34" charset="0"/>
                 <a:ea typeface="Calibri" pitchFamily="34" charset="-122"/>
                 <a:cs typeface="Calibri" pitchFamily="34" charset="-120"/>
               </a:rPr>
-              <a:t>〰  Wash trade</a:t>
-            </a:r>
-            <a:endParaRPr lang="en-US" sz="1867" dirty="0">
+              <a:t>1-min window</a:t>
+            </a:r>
+            <a:endParaRPr lang="en-US" sz="1733" dirty="0">
               <a:solidFill>
                 <a:prstClr val="black"/>
               </a:solidFill>
@@ -7363,14 +8812,14 @@
       </p:sp>
       <p:sp>
         <p:nvSpPr>
-          <p:cNvPr id="6" name="Text 4"/>
+          <p:cNvPr id="7" name="Text 5"/>
           <p:cNvSpPr/>
           <p:nvPr/>
         </p:nvSpPr>
         <p:spPr>
           <a:xfrm>
-            <a:off x="548640" y="2560320"/>
-            <a:ext cx="3352800" cy="304800"/>
+            <a:off x="853440" y="3108960"/>
+            <a:ext cx="4998720" cy="365760"/>
           </a:xfrm>
           <a:prstGeom prst="rect">
             <a:avLst/>
@@ -7384,15 +8833,57 @@
           <a:p>
             <a:pPr defTabSz="1219170"/>
             <a:r>
-              <a:rPr lang="en-US" sz="1333" dirty="0">
-                <a:solidFill>
-                  <a:srgbClr val="5A7A9A"/>
+              <a:rPr lang="en-US" sz="1467" dirty="0">
+                <a:solidFill>
+                  <a:srgbClr val="8FA8C8"/>
                 </a:solidFill>
                 <a:latin typeface="Calibri" pitchFamily="34" charset="0"/>
                 <a:ea typeface="Calibri" pitchFamily="34" charset="-122"/>
                 <a:cs typeface="Calibri" pitchFamily="34" charset="-120"/>
               </a:rPr>
-              <a:t>What it is:</a:t>
+              <a:t>open · high · low · close · volume · count</a:t>
+            </a:r>
+            <a:endParaRPr lang="en-US" sz="1467" dirty="0">
+              <a:solidFill>
+                <a:prstClr val="black"/>
+              </a:solidFill>
+              <a:latin typeface="Calibri" panose="020F0502020204030204"/>
+            </a:endParaRPr>
+          </a:p>
+        </p:txBody>
+      </p:sp>
+      <p:sp>
+        <p:nvSpPr>
+          <p:cNvPr id="8" name="Text 6"/>
+          <p:cNvSpPr/>
+          <p:nvPr/>
+        </p:nvSpPr>
+        <p:spPr>
+          <a:xfrm>
+            <a:off x="853440" y="3511296"/>
+            <a:ext cx="4998720" cy="365760"/>
+          </a:xfrm>
+          <a:prstGeom prst="rect">
+            <a:avLst/>
+          </a:prstGeom>
+          <a:noFill/>
+          <a:ln/>
+        </p:spPr>
+        <p:txBody>
+          <a:bodyPr wrap="square" rtlCol="0" anchor="ctr"/>
+          <a:lstStyle/>
+          <a:p>
+            <a:pPr defTabSz="1219170"/>
+            <a:r>
+              <a:rPr lang="en-US" sz="1333" i="1" dirty="0">
+                <a:solidFill>
+                  <a:srgbClr val="5A7A9A"/>
+                </a:solidFill>
+                <a:latin typeface="Calibri" pitchFamily="34" charset="0"/>
+                <a:ea typeface="Calibri" pitchFamily="34" charset="-122"/>
+                <a:cs typeface="Calibri" pitchFamily="34" charset="-120"/>
+              </a:rPr>
+              <a:t>→ Grafana candlestick chart</a:t>
             </a:r>
             <a:endParaRPr lang="en-US" sz="1333" dirty="0">
               <a:solidFill>
@@ -7405,14 +8896,54 @@
       </p:sp>
       <p:sp>
         <p:nvSpPr>
-          <p:cNvPr id="7" name="Text 5"/>
+          <p:cNvPr id="9" name="Shape 7"/>
           <p:cNvSpPr/>
           <p:nvPr/>
         </p:nvSpPr>
         <p:spPr>
           <a:xfrm>
-            <a:off x="548640" y="2865120"/>
-            <a:ext cx="3352800" cy="914400"/>
+            <a:off x="6339840" y="2438400"/>
+            <a:ext cx="5364480" cy="1584960"/>
+          </a:xfrm>
+          <a:prstGeom prst="roundRect">
+            <a:avLst>
+              <a:gd name="adj" fmla="val 6154"/>
+            </a:avLst>
+          </a:prstGeom>
+          <a:solidFill>
+            <a:srgbClr val="1A2840"/>
+          </a:solidFill>
+          <a:ln w="6350">
+            <a:solidFill>
+              <a:srgbClr val="26A69A"/>
+            </a:solidFill>
+            <a:prstDash val="solid"/>
+          </a:ln>
+        </p:spPr>
+        <p:txBody>
+          <a:bodyPr/>
+          <a:lstStyle/>
+          <a:p>
+            <a:pPr defTabSz="1219170"/>
+            <a:endParaRPr lang="en-IN" sz="2400">
+              <a:solidFill>
+                <a:prstClr val="black"/>
+              </a:solidFill>
+              <a:latin typeface="Calibri" panose="020F0502020204030204"/>
+            </a:endParaRPr>
+          </a:p>
+        </p:txBody>
+      </p:sp>
+      <p:sp>
+        <p:nvSpPr>
+          <p:cNvPr id="10" name="Text 8"/>
+          <p:cNvSpPr/>
+          <p:nvPr/>
+        </p:nvSpPr>
+        <p:spPr>
+          <a:xfrm>
+            <a:off x="6522720" y="2584704"/>
+            <a:ext cx="4998720" cy="463296"/>
           </a:xfrm>
           <a:prstGeom prst="rect">
             <a:avLst/>
@@ -7421,20 +8952,104 @@
           <a:ln/>
         </p:spPr>
         <p:txBody>
-          <a:bodyPr wrap="square" rtlCol="0" anchor="t"/>
+          <a:bodyPr wrap="square" rtlCol="0" anchor="ctr"/>
           <a:lstStyle/>
           <a:p>
             <a:pPr defTabSz="1219170"/>
             <a:r>
-              <a:rPr lang="en-US" sz="1333" dirty="0">
-                <a:solidFill>
-                  <a:srgbClr val="FFFFFF"/>
+              <a:rPr lang="en-US" sz="1733" b="1" dirty="0">
+                <a:solidFill>
+                  <a:srgbClr val="26A69A"/>
                 </a:solidFill>
                 <a:latin typeface="Calibri" pitchFamily="34" charset="0"/>
                 <a:ea typeface="Calibri" pitchFamily="34" charset="-122"/>
                 <a:cs typeface="Calibri" pitchFamily="34" charset="-120"/>
               </a:rPr>
-              <a:t>A person quietly buys and sells to themselves to make a coin look busier than it really is.</a:t>
+              <a:t>5-min window</a:t>
+            </a:r>
+            <a:endParaRPr lang="en-US" sz="1733" dirty="0">
+              <a:solidFill>
+                <a:prstClr val="black"/>
+              </a:solidFill>
+              <a:latin typeface="Calibri" panose="020F0502020204030204"/>
+            </a:endParaRPr>
+          </a:p>
+        </p:txBody>
+      </p:sp>
+      <p:sp>
+        <p:nvSpPr>
+          <p:cNvPr id="11" name="Text 9"/>
+          <p:cNvSpPr/>
+          <p:nvPr/>
+        </p:nvSpPr>
+        <p:spPr>
+          <a:xfrm>
+            <a:off x="6522720" y="3108960"/>
+            <a:ext cx="4998720" cy="365760"/>
+          </a:xfrm>
+          <a:prstGeom prst="rect">
+            <a:avLst/>
+          </a:prstGeom>
+          <a:noFill/>
+          <a:ln/>
+        </p:spPr>
+        <p:txBody>
+          <a:bodyPr wrap="square" rtlCol="0" anchor="ctr"/>
+          <a:lstStyle/>
+          <a:p>
+            <a:pPr defTabSz="1219170"/>
+            <a:r>
+              <a:rPr lang="en-US" sz="1467" dirty="0">
+                <a:solidFill>
+                  <a:srgbClr val="8FA8C8"/>
+                </a:solidFill>
+                <a:latin typeface="Calibri" pitchFamily="34" charset="0"/>
+                <a:ea typeface="Calibri" pitchFamily="34" charset="-122"/>
+                <a:cs typeface="Calibri" pitchFamily="34" charset="-120"/>
+              </a:rPr>
+              <a:t>open · high · low · close · volume · count</a:t>
+            </a:r>
+            <a:endParaRPr lang="en-US" sz="1467" dirty="0">
+              <a:solidFill>
+                <a:prstClr val="black"/>
+              </a:solidFill>
+              <a:latin typeface="Calibri" panose="020F0502020204030204"/>
+            </a:endParaRPr>
+          </a:p>
+        </p:txBody>
+      </p:sp>
+      <p:sp>
+        <p:nvSpPr>
+          <p:cNvPr id="12" name="Text 10"/>
+          <p:cNvSpPr/>
+          <p:nvPr/>
+        </p:nvSpPr>
+        <p:spPr>
+          <a:xfrm>
+            <a:off x="6522720" y="3511296"/>
+            <a:ext cx="4998720" cy="365760"/>
+          </a:xfrm>
+          <a:prstGeom prst="rect">
+            <a:avLst/>
+          </a:prstGeom>
+          <a:noFill/>
+          <a:ln/>
+        </p:spPr>
+        <p:txBody>
+          <a:bodyPr wrap="square" rtlCol="0" anchor="ctr"/>
+          <a:lstStyle/>
+          <a:p>
+            <a:pPr defTabSz="1219170"/>
+            <a:r>
+              <a:rPr lang="en-US" sz="1333" i="1" dirty="0">
+                <a:solidFill>
+                  <a:srgbClr val="5A7A9A"/>
+                </a:solidFill>
+                <a:latin typeface="Calibri" pitchFamily="34" charset="0"/>
+                <a:ea typeface="Calibri" pitchFamily="34" charset="-122"/>
+                <a:cs typeface="Calibri" pitchFamily="34" charset="-120"/>
+              </a:rPr>
+              <a:t>→ Broader trend analysis</a:t>
             </a:r>
             <a:endParaRPr lang="en-US" sz="1333" dirty="0">
               <a:solidFill>
@@ -7447,14 +9062,14 @@
       </p:sp>
       <p:sp>
         <p:nvSpPr>
-          <p:cNvPr id="8" name="Text 6"/>
+          <p:cNvPr id="13" name="Text 11"/>
           <p:cNvSpPr/>
           <p:nvPr/>
         </p:nvSpPr>
         <p:spPr>
           <a:xfrm>
-            <a:off x="548640" y="3840480"/>
-            <a:ext cx="3352800" cy="304800"/>
+            <a:off x="670560" y="4206240"/>
+            <a:ext cx="10972800" cy="426720"/>
           </a:xfrm>
           <a:prstGeom prst="rect">
             <a:avLst/>
@@ -7463,20 +9078,144 @@
           <a:ln/>
         </p:spPr>
         <p:txBody>
-          <a:bodyPr wrap="square" rtlCol="0" anchor="ctr"/>
+          <a:bodyPr wrap="square" rtlCol="0" anchor="t"/>
           <a:lstStyle/>
           <a:p>
             <a:pPr defTabSz="1219170"/>
             <a:r>
-              <a:rPr lang="en-US" sz="1333" dirty="0">
-                <a:solidFill>
-                  <a:srgbClr val="5A7A9A"/>
+              <a:rPr lang="en-US" sz="1467" dirty="0">
+                <a:solidFill>
+                  <a:srgbClr val="FFB300"/>
                 </a:solidFill>
                 <a:latin typeface="Calibri" pitchFamily="34" charset="0"/>
                 <a:ea typeface="Calibri" pitchFamily="34" charset="-122"/>
                 <a:cs typeface="Calibri" pitchFamily="34" charset="-120"/>
               </a:rPr>
-              <a:t>Detection:</a:t>
+              <a:t>The Grafana dashboard has a $candle_size dropdown — switch between 1-minute and 5-minute candles without any code change.</a:t>
+            </a:r>
+            <a:endParaRPr lang="en-US" sz="1467" dirty="0">
+              <a:solidFill>
+                <a:prstClr val="black"/>
+              </a:solidFill>
+              <a:latin typeface="Calibri" panose="020F0502020204030204"/>
+            </a:endParaRPr>
+          </a:p>
+        </p:txBody>
+      </p:sp>
+      <p:sp>
+        <p:nvSpPr>
+          <p:cNvPr id="14" name="Shape 12"/>
+          <p:cNvSpPr/>
+          <p:nvPr/>
+        </p:nvSpPr>
+        <p:spPr>
+          <a:xfrm>
+            <a:off x="670560" y="4779264"/>
+            <a:ext cx="3535680" cy="1609344"/>
+          </a:xfrm>
+          <a:prstGeom prst="roundRect">
+            <a:avLst>
+              <a:gd name="adj" fmla="val 6061"/>
+            </a:avLst>
+          </a:prstGeom>
+          <a:solidFill>
+            <a:srgbClr val="1A2840"/>
+          </a:solidFill>
+          <a:ln w="6350">
+            <a:solidFill>
+              <a:srgbClr val="00C896"/>
+            </a:solidFill>
+            <a:prstDash val="solid"/>
+          </a:ln>
+        </p:spPr>
+        <p:txBody>
+          <a:bodyPr/>
+          <a:lstStyle/>
+          <a:p>
+            <a:pPr defTabSz="1219170"/>
+            <a:endParaRPr lang="en-IN" sz="2400">
+              <a:solidFill>
+                <a:prstClr val="black"/>
+              </a:solidFill>
+              <a:latin typeface="Calibri" panose="020F0502020204030204"/>
+            </a:endParaRPr>
+          </a:p>
+        </p:txBody>
+      </p:sp>
+      <p:sp>
+        <p:nvSpPr>
+          <p:cNvPr id="15" name="Text 13"/>
+          <p:cNvSpPr/>
+          <p:nvPr/>
+        </p:nvSpPr>
+        <p:spPr>
+          <a:xfrm>
+            <a:off x="853440" y="4925568"/>
+            <a:ext cx="3169920" cy="426720"/>
+          </a:xfrm>
+          <a:prstGeom prst="rect">
+            <a:avLst/>
+          </a:prstGeom>
+          <a:noFill/>
+          <a:ln/>
+        </p:spPr>
+        <p:txBody>
+          <a:bodyPr wrap="square" rtlCol="0" anchor="ctr"/>
+          <a:lstStyle/>
+          <a:p>
+            <a:pPr defTabSz="1219170"/>
+            <a:r>
+              <a:rPr lang="en-US" sz="1467" b="1" dirty="0">
+                <a:solidFill>
+                  <a:srgbClr val="00C896"/>
+                </a:solidFill>
+                <a:latin typeface="Calibri" pitchFamily="34" charset="0"/>
+                <a:ea typeface="Calibri" pitchFamily="34" charset="-122"/>
+                <a:cs typeface="Calibri" pitchFamily="34" charset="-120"/>
+              </a:rPr>
+              <a:t>Green candle</a:t>
+            </a:r>
+            <a:endParaRPr lang="en-US" sz="1467" dirty="0">
+              <a:solidFill>
+                <a:prstClr val="black"/>
+              </a:solidFill>
+              <a:latin typeface="Calibri" panose="020F0502020204030204"/>
+            </a:endParaRPr>
+          </a:p>
+        </p:txBody>
+      </p:sp>
+      <p:sp>
+        <p:nvSpPr>
+          <p:cNvPr id="16" name="Text 14"/>
+          <p:cNvSpPr/>
+          <p:nvPr/>
+        </p:nvSpPr>
+        <p:spPr>
+          <a:xfrm>
+            <a:off x="853440" y="5413248"/>
+            <a:ext cx="3169920" cy="914400"/>
+          </a:xfrm>
+          <a:prstGeom prst="rect">
+            <a:avLst/>
+          </a:prstGeom>
+          <a:noFill/>
+          <a:ln/>
+        </p:spPr>
+        <p:txBody>
+          <a:bodyPr wrap="square" rtlCol="0" anchor="t"/>
+          <a:lstStyle/>
+          <a:p>
+            <a:pPr defTabSz="1219170"/>
+            <a:r>
+              <a:rPr lang="en-US" sz="1333" dirty="0">
+                <a:solidFill>
+                  <a:srgbClr val="8FA8C8"/>
+                </a:solidFill>
+                <a:latin typeface="Calibri" pitchFamily="34" charset="0"/>
+                <a:ea typeface="Calibri" pitchFamily="34" charset="-122"/>
+                <a:cs typeface="Calibri" pitchFamily="34" charset="-120"/>
+              </a:rPr>
+              <a:t>Close price &gt; open price — buyers were in control that minute</a:t>
             </a:r>
             <a:endParaRPr lang="en-US" sz="1333" dirty="0">
               <a:solidFill>
@@ -7489,144 +9228,18 @@
       </p:sp>
       <p:sp>
         <p:nvSpPr>
-          <p:cNvPr id="9" name="Text 7"/>
+          <p:cNvPr id="17" name="Shape 15"/>
           <p:cNvSpPr/>
           <p:nvPr/>
         </p:nvSpPr>
         <p:spPr>
           <a:xfrm>
-            <a:off x="548640" y="4120896"/>
-            <a:ext cx="3352800" cy="755904"/>
-          </a:xfrm>
-          <a:prstGeom prst="rect">
-            <a:avLst/>
-          </a:prstGeom>
-          <a:noFill/>
-          <a:ln/>
-        </p:spPr>
-        <p:txBody>
-          <a:bodyPr wrap="square" rtlCol="0" anchor="t"/>
-          <a:lstStyle/>
-          <a:p>
-            <a:pPr defTabSz="1219170"/>
-            <a:r>
-              <a:rPr lang="en-US" sz="1333" dirty="0">
-                <a:solidFill>
-                  <a:srgbClr val="8FA8C8"/>
-                </a:solidFill>
-                <a:latin typeface="Calibri" pitchFamily="34" charset="0"/>
-                <a:ea typeface="Calibri" pitchFamily="34" charset="-122"/>
-                <a:cs typeface="Calibri" pitchFamily="34" charset="-120"/>
-              </a:rPr>
-              <a:t>Price swings ±0.3% AND volume is 1.5× the rolling average across last 60 trades.</a:t>
-            </a:r>
-            <a:endParaRPr lang="en-US" sz="1333" dirty="0">
-              <a:solidFill>
-                <a:prstClr val="black"/>
-              </a:solidFill>
-              <a:latin typeface="Calibri" panose="020F0502020204030204"/>
-            </a:endParaRPr>
-          </a:p>
-        </p:txBody>
-      </p:sp>
-      <p:sp>
-        <p:nvSpPr>
-          <p:cNvPr id="10" name="Text 8"/>
-          <p:cNvSpPr/>
-          <p:nvPr/>
-        </p:nvSpPr>
-        <p:spPr>
-          <a:xfrm>
-            <a:off x="548640" y="4901184"/>
-            <a:ext cx="3352800" cy="304800"/>
-          </a:xfrm>
-          <a:prstGeom prst="rect">
-            <a:avLst/>
-          </a:prstGeom>
-          <a:noFill/>
-          <a:ln/>
-        </p:spPr>
-        <p:txBody>
-          <a:bodyPr wrap="square" rtlCol="0" anchor="ctr"/>
-          <a:lstStyle/>
-          <a:p>
-            <a:pPr defTabSz="1219170"/>
-            <a:r>
-              <a:rPr lang="en-US" sz="1333" dirty="0">
-                <a:solidFill>
-                  <a:srgbClr val="5A7A9A"/>
-                </a:solidFill>
-                <a:latin typeface="Calibri" pitchFamily="34" charset="0"/>
-                <a:ea typeface="Calibri" pitchFamily="34" charset="-122"/>
-                <a:cs typeface="Calibri" pitchFamily="34" charset="-120"/>
-              </a:rPr>
-              <a:t>Flink state:</a:t>
-            </a:r>
-            <a:endParaRPr lang="en-US" sz="1333" dirty="0">
-              <a:solidFill>
-                <a:prstClr val="black"/>
-              </a:solidFill>
-              <a:latin typeface="Calibri" panose="020F0502020204030204"/>
-            </a:endParaRPr>
-          </a:p>
-        </p:txBody>
-      </p:sp>
-      <p:sp>
-        <p:nvSpPr>
-          <p:cNvPr id="11" name="Text 9"/>
-          <p:cNvSpPr/>
-          <p:nvPr/>
-        </p:nvSpPr>
-        <p:spPr>
-          <a:xfrm>
-            <a:off x="548640" y="5181600"/>
-            <a:ext cx="3352800" cy="877824"/>
-          </a:xfrm>
-          <a:prstGeom prst="rect">
-            <a:avLst/>
-          </a:prstGeom>
-          <a:noFill/>
-          <a:ln/>
-        </p:spPr>
-        <p:txBody>
-          <a:bodyPr wrap="square" rtlCol="0" anchor="t"/>
-          <a:lstStyle/>
-          <a:p>
-            <a:pPr defTabSz="1219170"/>
-            <a:r>
-              <a:rPr lang="en-US" sz="1333" dirty="0">
-                <a:solidFill>
-                  <a:srgbClr val="8FA8C8"/>
-                </a:solidFill>
-                <a:latin typeface="Calibri" pitchFamily="34" charset="0"/>
-                <a:ea typeface="Calibri" pitchFamily="34" charset="-122"/>
-                <a:cs typeface="Calibri" pitchFamily="34" charset="-120"/>
-              </a:rPr>
-              <a:t>ListState — rolling price and volume history, capped at 60 entries per coin.</a:t>
-            </a:r>
-            <a:endParaRPr lang="en-US" sz="1333" dirty="0">
-              <a:solidFill>
-                <a:prstClr val="black"/>
-              </a:solidFill>
-              <a:latin typeface="Calibri" panose="020F0502020204030204"/>
-            </a:endParaRPr>
-          </a:p>
-        </p:txBody>
-      </p:sp>
-      <p:sp>
-        <p:nvSpPr>
-          <p:cNvPr id="12" name="Shape 10"/>
-          <p:cNvSpPr/>
-          <p:nvPr/>
-        </p:nvSpPr>
-        <p:spPr>
-          <a:xfrm>
-            <a:off x="4267200" y="1767840"/>
-            <a:ext cx="3718560" cy="4657344"/>
+            <a:off x="4450080" y="4779264"/>
+            <a:ext cx="3535680" cy="1609344"/>
           </a:xfrm>
           <a:prstGeom prst="roundRect">
             <a:avLst>
-              <a:gd name="adj" fmla="val 2623"/>
+              <a:gd name="adj" fmla="val 6061"/>
             </a:avLst>
           </a:prstGeom>
           <a:solidFill>
@@ -7655,14 +9268,14 @@
       </p:sp>
       <p:sp>
         <p:nvSpPr>
-          <p:cNvPr id="13" name="Text 11"/>
+          <p:cNvPr id="18" name="Text 16"/>
           <p:cNvSpPr/>
           <p:nvPr/>
         </p:nvSpPr>
         <p:spPr>
           <a:xfrm>
-            <a:off x="4450080" y="1926336"/>
-            <a:ext cx="3352800" cy="548640"/>
+            <a:off x="4632960" y="4925568"/>
+            <a:ext cx="3169920" cy="426720"/>
           </a:xfrm>
           <a:prstGeom prst="rect">
             <a:avLst/>
@@ -7676,7 +9289,7 @@
           <a:p>
             <a:pPr defTabSz="1219170"/>
             <a:r>
-              <a:rPr lang="en-US" sz="1867" b="1" dirty="0">
+              <a:rPr lang="en-US" sz="1467" b="1" dirty="0">
                 <a:solidFill>
                   <a:srgbClr val="FF5252"/>
                 </a:solidFill>
@@ -7684,9 +9297,9 @@
                 <a:ea typeface="Calibri" pitchFamily="34" charset="-122"/>
                 <a:cs typeface="Calibri" pitchFamily="34" charset="-120"/>
               </a:rPr>
-              <a:t>📈  Pump &amp; dump</a:t>
-            </a:r>
-            <a:endParaRPr lang="en-US" sz="1867" dirty="0">
+              <a:t>Red candle</a:t>
+            </a:r>
+            <a:endParaRPr lang="en-US" sz="1467" dirty="0">
               <a:solidFill>
                 <a:prstClr val="black"/>
               </a:solidFill>
@@ -7697,14 +9310,14 @@
       </p:sp>
       <p:sp>
         <p:nvSpPr>
-          <p:cNvPr id="14" name="Text 12"/>
+          <p:cNvPr id="19" name="Text 17"/>
           <p:cNvSpPr/>
           <p:nvPr/>
         </p:nvSpPr>
         <p:spPr>
           <a:xfrm>
-            <a:off x="4450080" y="2560320"/>
-            <a:ext cx="3352800" cy="304800"/>
+            <a:off x="4632960" y="5413248"/>
+            <a:ext cx="3169920" cy="914400"/>
           </a:xfrm>
           <a:prstGeom prst="rect">
             <a:avLst/>
@@ -7713,20 +9326,20 @@
           <a:ln/>
         </p:spPr>
         <p:txBody>
-          <a:bodyPr wrap="square" rtlCol="0" anchor="ctr"/>
+          <a:bodyPr wrap="square" rtlCol="0" anchor="t"/>
           <a:lstStyle/>
           <a:p>
             <a:pPr defTabSz="1219170"/>
             <a:r>
               <a:rPr lang="en-US" sz="1333" dirty="0">
                 <a:solidFill>
-                  <a:srgbClr val="5A7A9A"/>
+                  <a:srgbClr val="8FA8C8"/>
                 </a:solidFill>
                 <a:latin typeface="Calibri" pitchFamily="34" charset="0"/>
                 <a:ea typeface="Calibri" pitchFamily="34" charset="-122"/>
                 <a:cs typeface="Calibri" pitchFamily="34" charset="-120"/>
               </a:rPr>
-              <a:t>What it is:</a:t>
+              <a:t>Close price &lt; open price — sellers were in control that minute</a:t>
             </a:r>
             <a:endParaRPr lang="en-US" sz="1333" dirty="0">
               <a:solidFill>
@@ -7739,228 +9352,18 @@
       </p:sp>
       <p:sp>
         <p:nvSpPr>
-          <p:cNvPr id="15" name="Text 13"/>
-          <p:cNvSpPr/>
-          <p:nvPr/>
-        </p:nvSpPr>
-        <p:spPr>
-          <a:xfrm>
-            <a:off x="4450080" y="2865120"/>
-            <a:ext cx="3352800" cy="914400"/>
-          </a:xfrm>
-          <a:prstGeom prst="rect">
-            <a:avLst/>
-          </a:prstGeom>
-          <a:noFill/>
-          <a:ln/>
-        </p:spPr>
-        <p:txBody>
-          <a:bodyPr wrap="square" rtlCol="0" anchor="t"/>
-          <a:lstStyle/>
-          <a:p>
-            <a:pPr defTabSz="1219170"/>
-            <a:r>
-              <a:rPr lang="en-US" sz="1333" dirty="0">
-                <a:solidFill>
-                  <a:srgbClr val="FFFFFF"/>
-                </a:solidFill>
-                <a:latin typeface="Calibri" pitchFamily="34" charset="0"/>
-                <a:ea typeface="Calibri" pitchFamily="34" charset="-122"/>
-                <a:cs typeface="Calibri" pitchFamily="34" charset="-120"/>
-              </a:rPr>
-              <a:t>A group pushes a price up fast, then sells everything at the top, leaving buyers with losses.</a:t>
-            </a:r>
-            <a:endParaRPr lang="en-US" sz="1333" dirty="0">
-              <a:solidFill>
-                <a:prstClr val="black"/>
-              </a:solidFill>
-              <a:latin typeface="Calibri" panose="020F0502020204030204"/>
-            </a:endParaRPr>
-          </a:p>
-        </p:txBody>
-      </p:sp>
-      <p:sp>
-        <p:nvSpPr>
-          <p:cNvPr id="16" name="Text 14"/>
-          <p:cNvSpPr/>
-          <p:nvPr/>
-        </p:nvSpPr>
-        <p:spPr>
-          <a:xfrm>
-            <a:off x="4450080" y="3840480"/>
-            <a:ext cx="3352800" cy="304800"/>
-          </a:xfrm>
-          <a:prstGeom prst="rect">
-            <a:avLst/>
-          </a:prstGeom>
-          <a:noFill/>
-          <a:ln/>
-        </p:spPr>
-        <p:txBody>
-          <a:bodyPr wrap="square" rtlCol="0" anchor="ctr"/>
-          <a:lstStyle/>
-          <a:p>
-            <a:pPr defTabSz="1219170"/>
-            <a:r>
-              <a:rPr lang="en-US" sz="1333" dirty="0">
-                <a:solidFill>
-                  <a:srgbClr val="5A7A9A"/>
-                </a:solidFill>
-                <a:latin typeface="Calibri" pitchFamily="34" charset="0"/>
-                <a:ea typeface="Calibri" pitchFamily="34" charset="-122"/>
-                <a:cs typeface="Calibri" pitchFamily="34" charset="-120"/>
-              </a:rPr>
-              <a:t>Detection:</a:t>
-            </a:r>
-            <a:endParaRPr lang="en-US" sz="1333" dirty="0">
-              <a:solidFill>
-                <a:prstClr val="black"/>
-              </a:solidFill>
-              <a:latin typeface="Calibri" panose="020F0502020204030204"/>
-            </a:endParaRPr>
-          </a:p>
-        </p:txBody>
-      </p:sp>
-      <p:sp>
-        <p:nvSpPr>
-          <p:cNvPr id="17" name="Text 15"/>
-          <p:cNvSpPr/>
-          <p:nvPr/>
-        </p:nvSpPr>
-        <p:spPr>
-          <a:xfrm>
-            <a:off x="4450080" y="4120896"/>
-            <a:ext cx="3352800" cy="755904"/>
-          </a:xfrm>
-          <a:prstGeom prst="rect">
-            <a:avLst/>
-          </a:prstGeom>
-          <a:noFill/>
-          <a:ln/>
-        </p:spPr>
-        <p:txBody>
-          <a:bodyPr wrap="square" rtlCol="0" anchor="t"/>
-          <a:lstStyle/>
-          <a:p>
-            <a:pPr defTabSz="1219170"/>
-            <a:r>
-              <a:rPr lang="en-US" sz="1333" dirty="0">
-                <a:solidFill>
-                  <a:srgbClr val="8FA8C8"/>
-                </a:solidFill>
-                <a:latin typeface="Calibri" pitchFamily="34" charset="0"/>
-                <a:ea typeface="Calibri" pitchFamily="34" charset="-122"/>
-                <a:cs typeface="Calibri" pitchFamily="34" charset="-120"/>
-              </a:rPr>
-              <a:t>Price rises 0.4%, then drops 0.3% from the peak within 4 minutes.</a:t>
-            </a:r>
-            <a:endParaRPr lang="en-US" sz="1333" dirty="0">
-              <a:solidFill>
-                <a:prstClr val="black"/>
-              </a:solidFill>
-              <a:latin typeface="Calibri" panose="020F0502020204030204"/>
-            </a:endParaRPr>
-          </a:p>
-        </p:txBody>
-      </p:sp>
-      <p:sp>
-        <p:nvSpPr>
-          <p:cNvPr id="18" name="Text 16"/>
-          <p:cNvSpPr/>
-          <p:nvPr/>
-        </p:nvSpPr>
-        <p:spPr>
-          <a:xfrm>
-            <a:off x="4450080" y="4901184"/>
-            <a:ext cx="3352800" cy="304800"/>
-          </a:xfrm>
-          <a:prstGeom prst="rect">
-            <a:avLst/>
-          </a:prstGeom>
-          <a:noFill/>
-          <a:ln/>
-        </p:spPr>
-        <p:txBody>
-          <a:bodyPr wrap="square" rtlCol="0" anchor="ctr"/>
-          <a:lstStyle/>
-          <a:p>
-            <a:pPr defTabSz="1219170"/>
-            <a:r>
-              <a:rPr lang="en-US" sz="1333" dirty="0">
-                <a:solidFill>
-                  <a:srgbClr val="5A7A9A"/>
-                </a:solidFill>
-                <a:latin typeface="Calibri" pitchFamily="34" charset="0"/>
-                <a:ea typeface="Calibri" pitchFamily="34" charset="-122"/>
-                <a:cs typeface="Calibri" pitchFamily="34" charset="-120"/>
-              </a:rPr>
-              <a:t>Flink state:</a:t>
-            </a:r>
-            <a:endParaRPr lang="en-US" sz="1333" dirty="0">
-              <a:solidFill>
-                <a:prstClr val="black"/>
-              </a:solidFill>
-              <a:latin typeface="Calibri" panose="020F0502020204030204"/>
-            </a:endParaRPr>
-          </a:p>
-        </p:txBody>
-      </p:sp>
-      <p:sp>
-        <p:nvSpPr>
-          <p:cNvPr id="19" name="Text 17"/>
-          <p:cNvSpPr/>
-          <p:nvPr/>
-        </p:nvSpPr>
-        <p:spPr>
-          <a:xfrm>
-            <a:off x="4450080" y="5181600"/>
-            <a:ext cx="3352800" cy="877824"/>
-          </a:xfrm>
-          <a:prstGeom prst="rect">
-            <a:avLst/>
-          </a:prstGeom>
-          <a:noFill/>
-          <a:ln/>
-        </p:spPr>
-        <p:txBody>
-          <a:bodyPr wrap="square" rtlCol="0" anchor="t"/>
-          <a:lstStyle/>
-          <a:p>
-            <a:pPr defTabSz="1219170"/>
-            <a:r>
-              <a:rPr lang="en-US" sz="1333" dirty="0">
-                <a:solidFill>
-                  <a:srgbClr val="8FA8C8"/>
-                </a:solidFill>
-                <a:latin typeface="Calibri" pitchFamily="34" charset="0"/>
-                <a:ea typeface="Calibri" pitchFamily="34" charset="-122"/>
-                <a:cs typeface="Calibri" pitchFamily="34" charset="-120"/>
-              </a:rPr>
-              <a:t>ValueState — 3-phase state machine: WATCHING → PUMP_CONFIRMED → ALERT.</a:t>
-            </a:r>
-            <a:endParaRPr lang="en-US" sz="1333" dirty="0">
-              <a:solidFill>
-                <a:prstClr val="black"/>
-              </a:solidFill>
-              <a:latin typeface="Calibri" panose="020F0502020204030204"/>
-            </a:endParaRPr>
-          </a:p>
-        </p:txBody>
-      </p:sp>
-      <p:sp>
-        <p:nvSpPr>
           <p:cNvPr id="20" name="Shape 18"/>
           <p:cNvSpPr/>
           <p:nvPr/>
         </p:nvSpPr>
         <p:spPr>
           <a:xfrm>
-            <a:off x="8168640" y="1767840"/>
-            <a:ext cx="3718560" cy="4657344"/>
+            <a:off x="8229600" y="4779264"/>
+            <a:ext cx="3535680" cy="1609344"/>
           </a:xfrm>
           <a:prstGeom prst="roundRect">
             <a:avLst>
-              <a:gd name="adj" fmla="val 2623"/>
+              <a:gd name="adj" fmla="val 6061"/>
             </a:avLst>
           </a:prstGeom>
           <a:solidFill>
@@ -7995,8 +9398,8 @@
         </p:nvSpPr>
         <p:spPr>
           <a:xfrm>
-            <a:off x="8351520" y="1926336"/>
-            <a:ext cx="3352800" cy="548640"/>
+            <a:off x="8412480" y="4925568"/>
+            <a:ext cx="3169920" cy="426720"/>
           </a:xfrm>
           <a:prstGeom prst="rect">
             <a:avLst/>
@@ -8010,7 +9413,7 @@
           <a:p>
             <a:pPr defTabSz="1219170"/>
             <a:r>
-              <a:rPr lang="en-US" sz="1867" b="1" dirty="0">
+              <a:rPr lang="en-US" sz="1467" b="1" dirty="0">
                 <a:solidFill>
                   <a:srgbClr val="4FC3F7"/>
                 </a:solidFill>
@@ -8018,9 +9421,9 @@
                 <a:ea typeface="Calibri" pitchFamily="34" charset="-122"/>
                 <a:cs typeface="Calibri" pitchFamily="34" charset="-120"/>
               </a:rPr>
-              <a:t>🌊  Volume spike</a:t>
-            </a:r>
-            <a:endParaRPr lang="en-US" sz="1867" dirty="0">
+              <a:t>Getting it right</a:t>
+            </a:r>
+            <a:endParaRPr lang="en-US" sz="1467" dirty="0">
               <a:solidFill>
                 <a:prstClr val="black"/>
               </a:solidFill>
@@ -8037,8 +9440,8 @@
         </p:nvSpPr>
         <p:spPr>
           <a:xfrm>
-            <a:off x="8351520" y="2560320"/>
-            <a:ext cx="3352800" cy="304800"/>
+            <a:off x="8412480" y="5255672"/>
+            <a:ext cx="3169920" cy="914400"/>
           </a:xfrm>
           <a:prstGeom prst="rect">
             <a:avLst/>
@@ -8047,20 +9450,20 @@
           <a:ln/>
         </p:spPr>
         <p:txBody>
-          <a:bodyPr wrap="square" rtlCol="0" anchor="ctr"/>
-          <a:lstStyle/>
-          <a:p>
-            <a:pPr defTabSz="1219170"/>
+          <a:bodyPr wrap="square" rtlCol="0" anchor="t"/>
+          <a:lstStyle/>
+          <a:p>
+            <a:pPr algn="just" defTabSz="1219170"/>
             <a:r>
               <a:rPr lang="en-US" sz="1333" dirty="0">
                 <a:solidFill>
-                  <a:srgbClr val="5A7A9A"/>
+                  <a:srgbClr val="8FA8C8"/>
                 </a:solidFill>
                 <a:latin typeface="Calibri" pitchFamily="34" charset="0"/>
                 <a:ea typeface="Calibri" pitchFamily="34" charset="-122"/>
                 <a:cs typeface="Calibri" pitchFamily="34" charset="-120"/>
               </a:rPr>
-              <a:t>What it is:</a:t>
+              <a:t>We use the trade's exchange timestamp, not arrival time. A 3-second watermark absorbs late messages. A 10-second idleness setting stops a quiet coin from freezing all windows.</a:t>
             </a:r>
             <a:endParaRPr lang="en-US" sz="1333" dirty="0">
               <a:solidFill>
@@ -8071,942 +9474,6 @@
           </a:p>
         </p:txBody>
       </p:sp>
-      <p:sp>
-        <p:nvSpPr>
-          <p:cNvPr id="23" name="Text 21"/>
-          <p:cNvSpPr/>
-          <p:nvPr/>
-        </p:nvSpPr>
-        <p:spPr>
-          <a:xfrm>
-            <a:off x="8351520" y="2865120"/>
-            <a:ext cx="3352800" cy="914400"/>
-          </a:xfrm>
-          <a:prstGeom prst="rect">
-            <a:avLst/>
-          </a:prstGeom>
-          <a:noFill/>
-          <a:ln/>
-        </p:spPr>
-        <p:txBody>
-          <a:bodyPr wrap="square" rtlCol="0" anchor="t"/>
-          <a:lstStyle/>
-          <a:p>
-            <a:pPr defTabSz="1219170"/>
-            <a:r>
-              <a:rPr lang="en-US" sz="1333" dirty="0">
-                <a:solidFill>
-                  <a:srgbClr val="FFFFFF"/>
-                </a:solidFill>
-                <a:latin typeface="Calibri" pitchFamily="34" charset="0"/>
-                <a:ea typeface="Calibri" pitchFamily="34" charset="-122"/>
-                <a:cs typeface="Calibri" pitchFamily="34" charset="-120"/>
-              </a:rPr>
-              <a:t>A sudden flood of trades — can signal the beginning of a flash crash or manipulation.</a:t>
-            </a:r>
-            <a:endParaRPr lang="en-US" sz="1333" dirty="0">
-              <a:solidFill>
-                <a:prstClr val="black"/>
-              </a:solidFill>
-              <a:latin typeface="Calibri" panose="020F0502020204030204"/>
-            </a:endParaRPr>
-          </a:p>
-        </p:txBody>
-      </p:sp>
-      <p:sp>
-        <p:nvSpPr>
-          <p:cNvPr id="24" name="Text 22"/>
-          <p:cNvSpPr/>
-          <p:nvPr/>
-        </p:nvSpPr>
-        <p:spPr>
-          <a:xfrm>
-            <a:off x="8351520" y="3840480"/>
-            <a:ext cx="3352800" cy="304800"/>
-          </a:xfrm>
-          <a:prstGeom prst="rect">
-            <a:avLst/>
-          </a:prstGeom>
-          <a:noFill/>
-          <a:ln/>
-        </p:spPr>
-        <p:txBody>
-          <a:bodyPr wrap="square" rtlCol="0" anchor="ctr"/>
-          <a:lstStyle/>
-          <a:p>
-            <a:pPr defTabSz="1219170"/>
-            <a:r>
-              <a:rPr lang="en-US" sz="1333" dirty="0">
-                <a:solidFill>
-                  <a:srgbClr val="5A7A9A"/>
-                </a:solidFill>
-                <a:latin typeface="Calibri" pitchFamily="34" charset="0"/>
-                <a:ea typeface="Calibri" pitchFamily="34" charset="-122"/>
-                <a:cs typeface="Calibri" pitchFamily="34" charset="-120"/>
-              </a:rPr>
-              <a:t>Detection:</a:t>
-            </a:r>
-            <a:endParaRPr lang="en-US" sz="1333" dirty="0">
-              <a:solidFill>
-                <a:prstClr val="black"/>
-              </a:solidFill>
-              <a:latin typeface="Calibri" panose="020F0502020204030204"/>
-            </a:endParaRPr>
-          </a:p>
-        </p:txBody>
-      </p:sp>
-      <p:sp>
-        <p:nvSpPr>
-          <p:cNvPr id="25" name="Text 23"/>
-          <p:cNvSpPr/>
-          <p:nvPr/>
-        </p:nvSpPr>
-        <p:spPr>
-          <a:xfrm>
-            <a:off x="8351520" y="4120896"/>
-            <a:ext cx="3352800" cy="755904"/>
-          </a:xfrm>
-          <a:prstGeom prst="rect">
-            <a:avLst/>
-          </a:prstGeom>
-          <a:noFill/>
-          <a:ln/>
-        </p:spPr>
-        <p:txBody>
-          <a:bodyPr wrap="square" rtlCol="0" anchor="t"/>
-          <a:lstStyle/>
-          <a:p>
-            <a:pPr defTabSz="1219170"/>
-            <a:r>
-              <a:rPr lang="en-US" sz="1333" dirty="0">
-                <a:solidFill>
-                  <a:srgbClr val="8FA8C8"/>
-                </a:solidFill>
-                <a:latin typeface="Calibri" pitchFamily="34" charset="0"/>
-                <a:ea typeface="Calibri" pitchFamily="34" charset="-122"/>
-                <a:cs typeface="Calibri" pitchFamily="34" charset="-120"/>
-              </a:rPr>
-              <a:t>Trade count in 10 seconds exceeds 2× the 10-minute rolling average. 30s cooldown.</a:t>
-            </a:r>
-            <a:endParaRPr lang="en-US" sz="1333" dirty="0">
-              <a:solidFill>
-                <a:prstClr val="black"/>
-              </a:solidFill>
-              <a:latin typeface="Calibri" panose="020F0502020204030204"/>
-            </a:endParaRPr>
-          </a:p>
-        </p:txBody>
-      </p:sp>
-      <p:sp>
-        <p:nvSpPr>
-          <p:cNvPr id="26" name="Text 24"/>
-          <p:cNvSpPr/>
-          <p:nvPr/>
-        </p:nvSpPr>
-        <p:spPr>
-          <a:xfrm>
-            <a:off x="8351520" y="4901184"/>
-            <a:ext cx="3352800" cy="304800"/>
-          </a:xfrm>
-          <a:prstGeom prst="rect">
-            <a:avLst/>
-          </a:prstGeom>
-          <a:noFill/>
-          <a:ln/>
-        </p:spPr>
-        <p:txBody>
-          <a:bodyPr wrap="square" rtlCol="0" anchor="ctr"/>
-          <a:lstStyle/>
-          <a:p>
-            <a:pPr defTabSz="1219170"/>
-            <a:r>
-              <a:rPr lang="en-US" sz="1333" dirty="0">
-                <a:solidFill>
-                  <a:srgbClr val="5A7A9A"/>
-                </a:solidFill>
-                <a:latin typeface="Calibri" pitchFamily="34" charset="0"/>
-                <a:ea typeface="Calibri" pitchFamily="34" charset="-122"/>
-                <a:cs typeface="Calibri" pitchFamily="34" charset="-120"/>
-              </a:rPr>
-              <a:t>Flink state:</a:t>
-            </a:r>
-            <a:endParaRPr lang="en-US" sz="1333" dirty="0">
-              <a:solidFill>
-                <a:prstClr val="black"/>
-              </a:solidFill>
-              <a:latin typeface="Calibri" panose="020F0502020204030204"/>
-            </a:endParaRPr>
-          </a:p>
-        </p:txBody>
-      </p:sp>
-      <p:sp>
-        <p:nvSpPr>
-          <p:cNvPr id="27" name="Text 25"/>
-          <p:cNvSpPr/>
-          <p:nvPr/>
-        </p:nvSpPr>
-        <p:spPr>
-          <a:xfrm>
-            <a:off x="8351520" y="5181600"/>
-            <a:ext cx="3352800" cy="877824"/>
-          </a:xfrm>
-          <a:prstGeom prst="rect">
-            <a:avLst/>
-          </a:prstGeom>
-          <a:noFill/>
-          <a:ln/>
-        </p:spPr>
-        <p:txBody>
-          <a:bodyPr wrap="square" rtlCol="0" anchor="t"/>
-          <a:lstStyle/>
-          <a:p>
-            <a:pPr defTabSz="1219170"/>
-            <a:r>
-              <a:rPr lang="en-US" sz="1333" dirty="0">
-                <a:solidFill>
-                  <a:srgbClr val="8FA8C8"/>
-                </a:solidFill>
-                <a:latin typeface="Calibri" pitchFamily="34" charset="0"/>
-                <a:ea typeface="Calibri" pitchFamily="34" charset="-122"/>
-                <a:cs typeface="Calibri" pitchFamily="34" charset="-120"/>
-              </a:rPr>
-              <a:t>ListState — sliding 10s window + 60-bucket rolling history per coin.</a:t>
-            </a:r>
-            <a:endParaRPr lang="en-US" sz="1333" dirty="0">
-              <a:solidFill>
-                <a:prstClr val="black"/>
-              </a:solidFill>
-              <a:latin typeface="Calibri" panose="020F0502020204030204"/>
-            </a:endParaRPr>
-          </a:p>
-        </p:txBody>
-      </p:sp>
-      <p:sp>
-        <p:nvSpPr>
-          <p:cNvPr id="28" name="Text 26"/>
-          <p:cNvSpPr/>
-          <p:nvPr/>
-        </p:nvSpPr>
-        <p:spPr>
-          <a:xfrm>
-            <a:off x="365760" y="6522720"/>
-            <a:ext cx="11460480" cy="304800"/>
-          </a:xfrm>
-          <a:prstGeom prst="rect">
-            <a:avLst/>
-          </a:prstGeom>
-          <a:noFill/>
-          <a:ln/>
-        </p:spPr>
-        <p:txBody>
-          <a:bodyPr wrap="square" rtlCol="0" anchor="t"/>
-          <a:lstStyle/>
-          <a:p>
-            <a:pPr defTabSz="1219170"/>
-            <a:r>
-              <a:rPr lang="en-US" sz="1333" dirty="0">
-                <a:solidFill>
-                  <a:srgbClr val="5A7A9A"/>
-                </a:solidFill>
-                <a:latin typeface="Calibri" pitchFamily="34" charset="0"/>
-                <a:ea typeface="Calibri" pitchFamily="34" charset="-122"/>
-                <a:cs typeface="Calibri" pitchFamily="34" charset="-120"/>
-              </a:rPr>
-              <a:t>Each match is saved as MEDIUM or HIGH severity and appears in the dashboard alerts table within seconds.</a:t>
-            </a:r>
-            <a:endParaRPr lang="en-US" sz="1333" dirty="0">
-              <a:solidFill>
-                <a:prstClr val="black"/>
-              </a:solidFill>
-              <a:latin typeface="Calibri" panose="020F0502020204030204"/>
-            </a:endParaRPr>
-          </a:p>
-        </p:txBody>
-      </p:sp>
-    </p:spTree>
-  </p:cSld>
-  <p:clrMapOvr>
-    <a:masterClrMapping/>
-  </p:clrMapOvr>
-</p:sld>
-</file>
-
-<file path=ppt/slides/slide14.xml><?xml version="1.0" encoding="utf-8"?>
-<p:sld xmlns:a="http://schemas.openxmlformats.org/drawingml/2006/main" xmlns:r="http://schemas.openxmlformats.org/officeDocument/2006/relationships" xmlns:p="http://schemas.openxmlformats.org/presentationml/2006/main">
-  <p:cSld>
-    <p:spTree>
-      <p:nvGrpSpPr>
-        <p:cNvPr id="1" name=""/>
-        <p:cNvGrpSpPr/>
-        <p:nvPr/>
-      </p:nvGrpSpPr>
-      <p:grpSpPr>
-        <a:xfrm>
-          <a:off x="0" y="0"/>
-          <a:ext cx="0" cy="0"/>
-          <a:chOff x="0" y="0"/>
-          <a:chExt cx="0" cy="0"/>
-        </a:xfrm>
-      </p:grpSpPr>
-      <p:sp>
-        <p:nvSpPr>
-          <p:cNvPr id="2" name="Rectangle 1"/>
-          <p:cNvSpPr/>
-          <p:nvPr/>
-        </p:nvSpPr>
-        <p:spPr>
-          <a:xfrm>
-            <a:off x="305" y="0"/>
-            <a:ext cx="12191695" cy="6858000"/>
-          </a:xfrm>
-          <a:prstGeom prst="rect">
-            <a:avLst/>
-          </a:prstGeom>
-          <a:solidFill>
-            <a:srgbClr val="0E1726"/>
-          </a:solidFill>
-          <a:ln>
-            <a:noFill/>
-          </a:ln>
-          <a:effectLst/>
-        </p:spPr>
-        <p:style>
-          <a:lnRef idx="1">
-            <a:schemeClr val="accent1"/>
-          </a:lnRef>
-          <a:fillRef idx="3">
-            <a:schemeClr val="accent1"/>
-          </a:fillRef>
-          <a:effectRef idx="2">
-            <a:schemeClr val="accent1"/>
-          </a:effectRef>
-          <a:fontRef idx="minor">
-            <a:schemeClr val="lt1"/>
-          </a:fontRef>
-        </p:style>
-        <p:txBody>
-          <a:bodyPr rtlCol="0" anchor="ctr"/>
-          <a:lstStyle/>
-          <a:p>
-            <a:pPr algn="ctr"/>
-            <a:endParaRPr/>
-          </a:p>
-        </p:txBody>
-      </p:sp>
-      <p:sp>
-        <p:nvSpPr>
-          <p:cNvPr id="3" name="TextBox 2"/>
-          <p:cNvSpPr txBox="1"/>
-          <p:nvPr/>
-        </p:nvSpPr>
-        <p:spPr>
-          <a:xfrm>
-            <a:off x="777240" y="502920"/>
-            <a:ext cx="10058400" cy="365760"/>
-          </a:xfrm>
-          <a:prstGeom prst="rect">
-            <a:avLst/>
-          </a:prstGeom>
-          <a:noFill/>
-        </p:spPr>
-        <p:txBody>
-          <a:bodyPr wrap="square" lIns="0" tIns="0" rIns="0" bIns="0" anchor="t">
-            <a:spAutoFit/>
-          </a:bodyPr>
-          <a:lstStyle/>
-          <a:p>
-            <a:pPr algn="l">
-              <a:lnSpc>
-                <a:spcPct val="100000"/>
-              </a:lnSpc>
-              <a:spcBef>
-                <a:spcPts val="0"/>
-              </a:spcBef>
-              <a:spcAft>
-                <a:spcPts val="600"/>
-              </a:spcAft>
-            </a:pPr>
-            <a:r>
-              <a:rPr sz="1300" b="1" i="0" dirty="0">
-                <a:solidFill>
-                  <a:srgbClr val="2EE6A6"/>
-                </a:solidFill>
-                <a:latin typeface="Calibri"/>
-              </a:rPr>
-              <a:t>WHAT THE USER SEES</a:t>
-            </a:r>
-          </a:p>
-        </p:txBody>
-      </p:sp>
-      <p:sp>
-        <p:nvSpPr>
-          <p:cNvPr id="4" name="TextBox 3"/>
-          <p:cNvSpPr txBox="1"/>
-          <p:nvPr/>
-        </p:nvSpPr>
-        <p:spPr>
-          <a:xfrm>
-            <a:off x="777240" y="868680"/>
-            <a:ext cx="10607040" cy="914400"/>
-          </a:xfrm>
-          <a:prstGeom prst="rect">
-            <a:avLst/>
-          </a:prstGeom>
-          <a:noFill/>
-        </p:spPr>
-        <p:txBody>
-          <a:bodyPr wrap="square" lIns="0" tIns="0" rIns="0" bIns="0" anchor="t">
-            <a:spAutoFit/>
-          </a:bodyPr>
-          <a:lstStyle/>
-          <a:p>
-            <a:pPr algn="l">
-              <a:lnSpc>
-                <a:spcPct val="100000"/>
-              </a:lnSpc>
-              <a:spcBef>
-                <a:spcPts val="0"/>
-              </a:spcBef>
-              <a:spcAft>
-                <a:spcPts val="600"/>
-              </a:spcAft>
-            </a:pPr>
-            <a:r>
-              <a:rPr sz="3000" b="1" i="0">
-                <a:solidFill>
-                  <a:srgbClr val="FFFFFF"/>
-                </a:solidFill>
-                <a:latin typeface="Cambria"/>
-              </a:rPr>
-              <a:t>The live dashboard</a:t>
-            </a:r>
-          </a:p>
-        </p:txBody>
-      </p:sp>
-      <p:sp>
-        <p:nvSpPr>
-          <p:cNvPr id="5" name="Rounded Rectangle 4"/>
-          <p:cNvSpPr/>
-          <p:nvPr/>
-        </p:nvSpPr>
-        <p:spPr>
-          <a:xfrm>
-            <a:off x="667512" y="1673352"/>
-            <a:ext cx="7717536" cy="4227666"/>
-          </a:xfrm>
-          <a:prstGeom prst="roundRect">
-            <a:avLst>
-              <a:gd name="adj" fmla="val 6000"/>
-            </a:avLst>
-          </a:prstGeom>
-          <a:solidFill>
-            <a:srgbClr val="FFFFFF"/>
-          </a:solidFill>
-          <a:ln>
-            <a:noFill/>
-          </a:ln>
-          <a:effectLst/>
-        </p:spPr>
-        <p:style>
-          <a:lnRef idx="1">
-            <a:schemeClr val="accent1"/>
-          </a:lnRef>
-          <a:fillRef idx="3">
-            <a:schemeClr val="accent1"/>
-          </a:fillRef>
-          <a:effectRef idx="2">
-            <a:schemeClr val="accent1"/>
-          </a:effectRef>
-          <a:fontRef idx="minor">
-            <a:schemeClr val="lt1"/>
-          </a:fontRef>
-        </p:style>
-        <p:txBody>
-          <a:bodyPr rtlCol="0" anchor="ctr"/>
-          <a:lstStyle/>
-          <a:p>
-            <a:pPr algn="ctr"/>
-            <a:endParaRPr/>
-          </a:p>
-        </p:txBody>
-      </p:sp>
-      <p:sp>
-        <p:nvSpPr>
-          <p:cNvPr id="7" name="TextBox 6"/>
-          <p:cNvSpPr txBox="1"/>
-          <p:nvPr/>
-        </p:nvSpPr>
-        <p:spPr>
-          <a:xfrm>
-            <a:off x="9189720" y="1143000"/>
-            <a:ext cx="3291840" cy="457200"/>
-          </a:xfrm>
-          <a:prstGeom prst="rect">
-            <a:avLst/>
-          </a:prstGeom>
-          <a:noFill/>
-        </p:spPr>
-        <p:txBody>
-          <a:bodyPr wrap="square" lIns="0" tIns="0" rIns="0" bIns="0" anchor="t">
-            <a:spAutoFit/>
-          </a:bodyPr>
-          <a:lstStyle/>
-          <a:p>
-            <a:pPr algn="l">
-              <a:lnSpc>
-                <a:spcPct val="100000"/>
-              </a:lnSpc>
-              <a:spcBef>
-                <a:spcPts val="0"/>
-              </a:spcBef>
-              <a:spcAft>
-                <a:spcPts val="600"/>
-              </a:spcAft>
-            </a:pPr>
-            <a:r>
-              <a:rPr sz="1600" b="1" i="0">
-                <a:solidFill>
-                  <a:srgbClr val="2EE6A6"/>
-                </a:solidFill>
-                <a:latin typeface="Calibri"/>
-              </a:rPr>
-              <a:t>Five live panels</a:t>
-            </a:r>
-          </a:p>
-        </p:txBody>
-      </p:sp>
-      <p:sp>
-        <p:nvSpPr>
-          <p:cNvPr id="8" name="TextBox 7"/>
-          <p:cNvSpPr txBox="1"/>
-          <p:nvPr/>
-        </p:nvSpPr>
-        <p:spPr>
-          <a:xfrm>
-            <a:off x="9189720" y="1737360"/>
-            <a:ext cx="3291840" cy="415498"/>
-          </a:xfrm>
-          <a:prstGeom prst="rect">
-            <a:avLst/>
-          </a:prstGeom>
-          <a:noFill/>
-        </p:spPr>
-        <p:txBody>
-          <a:bodyPr wrap="square" lIns="0" tIns="0" rIns="0" bIns="0" anchor="t">
-            <a:spAutoFit/>
-          </a:bodyPr>
-          <a:lstStyle/>
-          <a:p>
-            <a:pPr algn="l">
-              <a:lnSpc>
-                <a:spcPct val="100000"/>
-              </a:lnSpc>
-              <a:spcBef>
-                <a:spcPts val="0"/>
-              </a:spcBef>
-              <a:spcAft>
-                <a:spcPts val="0"/>
-              </a:spcAft>
-            </a:pPr>
-            <a:r>
-              <a:rPr sz="1450" b="1" i="0" dirty="0">
-                <a:solidFill>
-                  <a:srgbClr val="EAF0F8"/>
-                </a:solidFill>
-                <a:latin typeface="Calibri"/>
-              </a:rPr>
-              <a:t>Price ticker</a:t>
-            </a:r>
-          </a:p>
-          <a:p>
-            <a:pPr algn="l">
-              <a:lnSpc>
-                <a:spcPct val="100000"/>
-              </a:lnSpc>
-              <a:spcBef>
-                <a:spcPts val="0"/>
-              </a:spcBef>
-              <a:spcAft>
-                <a:spcPts val="0"/>
-              </a:spcAft>
-            </a:pPr>
-            <a:r>
-              <a:rPr sz="1250" b="0" i="0" dirty="0">
-                <a:solidFill>
-                  <a:srgbClr val="9AA8BD"/>
-                </a:solidFill>
-                <a:latin typeface="Calibri"/>
-              </a:rPr>
-              <a:t>price</a:t>
-            </a:r>
-          </a:p>
-        </p:txBody>
-      </p:sp>
-      <p:sp>
-        <p:nvSpPr>
-          <p:cNvPr id="9" name="TextBox 8"/>
-          <p:cNvSpPr txBox="1"/>
-          <p:nvPr/>
-        </p:nvSpPr>
-        <p:spPr>
-          <a:xfrm>
-            <a:off x="9189720" y="2487168"/>
-            <a:ext cx="3291840" cy="731520"/>
-          </a:xfrm>
-          <a:prstGeom prst="rect">
-            <a:avLst/>
-          </a:prstGeom>
-          <a:noFill/>
-        </p:spPr>
-        <p:txBody>
-          <a:bodyPr wrap="square" lIns="0" tIns="0" rIns="0" bIns="0" anchor="t">
-            <a:spAutoFit/>
-          </a:bodyPr>
-          <a:lstStyle/>
-          <a:p>
-            <a:pPr algn="l">
-              <a:lnSpc>
-                <a:spcPct val="100000"/>
-              </a:lnSpc>
-              <a:spcBef>
-                <a:spcPts val="0"/>
-              </a:spcBef>
-              <a:spcAft>
-                <a:spcPts val="0"/>
-              </a:spcAft>
-            </a:pPr>
-            <a:r>
-              <a:rPr sz="1450" b="1" i="0">
-                <a:solidFill>
-                  <a:srgbClr val="EAF0F8"/>
-                </a:solidFill>
-                <a:latin typeface="Calibri"/>
-              </a:rPr>
-              <a:t>Candles</a:t>
-            </a:r>
-          </a:p>
-          <a:p>
-            <a:pPr algn="l">
-              <a:lnSpc>
-                <a:spcPct val="100000"/>
-              </a:lnSpc>
-              <a:spcBef>
-                <a:spcPts val="0"/>
-              </a:spcBef>
-              <a:spcAft>
-                <a:spcPts val="0"/>
-              </a:spcAft>
-            </a:pPr>
-            <a:r>
-              <a:rPr sz="1250" b="0" i="0">
-                <a:solidFill>
-                  <a:srgbClr val="9AA8BD"/>
-                </a:solidFill>
-                <a:latin typeface="Calibri"/>
-              </a:rPr>
-              <a:t>1-min or 5-min</a:t>
-            </a:r>
-          </a:p>
-        </p:txBody>
-      </p:sp>
-      <p:sp>
-        <p:nvSpPr>
-          <p:cNvPr id="10" name="TextBox 9"/>
-          <p:cNvSpPr txBox="1"/>
-          <p:nvPr/>
-        </p:nvSpPr>
-        <p:spPr>
-          <a:xfrm>
-            <a:off x="9189720" y="3236976"/>
-            <a:ext cx="3291840" cy="731520"/>
-          </a:xfrm>
-          <a:prstGeom prst="rect">
-            <a:avLst/>
-          </a:prstGeom>
-          <a:noFill/>
-        </p:spPr>
-        <p:txBody>
-          <a:bodyPr wrap="square" lIns="0" tIns="0" rIns="0" bIns="0" anchor="t">
-            <a:spAutoFit/>
-          </a:bodyPr>
-          <a:lstStyle/>
-          <a:p>
-            <a:pPr algn="l">
-              <a:lnSpc>
-                <a:spcPct val="100000"/>
-              </a:lnSpc>
-              <a:spcBef>
-                <a:spcPts val="0"/>
-              </a:spcBef>
-              <a:spcAft>
-                <a:spcPts val="0"/>
-              </a:spcAft>
-            </a:pPr>
-            <a:r>
-              <a:rPr sz="1450" b="1" i="0">
-                <a:solidFill>
-                  <a:srgbClr val="EAF0F8"/>
-                </a:solidFill>
-                <a:latin typeface="Calibri"/>
-              </a:rPr>
-              <a:t>Volume bars</a:t>
-            </a:r>
-          </a:p>
-          <a:p>
-            <a:pPr algn="l">
-              <a:lnSpc>
-                <a:spcPct val="100000"/>
-              </a:lnSpc>
-              <a:spcBef>
-                <a:spcPts val="0"/>
-              </a:spcBef>
-              <a:spcAft>
-                <a:spcPts val="0"/>
-              </a:spcAft>
-            </a:pPr>
-            <a:r>
-              <a:rPr sz="1250" b="0" i="0">
-                <a:solidFill>
-                  <a:srgbClr val="9AA8BD"/>
-                </a:solidFill>
-                <a:latin typeface="Calibri"/>
-              </a:rPr>
-              <a:t>per coin</a:t>
-            </a:r>
-          </a:p>
-        </p:txBody>
-      </p:sp>
-      <p:sp>
-        <p:nvSpPr>
-          <p:cNvPr id="11" name="TextBox 10"/>
-          <p:cNvSpPr txBox="1"/>
-          <p:nvPr/>
-        </p:nvSpPr>
-        <p:spPr>
-          <a:xfrm>
-            <a:off x="9189720" y="3986784"/>
-            <a:ext cx="3291840" cy="731520"/>
-          </a:xfrm>
-          <a:prstGeom prst="rect">
-            <a:avLst/>
-          </a:prstGeom>
-          <a:noFill/>
-        </p:spPr>
-        <p:txBody>
-          <a:bodyPr wrap="square" lIns="0" tIns="0" rIns="0" bIns="0" anchor="t">
-            <a:spAutoFit/>
-          </a:bodyPr>
-          <a:lstStyle/>
-          <a:p>
-            <a:pPr algn="l">
-              <a:lnSpc>
-                <a:spcPct val="100000"/>
-              </a:lnSpc>
-              <a:spcBef>
-                <a:spcPts val="0"/>
-              </a:spcBef>
-              <a:spcAft>
-                <a:spcPts val="0"/>
-              </a:spcAft>
-            </a:pPr>
-            <a:r>
-              <a:rPr sz="1450" b="1" i="0">
-                <a:solidFill>
-                  <a:srgbClr val="EAF0F8"/>
-                </a:solidFill>
-                <a:latin typeface="Calibri"/>
-              </a:rPr>
-              <a:t>Alert count</a:t>
-            </a:r>
-          </a:p>
-          <a:p>
-            <a:pPr algn="l">
-              <a:lnSpc>
-                <a:spcPct val="100000"/>
-              </a:lnSpc>
-              <a:spcBef>
-                <a:spcPts val="0"/>
-              </a:spcBef>
-              <a:spcAft>
-                <a:spcPts val="0"/>
-              </a:spcAft>
-            </a:pPr>
-            <a:r>
-              <a:rPr sz="1250" b="0" i="0">
-                <a:solidFill>
-                  <a:srgbClr val="9AA8BD"/>
-                </a:solidFill>
-                <a:latin typeface="Calibri"/>
-              </a:rPr>
-              <a:t>last hour</a:t>
-            </a:r>
-          </a:p>
-        </p:txBody>
-      </p:sp>
-      <p:sp>
-        <p:nvSpPr>
-          <p:cNvPr id="12" name="TextBox 11"/>
-          <p:cNvSpPr txBox="1"/>
-          <p:nvPr/>
-        </p:nvSpPr>
-        <p:spPr>
-          <a:xfrm>
-            <a:off x="9189720" y="4736592"/>
-            <a:ext cx="3291840" cy="731520"/>
-          </a:xfrm>
-          <a:prstGeom prst="rect">
-            <a:avLst/>
-          </a:prstGeom>
-          <a:noFill/>
-        </p:spPr>
-        <p:txBody>
-          <a:bodyPr wrap="square" lIns="0" tIns="0" rIns="0" bIns="0" anchor="t">
-            <a:spAutoFit/>
-          </a:bodyPr>
-          <a:lstStyle/>
-          <a:p>
-            <a:pPr algn="l">
-              <a:lnSpc>
-                <a:spcPct val="100000"/>
-              </a:lnSpc>
-              <a:spcBef>
-                <a:spcPts val="0"/>
-              </a:spcBef>
-              <a:spcAft>
-                <a:spcPts val="0"/>
-              </a:spcAft>
-            </a:pPr>
-            <a:r>
-              <a:rPr sz="1450" b="1" i="0">
-                <a:solidFill>
-                  <a:srgbClr val="EAF0F8"/>
-                </a:solidFill>
-                <a:latin typeface="Calibri"/>
-              </a:rPr>
-              <a:t>Alerts table</a:t>
-            </a:r>
-          </a:p>
-          <a:p>
-            <a:pPr algn="l">
-              <a:lnSpc>
-                <a:spcPct val="100000"/>
-              </a:lnSpc>
-              <a:spcBef>
-                <a:spcPts val="0"/>
-              </a:spcBef>
-              <a:spcAft>
-                <a:spcPts val="0"/>
-              </a:spcAft>
-            </a:pPr>
-            <a:r>
-              <a:rPr sz="1250" b="0" i="0">
-                <a:solidFill>
-                  <a:srgbClr val="9AA8BD"/>
-                </a:solidFill>
-                <a:latin typeface="Calibri"/>
-              </a:rPr>
-              <a:t>what + how serious</a:t>
-            </a:r>
-          </a:p>
-        </p:txBody>
-      </p:sp>
-      <p:sp>
-        <p:nvSpPr>
-          <p:cNvPr id="13" name="TextBox 12"/>
-          <p:cNvSpPr txBox="1"/>
-          <p:nvPr/>
-        </p:nvSpPr>
-        <p:spPr>
-          <a:xfrm>
-            <a:off x="9189720" y="5532120"/>
-            <a:ext cx="3291840" cy="457200"/>
-          </a:xfrm>
-          <a:prstGeom prst="rect">
-            <a:avLst/>
-          </a:prstGeom>
-          <a:noFill/>
-        </p:spPr>
-        <p:txBody>
-          <a:bodyPr wrap="square" lIns="0" tIns="0" rIns="0" bIns="0" anchor="t">
-            <a:spAutoFit/>
-          </a:bodyPr>
-          <a:lstStyle/>
-          <a:p>
-            <a:pPr algn="l">
-              <a:lnSpc>
-                <a:spcPct val="100000"/>
-              </a:lnSpc>
-              <a:spcBef>
-                <a:spcPts val="0"/>
-              </a:spcBef>
-              <a:spcAft>
-                <a:spcPts val="0"/>
-              </a:spcAft>
-            </a:pPr>
-            <a:r>
-              <a:rPr sz="1250" b="0" i="1">
-                <a:solidFill>
-                  <a:srgbClr val="9AA8BD"/>
-                </a:solidFill>
-                <a:latin typeface="Calibri"/>
-              </a:rPr>
-              <a:t>Pick a coin and candle</a:t>
-            </a:r>
-          </a:p>
-          <a:p>
-            <a:pPr algn="l">
-              <a:lnSpc>
-                <a:spcPct val="100000"/>
-              </a:lnSpc>
-              <a:spcBef>
-                <a:spcPts val="0"/>
-              </a:spcBef>
-              <a:spcAft>
-                <a:spcPts val="0"/>
-              </a:spcAft>
-            </a:pPr>
-            <a:r>
-              <a:rPr sz="1250" b="0" i="1">
-                <a:solidFill>
-                  <a:srgbClr val="9AA8BD"/>
-                </a:solidFill>
-                <a:latin typeface="Calibri"/>
-              </a:rPr>
-              <a:t>size from the menus.</a:t>
-            </a:r>
-          </a:p>
-        </p:txBody>
-      </p:sp>
-      <p:pic>
-        <p:nvPicPr>
-          <p:cNvPr id="15" name="Picture 14">
-            <a:extLst>
-              <a:ext uri="{FF2B5EF4-FFF2-40B4-BE49-F238E27FC236}">
-                <a16:creationId xmlns:a16="http://schemas.microsoft.com/office/drawing/2014/main" id="{F41DD00E-B930-CAE0-630E-78DA6036837A}"/>
-              </a:ext>
-            </a:extLst>
-          </p:cNvPr>
-          <p:cNvPicPr>
-            <a:picLocks noChangeAspect="1"/>
-          </p:cNvPicPr>
-          <p:nvPr/>
-        </p:nvPicPr>
-        <p:blipFill>
-          <a:blip r:embed="rId3"/>
-          <a:stretch>
-            <a:fillRect/>
-          </a:stretch>
-        </p:blipFill>
-        <p:spPr>
-          <a:xfrm>
-            <a:off x="822942" y="1832078"/>
-            <a:ext cx="7406675" cy="3910354"/>
-          </a:xfrm>
-          <a:prstGeom prst="rect">
-            <a:avLst/>
-          </a:prstGeom>
-        </p:spPr>
-      </p:pic>
     </p:spTree>
   </p:cSld>
   <p:clrMapOvr>
@@ -11539,543 +12006,378 @@
           </a:p>
         </p:txBody>
       </p:sp>
-      <p:sp>
-        <p:nvSpPr>
-          <p:cNvPr id="6" name="Text 4"/>
-          <p:cNvSpPr/>
-          <p:nvPr/>
-        </p:nvSpPr>
-        <p:spPr>
-          <a:xfrm>
-            <a:off x="691263" y="2755392"/>
-            <a:ext cx="6339840" cy="365760"/>
+      <p:grpSp>
+        <p:nvGrpSpPr>
+          <p:cNvPr id="24" name="Group 23">
+            <a:extLst>
+              <a:ext uri="{FF2B5EF4-FFF2-40B4-BE49-F238E27FC236}">
+                <a16:creationId xmlns:a16="http://schemas.microsoft.com/office/drawing/2014/main" id="{4F034C28-06D7-1539-7A58-63E4CCC0833A}"/>
+              </a:ext>
+            </a:extLst>
+          </p:cNvPr>
+          <p:cNvGrpSpPr/>
+          <p:nvPr/>
+        </p:nvGrpSpPr>
+        <p:grpSpPr>
+          <a:xfrm>
+            <a:off x="670561" y="2755391"/>
+            <a:ext cx="5678482" cy="3177353"/>
+            <a:chOff x="670560" y="2755392"/>
+            <a:chExt cx="6360543" cy="2578378"/>
+          </a:xfrm>
+        </p:grpSpPr>
+        <p:sp>
+          <p:nvSpPr>
+            <p:cNvPr id="6" name="Text 4"/>
+            <p:cNvSpPr/>
+            <p:nvPr/>
+          </p:nvSpPr>
+          <p:spPr>
+            <a:xfrm>
+              <a:off x="691263" y="2755392"/>
+              <a:ext cx="6339840" cy="365760"/>
+            </a:xfrm>
+            <a:prstGeom prst="rect">
+              <a:avLst/>
+            </a:prstGeom>
+            <a:noFill/>
+            <a:ln/>
+          </p:spPr>
+          <p:txBody>
+            <a:bodyPr wrap="square" rtlCol="0" anchor="ctr"/>
+            <a:lstStyle/>
+            <a:p>
+              <a:pPr defTabSz="1219170"/>
+              <a:r>
+                <a:rPr lang="en-US" sz="1467" dirty="0">
+                  <a:solidFill>
+                    <a:srgbClr val="8FA8C8"/>
+                  </a:solidFill>
+                  <a:latin typeface="Calibri" pitchFamily="34" charset="0"/>
+                  <a:ea typeface="Calibri" pitchFamily="34" charset="-122"/>
+                  <a:cs typeface="Calibri" pitchFamily="34" charset="-120"/>
+                </a:rPr>
+                <a:t>• Wash trading — a person quietly buys and sells to themselves to make a coin look busier than it really is.</a:t>
+              </a:r>
+              <a:endParaRPr lang="en-US" sz="1467" dirty="0">
+                <a:solidFill>
+                  <a:prstClr val="black"/>
+                </a:solidFill>
+                <a:latin typeface="Calibri" panose="020F0502020204030204"/>
+              </a:endParaRPr>
+            </a:p>
+          </p:txBody>
+        </p:sp>
+        <p:sp>
+          <p:nvSpPr>
+            <p:cNvPr id="7" name="Text 5"/>
+            <p:cNvSpPr/>
+            <p:nvPr/>
+          </p:nvSpPr>
+          <p:spPr>
+            <a:xfrm>
+              <a:off x="670560" y="3425952"/>
+              <a:ext cx="6339840" cy="365760"/>
+            </a:xfrm>
+            <a:prstGeom prst="rect">
+              <a:avLst/>
+            </a:prstGeom>
+            <a:noFill/>
+            <a:ln/>
+          </p:spPr>
+          <p:txBody>
+            <a:bodyPr wrap="square" rtlCol="0" anchor="ctr"/>
+            <a:lstStyle/>
+            <a:p>
+              <a:pPr defTabSz="1219170"/>
+              <a:r>
+                <a:rPr lang="en-US" sz="1467" dirty="0">
+                  <a:solidFill>
+                    <a:srgbClr val="8FA8C8"/>
+                  </a:solidFill>
+                  <a:latin typeface="Calibri" pitchFamily="34" charset="0"/>
+                  <a:ea typeface="Calibri" pitchFamily="34" charset="-122"/>
+                  <a:cs typeface="Calibri" pitchFamily="34" charset="-120"/>
+                </a:rPr>
+                <a:t>• Pump and dump — a group pushes a price up fast, then sells at the top, leaving buyers with losses.</a:t>
+              </a:r>
+              <a:endParaRPr lang="en-US" sz="1467" dirty="0">
+                <a:solidFill>
+                  <a:prstClr val="black"/>
+                </a:solidFill>
+                <a:latin typeface="Calibri" panose="020F0502020204030204"/>
+              </a:endParaRPr>
+            </a:p>
+          </p:txBody>
+        </p:sp>
+        <p:sp>
+          <p:nvSpPr>
+            <p:cNvPr id="8" name="Text 6"/>
+            <p:cNvSpPr/>
+            <p:nvPr/>
+          </p:nvSpPr>
+          <p:spPr>
+            <a:xfrm>
+              <a:off x="670560" y="4133088"/>
+              <a:ext cx="6339840" cy="365760"/>
+            </a:xfrm>
+            <a:prstGeom prst="rect">
+              <a:avLst/>
+            </a:prstGeom>
+            <a:noFill/>
+            <a:ln/>
+          </p:spPr>
+          <p:txBody>
+            <a:bodyPr wrap="square" rtlCol="0" anchor="ctr"/>
+            <a:lstStyle/>
+            <a:p>
+              <a:pPr defTabSz="1219170"/>
+              <a:r>
+                <a:rPr lang="en-US" sz="1467" dirty="0">
+                  <a:solidFill>
+                    <a:srgbClr val="8FA8C8"/>
+                  </a:solidFill>
+                  <a:latin typeface="Calibri" pitchFamily="34" charset="0"/>
+                  <a:ea typeface="Calibri" pitchFamily="34" charset="-122"/>
+                  <a:cs typeface="Calibri" pitchFamily="34" charset="-120"/>
+                </a:rPr>
+                <a:t>• Volume spikes — a sudden flood of trades, which can come before a price crash.</a:t>
+              </a:r>
+              <a:endParaRPr lang="en-US" sz="1467" dirty="0">
+                <a:solidFill>
+                  <a:prstClr val="black"/>
+                </a:solidFill>
+                <a:latin typeface="Calibri" panose="020F0502020204030204"/>
+              </a:endParaRPr>
+            </a:p>
+          </p:txBody>
+        </p:sp>
+        <p:sp>
+          <p:nvSpPr>
+            <p:cNvPr id="9" name="Text 7"/>
+            <p:cNvSpPr/>
+            <p:nvPr/>
+          </p:nvSpPr>
+          <p:spPr>
+            <a:xfrm>
+              <a:off x="691263" y="4724170"/>
+              <a:ext cx="6339840" cy="609600"/>
+            </a:xfrm>
+            <a:prstGeom prst="rect">
+              <a:avLst/>
+            </a:prstGeom>
+            <a:noFill/>
+            <a:ln/>
+          </p:spPr>
+          <p:txBody>
+            <a:bodyPr wrap="square" rtlCol="0" anchor="t"/>
+            <a:lstStyle/>
+            <a:p>
+              <a:pPr defTabSz="1219170"/>
+              <a:r>
+                <a:rPr lang="en-US" sz="1467" dirty="0">
+                  <a:solidFill>
+                    <a:srgbClr val="8FA8C8"/>
+                  </a:solidFill>
+                  <a:latin typeface="Calibri" pitchFamily="34" charset="0"/>
+                  <a:ea typeface="Calibri" pitchFamily="34" charset="-122"/>
+                  <a:cs typeface="Calibri" pitchFamily="34" charset="-120"/>
+                </a:rPr>
+                <a:t>Finding these tricks a day later is useless. To help an exchange or regulator the warning must appear within seconds. That is exactly what this project does.</a:t>
+              </a:r>
+              <a:endParaRPr lang="en-US" sz="1467" dirty="0">
+                <a:solidFill>
+                  <a:prstClr val="black"/>
+                </a:solidFill>
+                <a:latin typeface="Calibri" panose="020F0502020204030204"/>
+              </a:endParaRPr>
+            </a:p>
+          </p:txBody>
+        </p:sp>
+      </p:grpSp>
+      <p:pic>
+        <p:nvPicPr>
+          <p:cNvPr id="20" name="Picture 19" descr="fig_patterns.png">
+            <a:extLst>
+              <a:ext uri="{FF2B5EF4-FFF2-40B4-BE49-F238E27FC236}">
+                <a16:creationId xmlns:a16="http://schemas.microsoft.com/office/drawing/2014/main" id="{DDFFEB00-1710-32D1-5B20-BC4FD93D8A46}"/>
+              </a:ext>
+            </a:extLst>
+          </p:cNvPr>
+          <p:cNvPicPr>
+            <a:picLocks noChangeAspect="1"/>
+          </p:cNvPicPr>
+          <p:nvPr/>
+        </p:nvPicPr>
+        <p:blipFill>
+          <a:blip r:embed="rId3"/>
+          <a:stretch>
+            <a:fillRect/>
+          </a:stretch>
+        </p:blipFill>
+        <p:spPr>
+          <a:xfrm>
+            <a:off x="7010400" y="2255987"/>
+            <a:ext cx="4606686" cy="1739057"/>
           </a:xfrm>
           <a:prstGeom prst="rect">
             <a:avLst/>
           </a:prstGeom>
+        </p:spPr>
+      </p:pic>
+      <p:sp>
+        <p:nvSpPr>
+          <p:cNvPr id="23" name="TextBox 22">
+            <a:extLst>
+              <a:ext uri="{FF2B5EF4-FFF2-40B4-BE49-F238E27FC236}">
+                <a16:creationId xmlns:a16="http://schemas.microsoft.com/office/drawing/2014/main" id="{4E919B31-5BC1-7078-5895-43A2CD961C0E}"/>
+              </a:ext>
+            </a:extLst>
+          </p:cNvPr>
+          <p:cNvSpPr txBox="1"/>
+          <p:nvPr/>
+        </p:nvSpPr>
+        <p:spPr>
+          <a:xfrm>
+            <a:off x="7080954" y="4547750"/>
+            <a:ext cx="4606687" cy="1292662"/>
+          </a:xfrm>
+          <a:prstGeom prst="rect">
+            <a:avLst/>
+          </a:prstGeom>
           <a:noFill/>
-          <a:ln/>
-        </p:spPr>
-        <p:txBody>
-          <a:bodyPr wrap="square" rtlCol="0" anchor="ctr"/>
-          <a:lstStyle/>
-          <a:p>
-            <a:pPr defTabSz="1219170"/>
-            <a:r>
-              <a:rPr lang="en-US" sz="1467" dirty="0">
-                <a:solidFill>
-                  <a:srgbClr val="8FA8C8"/>
-                </a:solidFill>
-                <a:latin typeface="Calibri" pitchFamily="34" charset="0"/>
-                <a:ea typeface="Calibri" pitchFamily="34" charset="-122"/>
-                <a:cs typeface="Calibri" pitchFamily="34" charset="-120"/>
-              </a:rPr>
-              <a:t>• Wash trading — a person quietly buys and sells to themselves to make a coin look busier than it really is.</a:t>
-            </a:r>
-            <a:endParaRPr lang="en-US" sz="1467" dirty="0">
+        </p:spPr>
+        <p:txBody>
+          <a:bodyPr wrap="square" lIns="0" tIns="0" rIns="0" bIns="0" anchor="t">
+            <a:spAutoFit/>
+          </a:bodyPr>
+          <a:lstStyle/>
+          <a:p>
+            <a:pPr>
+              <a:lnSpc>
+                <a:spcPct val="100000"/>
+              </a:lnSpc>
+              <a:spcBef>
+                <a:spcPts val="0"/>
+              </a:spcBef>
+              <a:spcAft>
+                <a:spcPts val="600"/>
+              </a:spcAft>
+            </a:pPr>
+            <a:r>
+              <a:rPr sz="1400" b="1" i="0" dirty="0">
+                <a:solidFill>
+                  <a:srgbClr val="F2A93B"/>
+                </a:solidFill>
+                <a:latin typeface="Calibri"/>
+              </a:rPr>
+              <a:t>Wash trade: </a:t>
+            </a:r>
+            <a:r>
+              <a:rPr sz="1400" b="0" i="0" dirty="0">
+                <a:solidFill>
+                  <a:srgbClr val="EAF0F8"/>
+                </a:solidFill>
+                <a:latin typeface="Calibri"/>
+              </a:rPr>
+              <a:t>price wiggles + fake volume.    </a:t>
+            </a:r>
+            <a:endParaRPr lang="en-US" sz="1400" b="0" i="0" dirty="0">
               <a:solidFill>
-                <a:prstClr val="black"/>
+                <a:srgbClr val="EAF0F8"/>
               </a:solidFill>
-              <a:latin typeface="Calibri" panose="020F0502020204030204"/>
+              <a:latin typeface="Calibri"/>
             </a:endParaRPr>
           </a:p>
-        </p:txBody>
-      </p:sp>
-      <p:sp>
-        <p:nvSpPr>
-          <p:cNvPr id="7" name="Text 5"/>
-          <p:cNvSpPr/>
-          <p:nvPr/>
-        </p:nvSpPr>
-        <p:spPr>
-          <a:xfrm>
-            <a:off x="670560" y="3425952"/>
-            <a:ext cx="6339840" cy="365760"/>
-          </a:xfrm>
-          <a:prstGeom prst="rect">
-            <a:avLst/>
-          </a:prstGeom>
-          <a:noFill/>
-          <a:ln/>
-        </p:spPr>
-        <p:txBody>
-          <a:bodyPr wrap="square" rtlCol="0" anchor="ctr"/>
-          <a:lstStyle/>
-          <a:p>
-            <a:pPr defTabSz="1219170"/>
-            <a:r>
-              <a:rPr lang="en-US" sz="1467" dirty="0">
-                <a:solidFill>
-                  <a:srgbClr val="8FA8C8"/>
-                </a:solidFill>
-                <a:latin typeface="Calibri" pitchFamily="34" charset="0"/>
-                <a:ea typeface="Calibri" pitchFamily="34" charset="-122"/>
-                <a:cs typeface="Calibri" pitchFamily="34" charset="-120"/>
-              </a:rPr>
-              <a:t>• Pump and dump — a group pushes a price up fast, then sells at the top, leaving buyers with losses.</a:t>
-            </a:r>
-            <a:endParaRPr lang="en-US" sz="1467" dirty="0">
+          <a:p>
+            <a:pPr>
+              <a:lnSpc>
+                <a:spcPct val="100000"/>
+              </a:lnSpc>
+              <a:spcBef>
+                <a:spcPts val="0"/>
+              </a:spcBef>
+              <a:spcAft>
+                <a:spcPts val="600"/>
+              </a:spcAft>
+            </a:pPr>
+            <a:r>
+              <a:rPr sz="1400" b="1" i="0" dirty="0">
+                <a:solidFill>
+                  <a:srgbClr val="E84749"/>
+                </a:solidFill>
+                <a:latin typeface="Calibri"/>
+              </a:rPr>
+              <a:t>Pump &amp; dump: </a:t>
+            </a:r>
+            <a:r>
+              <a:rPr sz="1400" b="0" i="0" dirty="0">
+                <a:solidFill>
+                  <a:srgbClr val="EAF0F8"/>
+                </a:solidFill>
+                <a:latin typeface="Calibri"/>
+              </a:rPr>
+              <a:t>up fast, then crash.    </a:t>
+            </a:r>
+            <a:endParaRPr lang="en-US" sz="1400" b="0" i="0" dirty="0">
               <a:solidFill>
-                <a:prstClr val="black"/>
+                <a:srgbClr val="EAF0F8"/>
               </a:solidFill>
-              <a:latin typeface="Calibri" panose="020F0502020204030204"/>
+              <a:latin typeface="Calibri"/>
             </a:endParaRPr>
           </a:p>
-        </p:txBody>
-      </p:sp>
-      <p:sp>
-        <p:nvSpPr>
-          <p:cNvPr id="8" name="Text 6"/>
-          <p:cNvSpPr/>
-          <p:nvPr/>
-        </p:nvSpPr>
-        <p:spPr>
-          <a:xfrm>
-            <a:off x="670560" y="4133088"/>
-            <a:ext cx="6339840" cy="365760"/>
-          </a:xfrm>
-          <a:prstGeom prst="rect">
-            <a:avLst/>
-          </a:prstGeom>
-          <a:noFill/>
-          <a:ln/>
-        </p:spPr>
-        <p:txBody>
-          <a:bodyPr wrap="square" rtlCol="0" anchor="ctr"/>
-          <a:lstStyle/>
-          <a:p>
-            <a:pPr defTabSz="1219170"/>
-            <a:r>
-              <a:rPr lang="en-US" sz="1467" dirty="0">
-                <a:solidFill>
-                  <a:srgbClr val="8FA8C8"/>
-                </a:solidFill>
-                <a:latin typeface="Calibri" pitchFamily="34" charset="0"/>
-                <a:ea typeface="Calibri" pitchFamily="34" charset="-122"/>
-                <a:cs typeface="Calibri" pitchFamily="34" charset="-120"/>
-              </a:rPr>
-              <a:t>• Volume spikes — a sudden flood of trades, which can come before a price crash.</a:t>
-            </a:r>
-            <a:endParaRPr lang="en-US" sz="1467" dirty="0">
-              <a:solidFill>
-                <a:prstClr val="black"/>
-              </a:solidFill>
-              <a:latin typeface="Calibri" panose="020F0502020204030204"/>
-            </a:endParaRPr>
-          </a:p>
-        </p:txBody>
-      </p:sp>
-      <p:sp>
-        <p:nvSpPr>
-          <p:cNvPr id="9" name="Text 7"/>
-          <p:cNvSpPr/>
-          <p:nvPr/>
-        </p:nvSpPr>
-        <p:spPr>
-          <a:xfrm>
-            <a:off x="691263" y="4724170"/>
-            <a:ext cx="6339840" cy="609600"/>
-          </a:xfrm>
-          <a:prstGeom prst="rect">
-            <a:avLst/>
-          </a:prstGeom>
-          <a:noFill/>
-          <a:ln/>
-        </p:spPr>
-        <p:txBody>
-          <a:bodyPr wrap="square" rtlCol="0" anchor="t"/>
-          <a:lstStyle/>
-          <a:p>
-            <a:pPr defTabSz="1219170"/>
-            <a:r>
-              <a:rPr lang="en-US" sz="1467" dirty="0">
-                <a:solidFill>
-                  <a:srgbClr val="8FA8C8"/>
-                </a:solidFill>
-                <a:latin typeface="Calibri" pitchFamily="34" charset="0"/>
-                <a:ea typeface="Calibri" pitchFamily="34" charset="-122"/>
-                <a:cs typeface="Calibri" pitchFamily="34" charset="-120"/>
-              </a:rPr>
-              <a:t>Finding these tricks a day later is useless. To help an exchange or regulator the warning must appear within seconds. That is exactly what this project does.</a:t>
-            </a:r>
-            <a:endParaRPr lang="en-US" sz="1467" dirty="0">
-              <a:solidFill>
-                <a:prstClr val="black"/>
-              </a:solidFill>
-              <a:latin typeface="Calibri" panose="020F0502020204030204"/>
-            </a:endParaRPr>
-          </a:p>
-        </p:txBody>
-      </p:sp>
-      <p:sp>
-        <p:nvSpPr>
-          <p:cNvPr id="10" name="Shape 8"/>
-          <p:cNvSpPr/>
-          <p:nvPr/>
-        </p:nvSpPr>
-        <p:spPr>
-          <a:xfrm>
-            <a:off x="7254240" y="1706880"/>
-            <a:ext cx="4511040" cy="1158240"/>
-          </a:xfrm>
-          <a:prstGeom prst="roundRect">
-            <a:avLst>
-              <a:gd name="adj" fmla="val 8421"/>
-            </a:avLst>
-          </a:prstGeom>
-          <a:solidFill>
-            <a:srgbClr val="1A2840"/>
-          </a:solidFill>
-          <a:ln w="6350">
-            <a:solidFill>
-              <a:srgbClr val="00C896"/>
-            </a:solidFill>
-            <a:prstDash val="solid"/>
-          </a:ln>
-        </p:spPr>
-        <p:txBody>
-          <a:bodyPr/>
-          <a:lstStyle/>
-          <a:p>
-            <a:pPr defTabSz="1219170"/>
-            <a:endParaRPr lang="en-IN" sz="2400">
-              <a:solidFill>
-                <a:prstClr val="black"/>
-              </a:solidFill>
-              <a:latin typeface="Calibri" panose="020F0502020204030204"/>
-            </a:endParaRPr>
-          </a:p>
-        </p:txBody>
-      </p:sp>
-      <p:sp>
-        <p:nvSpPr>
-          <p:cNvPr id="11" name="Text 9"/>
-          <p:cNvSpPr/>
-          <p:nvPr/>
-        </p:nvSpPr>
-        <p:spPr>
-          <a:xfrm>
-            <a:off x="7254240" y="1828800"/>
-            <a:ext cx="4511040" cy="633984"/>
-          </a:xfrm>
-          <a:prstGeom prst="rect">
-            <a:avLst/>
-          </a:prstGeom>
-          <a:noFill/>
-          <a:ln/>
-        </p:spPr>
-        <p:txBody>
-          <a:bodyPr wrap="square" rtlCol="0" anchor="ctr"/>
-          <a:lstStyle/>
-          <a:p>
-            <a:pPr algn="ctr" defTabSz="1219170"/>
-            <a:r>
-              <a:rPr lang="en-US" sz="4267" b="1" dirty="0">
-                <a:solidFill>
-                  <a:srgbClr val="00C896"/>
-                </a:solidFill>
-                <a:latin typeface="Calibri" pitchFamily="34" charset="0"/>
-                <a:ea typeface="Calibri" pitchFamily="34" charset="-122"/>
-                <a:cs typeface="Calibri" pitchFamily="34" charset="-120"/>
-              </a:rPr>
-              <a:t>6</a:t>
-            </a:r>
-            <a:endParaRPr lang="en-US" sz="4267" dirty="0">
-              <a:solidFill>
-                <a:prstClr val="black"/>
-              </a:solidFill>
-              <a:latin typeface="Calibri" panose="020F0502020204030204"/>
-            </a:endParaRPr>
-          </a:p>
-        </p:txBody>
-      </p:sp>
-      <p:sp>
-        <p:nvSpPr>
-          <p:cNvPr id="12" name="Text 10"/>
-          <p:cNvSpPr/>
-          <p:nvPr/>
-        </p:nvSpPr>
-        <p:spPr>
-          <a:xfrm>
-            <a:off x="7254240" y="2462784"/>
-            <a:ext cx="4511040" cy="365760"/>
-          </a:xfrm>
-          <a:prstGeom prst="rect">
-            <a:avLst/>
-          </a:prstGeom>
-          <a:noFill/>
-          <a:ln/>
-        </p:spPr>
-        <p:txBody>
-          <a:bodyPr wrap="square" rtlCol="0" anchor="ctr"/>
-          <a:lstStyle/>
-          <a:p>
-            <a:pPr algn="ctr" defTabSz="1219170"/>
-            <a:r>
-              <a:rPr lang="en-US" sz="1467" dirty="0">
-                <a:solidFill>
-                  <a:srgbClr val="5A7A9A"/>
-                </a:solidFill>
-                <a:latin typeface="Calibri" pitchFamily="34" charset="0"/>
-                <a:ea typeface="Calibri" pitchFamily="34" charset="-122"/>
-                <a:cs typeface="Calibri" pitchFamily="34" charset="-120"/>
-              </a:rPr>
-              <a:t>coins watched live</a:t>
-            </a:r>
-            <a:endParaRPr lang="en-US" sz="1467" dirty="0">
-              <a:solidFill>
-                <a:prstClr val="black"/>
-              </a:solidFill>
-              <a:latin typeface="Calibri" panose="020F0502020204030204"/>
-            </a:endParaRPr>
-          </a:p>
-        </p:txBody>
-      </p:sp>
-      <p:sp>
-        <p:nvSpPr>
-          <p:cNvPr id="13" name="Shape 11"/>
-          <p:cNvSpPr/>
-          <p:nvPr/>
-        </p:nvSpPr>
-        <p:spPr>
-          <a:xfrm>
-            <a:off x="7254240" y="3048000"/>
-            <a:ext cx="4511040" cy="1158240"/>
-          </a:xfrm>
-          <a:prstGeom prst="roundRect">
-            <a:avLst>
-              <a:gd name="adj" fmla="val 8421"/>
-            </a:avLst>
-          </a:prstGeom>
-          <a:solidFill>
-            <a:srgbClr val="1A2840"/>
-          </a:solidFill>
-          <a:ln w="6350">
-            <a:solidFill>
-              <a:srgbClr val="FFB300"/>
-            </a:solidFill>
-            <a:prstDash val="solid"/>
-          </a:ln>
-        </p:spPr>
-        <p:txBody>
-          <a:bodyPr/>
-          <a:lstStyle/>
-          <a:p>
-            <a:pPr defTabSz="1219170"/>
-            <a:endParaRPr lang="en-IN" sz="2400">
-              <a:solidFill>
-                <a:prstClr val="black"/>
-              </a:solidFill>
-              <a:latin typeface="Calibri" panose="020F0502020204030204"/>
-            </a:endParaRPr>
-          </a:p>
-        </p:txBody>
-      </p:sp>
-      <p:sp>
-        <p:nvSpPr>
-          <p:cNvPr id="14" name="Text 12"/>
-          <p:cNvSpPr/>
-          <p:nvPr/>
-        </p:nvSpPr>
-        <p:spPr>
-          <a:xfrm>
-            <a:off x="7254240" y="3169920"/>
-            <a:ext cx="4511040" cy="633984"/>
-          </a:xfrm>
-          <a:prstGeom prst="rect">
-            <a:avLst/>
-          </a:prstGeom>
-          <a:noFill/>
-          <a:ln/>
-        </p:spPr>
-        <p:txBody>
-          <a:bodyPr wrap="square" rtlCol="0" anchor="ctr"/>
-          <a:lstStyle/>
-          <a:p>
-            <a:pPr algn="ctr" defTabSz="1219170"/>
-            <a:r>
-              <a:rPr lang="en-US" sz="4267" b="1" dirty="0">
-                <a:solidFill>
-                  <a:srgbClr val="FFB300"/>
-                </a:solidFill>
-                <a:latin typeface="Calibri" pitchFamily="34" charset="0"/>
-                <a:ea typeface="Calibri" pitchFamily="34" charset="-122"/>
-                <a:cs typeface="Calibri" pitchFamily="34" charset="-120"/>
-              </a:rPr>
-              <a:t>3</a:t>
-            </a:r>
-            <a:endParaRPr lang="en-US" sz="4267" dirty="0">
-              <a:solidFill>
-                <a:prstClr val="black"/>
-              </a:solidFill>
-              <a:latin typeface="Calibri" panose="020F0502020204030204"/>
-            </a:endParaRPr>
-          </a:p>
-        </p:txBody>
-      </p:sp>
-      <p:sp>
-        <p:nvSpPr>
-          <p:cNvPr id="15" name="Text 13"/>
-          <p:cNvSpPr/>
-          <p:nvPr/>
-        </p:nvSpPr>
-        <p:spPr>
-          <a:xfrm>
-            <a:off x="7254240" y="3803904"/>
-            <a:ext cx="4511040" cy="365760"/>
-          </a:xfrm>
-          <a:prstGeom prst="rect">
-            <a:avLst/>
-          </a:prstGeom>
-          <a:noFill/>
-          <a:ln/>
-        </p:spPr>
-        <p:txBody>
-          <a:bodyPr wrap="square" rtlCol="0" anchor="ctr"/>
-          <a:lstStyle/>
-          <a:p>
-            <a:pPr algn="ctr" defTabSz="1219170"/>
-            <a:r>
-              <a:rPr lang="en-US" sz="1467" dirty="0">
-                <a:solidFill>
-                  <a:srgbClr val="5A7A9A"/>
-                </a:solidFill>
-                <a:latin typeface="Calibri" pitchFamily="34" charset="0"/>
-                <a:ea typeface="Calibri" pitchFamily="34" charset="-122"/>
-                <a:cs typeface="Calibri" pitchFamily="34" charset="-120"/>
-              </a:rPr>
-              <a:t>cheating patterns found</a:t>
-            </a:r>
-            <a:endParaRPr lang="en-US" sz="1467" dirty="0">
-              <a:solidFill>
-                <a:prstClr val="black"/>
-              </a:solidFill>
-              <a:latin typeface="Calibri" panose="020F0502020204030204"/>
-            </a:endParaRPr>
-          </a:p>
-        </p:txBody>
-      </p:sp>
-      <p:sp>
-        <p:nvSpPr>
-          <p:cNvPr id="16" name="Shape 14"/>
-          <p:cNvSpPr/>
-          <p:nvPr/>
-        </p:nvSpPr>
-        <p:spPr>
-          <a:xfrm>
-            <a:off x="7254240" y="4389120"/>
-            <a:ext cx="4511040" cy="1158240"/>
-          </a:xfrm>
-          <a:prstGeom prst="roundRect">
-            <a:avLst>
-              <a:gd name="adj" fmla="val 8421"/>
-            </a:avLst>
-          </a:prstGeom>
-          <a:solidFill>
-            <a:srgbClr val="1A2840"/>
-          </a:solidFill>
-          <a:ln w="6350">
-            <a:solidFill>
-              <a:srgbClr val="4FC3F7"/>
-            </a:solidFill>
-            <a:prstDash val="solid"/>
-          </a:ln>
-        </p:spPr>
-        <p:txBody>
-          <a:bodyPr/>
-          <a:lstStyle/>
-          <a:p>
-            <a:pPr defTabSz="1219170"/>
-            <a:endParaRPr lang="en-IN" sz="2400">
-              <a:solidFill>
-                <a:prstClr val="black"/>
-              </a:solidFill>
-              <a:latin typeface="Calibri" panose="020F0502020204030204"/>
-            </a:endParaRPr>
-          </a:p>
-        </p:txBody>
-      </p:sp>
-      <p:sp>
-        <p:nvSpPr>
-          <p:cNvPr id="17" name="Text 15"/>
-          <p:cNvSpPr/>
-          <p:nvPr/>
-        </p:nvSpPr>
-        <p:spPr>
-          <a:xfrm>
-            <a:off x="7254240" y="4511040"/>
-            <a:ext cx="4511040" cy="633984"/>
-          </a:xfrm>
-          <a:prstGeom prst="rect">
-            <a:avLst/>
-          </a:prstGeom>
-          <a:noFill/>
-          <a:ln/>
-        </p:spPr>
-        <p:txBody>
-          <a:bodyPr wrap="square" rtlCol="0" anchor="ctr"/>
-          <a:lstStyle/>
-          <a:p>
-            <a:pPr algn="ctr" defTabSz="1219170"/>
-            <a:r>
-              <a:rPr lang="en-US" sz="4267" b="1" dirty="0">
-                <a:solidFill>
-                  <a:srgbClr val="4FC3F7"/>
-                </a:solidFill>
-                <a:latin typeface="Calibri" pitchFamily="34" charset="0"/>
-                <a:ea typeface="Calibri" pitchFamily="34" charset="-122"/>
-                <a:cs typeface="Calibri" pitchFamily="34" charset="-120"/>
-              </a:rPr>
-              <a:t>~5 sec</a:t>
-            </a:r>
-            <a:endParaRPr lang="en-US" sz="4267" dirty="0">
-              <a:solidFill>
-                <a:prstClr val="black"/>
-              </a:solidFill>
-              <a:latin typeface="Calibri" panose="020F0502020204030204"/>
-            </a:endParaRPr>
-          </a:p>
-        </p:txBody>
-      </p:sp>
-      <p:sp>
-        <p:nvSpPr>
-          <p:cNvPr id="18" name="Text 16"/>
-          <p:cNvSpPr/>
-          <p:nvPr/>
-        </p:nvSpPr>
-        <p:spPr>
-          <a:xfrm>
-            <a:off x="7254240" y="5145024"/>
-            <a:ext cx="4511040" cy="365760"/>
-          </a:xfrm>
-          <a:prstGeom prst="rect">
-            <a:avLst/>
-          </a:prstGeom>
-          <a:noFill/>
-          <a:ln/>
-        </p:spPr>
-        <p:txBody>
-          <a:bodyPr wrap="square" rtlCol="0" anchor="ctr"/>
-          <a:lstStyle/>
-          <a:p>
-            <a:pPr algn="ctr" defTabSz="1219170"/>
-            <a:r>
-              <a:rPr lang="en-US" sz="1467" dirty="0">
-                <a:solidFill>
-                  <a:srgbClr val="5A7A9A"/>
-                </a:solidFill>
-                <a:latin typeface="Calibri" pitchFamily="34" charset="0"/>
-                <a:ea typeface="Calibri" pitchFamily="34" charset="-122"/>
-                <a:cs typeface="Calibri" pitchFamily="34" charset="-120"/>
-              </a:rPr>
-              <a:t>trade → alert on screen</a:t>
-            </a:r>
-            <a:endParaRPr lang="en-US" sz="1467" dirty="0">
-              <a:solidFill>
-                <a:prstClr val="black"/>
-              </a:solidFill>
-              <a:latin typeface="Calibri" panose="020F0502020204030204"/>
-            </a:endParaRPr>
+          <a:p>
+            <a:pPr>
+              <a:lnSpc>
+                <a:spcPct val="100000"/>
+              </a:lnSpc>
+              <a:spcBef>
+                <a:spcPts val="0"/>
+              </a:spcBef>
+              <a:spcAft>
+                <a:spcPts val="600"/>
+              </a:spcAft>
+            </a:pPr>
+            <a:r>
+              <a:rPr sz="1400" b="1" i="0" dirty="0">
+                <a:solidFill>
+                  <a:srgbClr val="3B9EFF"/>
+                </a:solidFill>
+                <a:latin typeface="Calibri"/>
+              </a:rPr>
+              <a:t>Volume spike: </a:t>
+            </a:r>
+            <a:r>
+              <a:rPr sz="1400" b="0" i="0" dirty="0">
+                <a:solidFill>
+                  <a:srgbClr val="EAF0F8"/>
+                </a:solidFill>
+                <a:latin typeface="Calibri"/>
+              </a:rPr>
+              <a:t>sudden flood of trades.</a:t>
+            </a:r>
+          </a:p>
+          <a:p>
+            <a:pPr>
+              <a:lnSpc>
+                <a:spcPct val="100000"/>
+              </a:lnSpc>
+              <a:spcBef>
+                <a:spcPts val="0"/>
+              </a:spcBef>
+              <a:spcAft>
+                <a:spcPts val="600"/>
+              </a:spcAft>
+            </a:pPr>
+            <a:r>
+              <a:rPr sz="1350" b="0" i="1" dirty="0">
+                <a:solidFill>
+                  <a:srgbClr val="9AA8BD"/>
+                </a:solidFill>
+                <a:latin typeface="Calibri"/>
+              </a:rPr>
+              <a:t>Each match is saved as a MEDIUM or HIGH alert and appears on the dashboard in seconds.</a:t>
+            </a:r>
           </a:p>
         </p:txBody>
       </p:sp>
@@ -12112,7 +12414,7 @@
         </p:nvSpPr>
         <p:spPr>
           <a:xfrm>
-            <a:off x="0" y="0"/>
+            <a:off x="-15088" y="8626"/>
             <a:ext cx="12191695" cy="6858000"/>
           </a:xfrm>
           <a:prstGeom prst="rect">
@@ -12145,7 +12447,7 @@
           <a:lstStyle/>
           <a:p>
             <a:pPr algn="ctr"/>
-            <a:endParaRPr/>
+            <a:endParaRPr lang="en-IN"/>
           </a:p>
         </p:txBody>
       </p:sp>
@@ -12183,13 +12485,13 @@
               </a:spcAft>
             </a:pPr>
             <a:r>
-              <a:rPr sz="1300" b="1" i="0" dirty="0">
+              <a:rPr sz="1300" b="1" i="0">
                 <a:solidFill>
                   <a:srgbClr val="2EE6A6"/>
                 </a:solidFill>
                 <a:latin typeface="Calibri"/>
               </a:rPr>
-              <a:t>THE BIG PICTURE</a:t>
+              <a:t>THE DATA</a:t>
             </a:r>
           </a:p>
         </p:txBody>
@@ -12228,98 +12530,27 @@
               </a:spcAft>
             </a:pPr>
             <a:r>
-              <a:rPr sz="3000" b="1" i="0" dirty="0">
+              <a:rPr sz="3000" b="1" i="0">
                 <a:solidFill>
                   <a:srgbClr val="FFFFFF"/>
                 </a:solidFill>
                 <a:latin typeface="Cambria"/>
               </a:rPr>
-              <a:t>What it does, in six simple steps</a:t>
-            </a:r>
-          </a:p>
-        </p:txBody>
-      </p:sp>
-      <p:sp>
-        <p:nvSpPr>
-          <p:cNvPr id="5" name="Rounded Rectangle 4"/>
-          <p:cNvSpPr/>
-          <p:nvPr/>
-        </p:nvSpPr>
-        <p:spPr>
-          <a:xfrm>
-            <a:off x="716663" y="1810512"/>
-            <a:ext cx="10728192" cy="3328415"/>
-          </a:xfrm>
-          <a:prstGeom prst="roundRect">
-            <a:avLst>
-              <a:gd name="adj" fmla="val 6000"/>
-            </a:avLst>
-          </a:prstGeom>
-          <a:solidFill>
-            <a:srgbClr val="FFFFFF"/>
-          </a:solidFill>
-          <a:ln>
-            <a:noFill/>
-          </a:ln>
-          <a:effectLst/>
-        </p:spPr>
-        <p:style>
-          <a:lnRef idx="1">
-            <a:schemeClr val="accent1"/>
-          </a:lnRef>
-          <a:fillRef idx="3">
-            <a:schemeClr val="accent1"/>
-          </a:fillRef>
-          <a:effectRef idx="2">
-            <a:schemeClr val="accent1"/>
-          </a:effectRef>
-          <a:fontRef idx="minor">
-            <a:schemeClr val="lt1"/>
-          </a:fontRef>
-        </p:style>
-        <p:txBody>
-          <a:bodyPr rtlCol="0" anchor="ctr"/>
-          <a:lstStyle/>
-          <a:p>
-            <a:pPr algn="ctr"/>
-            <a:endParaRPr/>
-          </a:p>
-        </p:txBody>
-      </p:sp>
-      <p:pic>
-        <p:nvPicPr>
-          <p:cNvPr id="6" name="Picture 5" descr="fig_flow.png"/>
-          <p:cNvPicPr>
-            <a:picLocks noChangeAspect="1"/>
-          </p:cNvPicPr>
-          <p:nvPr/>
-        </p:nvPicPr>
-        <p:blipFill>
-          <a:blip r:embed="rId3"/>
-          <a:stretch>
-            <a:fillRect/>
-          </a:stretch>
-        </p:blipFill>
-        <p:spPr>
-          <a:xfrm>
-            <a:off x="826391" y="1920240"/>
-            <a:ext cx="10508736" cy="3108960"/>
-          </a:xfrm>
-          <a:prstGeom prst="rect">
-            <a:avLst/>
-          </a:prstGeom>
-        </p:spPr>
-      </p:pic>
-      <p:sp>
-        <p:nvSpPr>
-          <p:cNvPr id="7" name="TextBox 6"/>
+              <a:t>Live trades from Binance — free, no key</a:t>
+            </a:r>
+          </a:p>
+        </p:txBody>
+      </p:sp>
+      <p:sp>
+        <p:nvSpPr>
+          <p:cNvPr id="5" name="TextBox 4"/>
           <p:cNvSpPr txBox="1"/>
           <p:nvPr/>
         </p:nvSpPr>
         <p:spPr>
           <a:xfrm>
-            <a:off x="777240" y="5577840"/>
-            <a:ext cx="10607040" cy="731520"/>
+            <a:off x="777240" y="1874519"/>
+            <a:ext cx="10607040" cy="548640"/>
           </a:xfrm>
           <a:prstGeom prst="rect">
             <a:avLst/>
@@ -12332,7 +12563,7 @@
           </a:bodyPr>
           <a:lstStyle/>
           <a:p>
-            <a:pPr algn="ctr">
+            <a:pPr algn="l">
               <a:lnSpc>
                 <a:spcPct val="100000"/>
               </a:lnSpc>
@@ -12344,17 +12575,962 @@
               </a:spcAft>
             </a:pPr>
             <a:r>
-              <a:rPr sz="1500" b="0" i="1">
-                <a:solidFill>
-                  <a:srgbClr val="9AA8BD"/>
+              <a:rPr sz="1600" b="0" i="0">
+                <a:solidFill>
+                  <a:srgbClr val="EAF0F8"/>
                 </a:solidFill>
                 <a:latin typeface="Calibri"/>
               </a:rPr>
-              <a:t>Live trades come in on the left and become a live dashboard on the right. Each step is a small, well-known tool.</a:t>
-            </a:r>
-          </a:p>
-        </p:txBody>
-      </p:sp>
+              <a:t>One always-open connection gives us every trade for all six coins.</a:t>
+            </a:r>
+          </a:p>
+        </p:txBody>
+      </p:sp>
+      <p:sp>
+        <p:nvSpPr>
+          <p:cNvPr id="6" name="TextBox 5"/>
+          <p:cNvSpPr txBox="1"/>
+          <p:nvPr/>
+        </p:nvSpPr>
+        <p:spPr>
+          <a:xfrm>
+            <a:off x="777240" y="2514600"/>
+            <a:ext cx="10607040" cy="215444"/>
+          </a:xfrm>
+          <a:prstGeom prst="rect">
+            <a:avLst/>
+          </a:prstGeom>
+          <a:noFill/>
+        </p:spPr>
+        <p:txBody>
+          <a:bodyPr wrap="square" lIns="0" tIns="0" rIns="0" bIns="0" anchor="t">
+            <a:spAutoFit/>
+          </a:bodyPr>
+          <a:lstStyle/>
+          <a:p>
+            <a:pPr algn="l">
+              <a:lnSpc>
+                <a:spcPct val="100000"/>
+              </a:lnSpc>
+              <a:spcBef>
+                <a:spcPts val="0"/>
+              </a:spcBef>
+              <a:spcAft>
+                <a:spcPts val="600"/>
+              </a:spcAft>
+            </a:pPr>
+            <a:r>
+              <a:rPr sz="1400" b="0" i="0" dirty="0">
+                <a:solidFill>
+                  <a:srgbClr val="2EE6A6"/>
+                </a:solidFill>
+                <a:latin typeface="Consolas"/>
+              </a:rPr>
+              <a:t>symbol · price · </a:t>
+            </a:r>
+            <a:r>
+              <a:rPr lang="en-US" sz="1400" dirty="0">
+                <a:solidFill>
+                  <a:srgbClr val="2EE6A6"/>
+                </a:solidFill>
+                <a:latin typeface="Consolas"/>
+              </a:rPr>
+              <a:t>volume</a:t>
+            </a:r>
+            <a:r>
+              <a:rPr sz="1400" b="0" i="0" dirty="0">
+                <a:solidFill>
+                  <a:srgbClr val="2EE6A6"/>
+                </a:solidFill>
+                <a:latin typeface="Consolas"/>
+              </a:rPr>
+              <a:t> · exact time (to the millisecond)</a:t>
+            </a:r>
+          </a:p>
+        </p:txBody>
+      </p:sp>
+      <p:grpSp>
+        <p:nvGrpSpPr>
+          <p:cNvPr id="21" name="Group 20">
+            <a:extLst>
+              <a:ext uri="{FF2B5EF4-FFF2-40B4-BE49-F238E27FC236}">
+                <a16:creationId xmlns:a16="http://schemas.microsoft.com/office/drawing/2014/main" id="{8F1CB4F8-CE58-E711-FD4B-803DABCFA8E9}"/>
+              </a:ext>
+            </a:extLst>
+          </p:cNvPr>
+          <p:cNvGrpSpPr/>
+          <p:nvPr/>
+        </p:nvGrpSpPr>
+        <p:grpSpPr>
+          <a:xfrm>
+            <a:off x="777239" y="3246120"/>
+            <a:ext cx="6132519" cy="2788920"/>
+            <a:chOff x="777240" y="3246120"/>
+            <a:chExt cx="6023281" cy="2788920"/>
+          </a:xfrm>
+        </p:grpSpPr>
+        <p:sp>
+          <p:nvSpPr>
+            <p:cNvPr id="7" name="Oval 6"/>
+            <p:cNvSpPr/>
+            <p:nvPr/>
+          </p:nvSpPr>
+          <p:spPr>
+            <a:xfrm>
+              <a:off x="777240" y="3246120"/>
+              <a:ext cx="457200" cy="457200"/>
+            </a:xfrm>
+            <a:prstGeom prst="ellipse">
+              <a:avLst/>
+            </a:prstGeom>
+            <a:solidFill>
+              <a:srgbClr val="2EE6A6"/>
+            </a:solidFill>
+            <a:ln>
+              <a:noFill/>
+            </a:ln>
+            <a:effectLst/>
+          </p:spPr>
+          <p:style>
+            <a:lnRef idx="1">
+              <a:schemeClr val="accent1"/>
+            </a:lnRef>
+            <a:fillRef idx="3">
+              <a:schemeClr val="accent1"/>
+            </a:fillRef>
+            <a:effectRef idx="2">
+              <a:schemeClr val="accent1"/>
+            </a:effectRef>
+            <a:fontRef idx="minor">
+              <a:schemeClr val="lt1"/>
+            </a:fontRef>
+          </p:style>
+          <p:txBody>
+            <a:bodyPr wrap="none" lIns="0" tIns="0" rIns="0" bIns="0" rtlCol="0" anchor="ctr"/>
+            <a:lstStyle/>
+            <a:p>
+              <a:pPr algn="ctr"/>
+              <a:endParaRPr/>
+            </a:p>
+          </p:txBody>
+        </p:sp>
+        <p:sp>
+          <p:nvSpPr>
+            <p:cNvPr id="8" name="TextBox 7"/>
+            <p:cNvSpPr txBox="1"/>
+            <p:nvPr/>
+          </p:nvSpPr>
+          <p:spPr>
+            <a:xfrm>
+              <a:off x="1417320" y="3332461"/>
+              <a:ext cx="4583939" cy="246221"/>
+            </a:xfrm>
+            <a:prstGeom prst="rect">
+              <a:avLst/>
+            </a:prstGeom>
+            <a:noFill/>
+          </p:spPr>
+          <p:txBody>
+            <a:bodyPr wrap="square" lIns="0" tIns="0" rIns="0" bIns="0" anchor="ctr">
+              <a:spAutoFit/>
+            </a:bodyPr>
+            <a:lstStyle/>
+            <a:p>
+              <a:pPr algn="l">
+                <a:lnSpc>
+                  <a:spcPct val="100000"/>
+                </a:lnSpc>
+                <a:spcBef>
+                  <a:spcPts val="0"/>
+                </a:spcBef>
+                <a:spcAft>
+                  <a:spcPts val="600"/>
+                </a:spcAft>
+              </a:pPr>
+              <a:r>
+                <a:rPr sz="1600" b="1" i="0" dirty="0">
+                  <a:solidFill>
+                    <a:srgbClr val="2EE6A6"/>
+                  </a:solidFill>
+                  <a:latin typeface="Calibri"/>
+                </a:rPr>
+                <a:t>Fast   </a:t>
+              </a:r>
+              <a:r>
+                <a:rPr sz="1500" b="0" i="0" dirty="0">
+                  <a:solidFill>
+                    <a:srgbClr val="EAF0F8"/>
+                  </a:solidFill>
+                  <a:latin typeface="Calibri"/>
+                </a:rPr>
+                <a:t>never stops — 50 to 200 trades per second, per coin</a:t>
+              </a:r>
+            </a:p>
+          </p:txBody>
+        </p:sp>
+        <p:sp>
+          <p:nvSpPr>
+            <p:cNvPr id="9" name="Oval 8"/>
+            <p:cNvSpPr/>
+            <p:nvPr/>
+          </p:nvSpPr>
+          <p:spPr>
+            <a:xfrm>
+              <a:off x="777240" y="4023359"/>
+              <a:ext cx="457200" cy="457200"/>
+            </a:xfrm>
+            <a:prstGeom prst="ellipse">
+              <a:avLst/>
+            </a:prstGeom>
+            <a:solidFill>
+              <a:srgbClr val="3B9EFF"/>
+            </a:solidFill>
+            <a:ln>
+              <a:noFill/>
+            </a:ln>
+            <a:effectLst/>
+          </p:spPr>
+          <p:style>
+            <a:lnRef idx="1">
+              <a:schemeClr val="accent1"/>
+            </a:lnRef>
+            <a:fillRef idx="3">
+              <a:schemeClr val="accent1"/>
+            </a:fillRef>
+            <a:effectRef idx="2">
+              <a:schemeClr val="accent1"/>
+            </a:effectRef>
+            <a:fontRef idx="minor">
+              <a:schemeClr val="lt1"/>
+            </a:fontRef>
+          </p:style>
+          <p:txBody>
+            <a:bodyPr wrap="none" lIns="0" tIns="0" rIns="0" bIns="0" rtlCol="0" anchor="ctr"/>
+            <a:lstStyle/>
+            <a:p>
+              <a:pPr algn="ctr"/>
+              <a:endParaRPr/>
+            </a:p>
+          </p:txBody>
+        </p:sp>
+        <p:sp>
+          <p:nvSpPr>
+            <p:cNvPr id="10" name="TextBox 9"/>
+            <p:cNvSpPr txBox="1"/>
+            <p:nvPr/>
+          </p:nvSpPr>
+          <p:spPr>
+            <a:xfrm>
+              <a:off x="1417321" y="4109701"/>
+              <a:ext cx="5035819" cy="246221"/>
+            </a:xfrm>
+            <a:prstGeom prst="rect">
+              <a:avLst/>
+            </a:prstGeom>
+            <a:noFill/>
+          </p:spPr>
+          <p:txBody>
+            <a:bodyPr wrap="square" lIns="0" tIns="0" rIns="0" bIns="0" anchor="ctr">
+              <a:spAutoFit/>
+            </a:bodyPr>
+            <a:lstStyle/>
+            <a:p>
+              <a:pPr algn="l">
+                <a:lnSpc>
+                  <a:spcPct val="100000"/>
+                </a:lnSpc>
+                <a:spcBef>
+                  <a:spcPts val="0"/>
+                </a:spcBef>
+                <a:spcAft>
+                  <a:spcPts val="600"/>
+                </a:spcAft>
+              </a:pPr>
+              <a:r>
+                <a:rPr sz="1600" b="1" i="0" dirty="0">
+                  <a:solidFill>
+                    <a:srgbClr val="3B9EFF"/>
+                  </a:solidFill>
+                  <a:latin typeface="Calibri"/>
+                </a:rPr>
+                <a:t>Enough   </a:t>
+              </a:r>
+              <a:r>
+                <a:rPr sz="1500" b="0" i="0" dirty="0">
+                  <a:solidFill>
+                    <a:srgbClr val="EAF0F8"/>
+                  </a:solidFill>
+                  <a:latin typeface="Calibri"/>
+                </a:rPr>
+                <a:t>hundreds of trades a second in total — real stream load</a:t>
+              </a:r>
+            </a:p>
+          </p:txBody>
+        </p:sp>
+        <p:sp>
+          <p:nvSpPr>
+            <p:cNvPr id="11" name="Oval 10"/>
+            <p:cNvSpPr/>
+            <p:nvPr/>
+          </p:nvSpPr>
+          <p:spPr>
+            <a:xfrm>
+              <a:off x="777240" y="4800600"/>
+              <a:ext cx="457200" cy="457200"/>
+            </a:xfrm>
+            <a:prstGeom prst="ellipse">
+              <a:avLst/>
+            </a:prstGeom>
+            <a:solidFill>
+              <a:srgbClr val="F2A93B"/>
+            </a:solidFill>
+            <a:ln>
+              <a:noFill/>
+            </a:ln>
+            <a:effectLst/>
+          </p:spPr>
+          <p:style>
+            <a:lnRef idx="1">
+              <a:schemeClr val="accent1"/>
+            </a:lnRef>
+            <a:fillRef idx="3">
+              <a:schemeClr val="accent1"/>
+            </a:fillRef>
+            <a:effectRef idx="2">
+              <a:schemeClr val="accent1"/>
+            </a:effectRef>
+            <a:fontRef idx="minor">
+              <a:schemeClr val="lt1"/>
+            </a:fontRef>
+          </p:style>
+          <p:txBody>
+            <a:bodyPr wrap="none" lIns="0" tIns="0" rIns="0" bIns="0" rtlCol="0" anchor="ctr"/>
+            <a:lstStyle/>
+            <a:p>
+              <a:pPr algn="ctr"/>
+              <a:endParaRPr/>
+            </a:p>
+          </p:txBody>
+        </p:sp>
+        <p:sp>
+          <p:nvSpPr>
+            <p:cNvPr id="12" name="TextBox 11"/>
+            <p:cNvSpPr txBox="1"/>
+            <p:nvPr/>
+          </p:nvSpPr>
+          <p:spPr>
+            <a:xfrm>
+              <a:off x="1417320" y="4886941"/>
+              <a:ext cx="5383201" cy="246221"/>
+            </a:xfrm>
+            <a:prstGeom prst="rect">
+              <a:avLst/>
+            </a:prstGeom>
+            <a:noFill/>
+          </p:spPr>
+          <p:txBody>
+            <a:bodyPr wrap="square" lIns="0" tIns="0" rIns="0" bIns="0" anchor="ctr">
+              <a:spAutoFit/>
+            </a:bodyPr>
+            <a:lstStyle/>
+            <a:p>
+              <a:pPr algn="l">
+                <a:lnSpc>
+                  <a:spcPct val="100000"/>
+                </a:lnSpc>
+                <a:spcBef>
+                  <a:spcPts val="0"/>
+                </a:spcBef>
+                <a:spcAft>
+                  <a:spcPts val="600"/>
+                </a:spcAft>
+              </a:pPr>
+              <a:r>
+                <a:rPr sz="1600" b="1" i="0" dirty="0">
+                  <a:solidFill>
+                    <a:srgbClr val="F2A93B"/>
+                  </a:solidFill>
+                  <a:latin typeface="Calibri"/>
+                </a:rPr>
+                <a:t>A bit messy   </a:t>
+              </a:r>
+              <a:r>
+                <a:rPr sz="1500" b="0" i="0" dirty="0">
+                  <a:solidFill>
+                    <a:srgbClr val="EAF0F8"/>
+                  </a:solidFill>
+                  <a:latin typeface="Calibri"/>
+                </a:rPr>
+                <a:t>trades can arrive slightly out of order — we handle that</a:t>
+              </a:r>
+            </a:p>
+          </p:txBody>
+        </p:sp>
+        <p:sp>
+          <p:nvSpPr>
+            <p:cNvPr id="13" name="Oval 12"/>
+            <p:cNvSpPr/>
+            <p:nvPr/>
+          </p:nvSpPr>
+          <p:spPr>
+            <a:xfrm>
+              <a:off x="777240" y="5577840"/>
+              <a:ext cx="457200" cy="457200"/>
+            </a:xfrm>
+            <a:prstGeom prst="ellipse">
+              <a:avLst/>
+            </a:prstGeom>
+            <a:solidFill>
+              <a:srgbClr val="E84749"/>
+            </a:solidFill>
+            <a:ln>
+              <a:noFill/>
+            </a:ln>
+            <a:effectLst/>
+          </p:spPr>
+          <p:style>
+            <a:lnRef idx="1">
+              <a:schemeClr val="accent1"/>
+            </a:lnRef>
+            <a:fillRef idx="3">
+              <a:schemeClr val="accent1"/>
+            </a:fillRef>
+            <a:effectRef idx="2">
+              <a:schemeClr val="accent1"/>
+            </a:effectRef>
+            <a:fontRef idx="minor">
+              <a:schemeClr val="lt1"/>
+            </a:fontRef>
+          </p:style>
+          <p:txBody>
+            <a:bodyPr wrap="none" lIns="0" tIns="0" rIns="0" bIns="0" rtlCol="0" anchor="ctr"/>
+            <a:lstStyle/>
+            <a:p>
+              <a:pPr algn="ctr"/>
+              <a:endParaRPr/>
+            </a:p>
+          </p:txBody>
+        </p:sp>
+        <p:sp>
+          <p:nvSpPr>
+            <p:cNvPr id="14" name="TextBox 13"/>
+            <p:cNvSpPr txBox="1"/>
+            <p:nvPr/>
+          </p:nvSpPr>
+          <p:spPr>
+            <a:xfrm>
+              <a:off x="1417320" y="5664181"/>
+              <a:ext cx="3908943" cy="246221"/>
+            </a:xfrm>
+            <a:prstGeom prst="rect">
+              <a:avLst/>
+            </a:prstGeom>
+            <a:noFill/>
+          </p:spPr>
+          <p:txBody>
+            <a:bodyPr wrap="square" lIns="0" tIns="0" rIns="0" bIns="0" anchor="ctr">
+              <a:spAutoFit/>
+            </a:bodyPr>
+            <a:lstStyle/>
+            <a:p>
+              <a:pPr algn="l">
+                <a:lnSpc>
+                  <a:spcPct val="100000"/>
+                </a:lnSpc>
+                <a:spcBef>
+                  <a:spcPts val="0"/>
+                </a:spcBef>
+                <a:spcAft>
+                  <a:spcPts val="600"/>
+                </a:spcAft>
+              </a:pPr>
+              <a:r>
+                <a:rPr sz="1600" b="1" i="0" dirty="0">
+                  <a:solidFill>
+                    <a:srgbClr val="E84749"/>
+                  </a:solidFill>
+                  <a:latin typeface="Calibri"/>
+                </a:rPr>
+                <a:t>Tiny   </a:t>
+              </a:r>
+              <a:r>
+                <a:rPr sz="1500" b="0" i="0" dirty="0">
+                  <a:solidFill>
+                    <a:srgbClr val="EAF0F8"/>
+                  </a:solidFill>
+                  <a:latin typeface="Calibri"/>
+                </a:rPr>
+                <a:t>each message is small and simple to read</a:t>
+              </a:r>
+            </a:p>
+          </p:txBody>
+        </p:sp>
+      </p:grpSp>
+      <p:sp>
+        <p:nvSpPr>
+          <p:cNvPr id="16" name="Shape 8">
+            <a:extLst>
+              <a:ext uri="{FF2B5EF4-FFF2-40B4-BE49-F238E27FC236}">
+                <a16:creationId xmlns:a16="http://schemas.microsoft.com/office/drawing/2014/main" id="{52183B88-A367-2FDD-D3A9-16B7BC02FF0E}"/>
+              </a:ext>
+            </a:extLst>
+          </p:cNvPr>
+          <p:cNvSpPr/>
+          <p:nvPr/>
+        </p:nvSpPr>
+        <p:spPr>
+          <a:xfrm>
+            <a:off x="7254240" y="1706880"/>
+            <a:ext cx="4511040" cy="1158240"/>
+          </a:xfrm>
+          <a:prstGeom prst="roundRect">
+            <a:avLst>
+              <a:gd name="adj" fmla="val 8421"/>
+            </a:avLst>
+          </a:prstGeom>
+          <a:solidFill>
+            <a:srgbClr val="1A2840"/>
+          </a:solidFill>
+          <a:ln w="6350">
+            <a:solidFill>
+              <a:srgbClr val="00C896"/>
+            </a:solidFill>
+            <a:prstDash val="solid"/>
+          </a:ln>
+        </p:spPr>
+        <p:txBody>
+          <a:bodyPr/>
+          <a:lstStyle/>
+          <a:p>
+            <a:pPr defTabSz="1219170"/>
+            <a:endParaRPr lang="en-IN" sz="2400">
+              <a:solidFill>
+                <a:prstClr val="black"/>
+              </a:solidFill>
+              <a:latin typeface="Calibri" panose="020F0502020204030204"/>
+            </a:endParaRPr>
+          </a:p>
+        </p:txBody>
+      </p:sp>
+      <p:sp>
+        <p:nvSpPr>
+          <p:cNvPr id="18" name="Text 9">
+            <a:extLst>
+              <a:ext uri="{FF2B5EF4-FFF2-40B4-BE49-F238E27FC236}">
+                <a16:creationId xmlns:a16="http://schemas.microsoft.com/office/drawing/2014/main" id="{B50A119F-9048-B3FE-234C-7BE3AE1BF066}"/>
+              </a:ext>
+            </a:extLst>
+          </p:cNvPr>
+          <p:cNvSpPr/>
+          <p:nvPr/>
+        </p:nvSpPr>
+        <p:spPr>
+          <a:xfrm>
+            <a:off x="7254240" y="1828800"/>
+            <a:ext cx="4511040" cy="633984"/>
+          </a:xfrm>
+          <a:prstGeom prst="rect">
+            <a:avLst/>
+          </a:prstGeom>
+          <a:noFill/>
+          <a:ln/>
+        </p:spPr>
+        <p:txBody>
+          <a:bodyPr wrap="square" rtlCol="0" anchor="ctr"/>
+          <a:lstStyle/>
+          <a:p>
+            <a:pPr algn="ctr" defTabSz="1219170"/>
+            <a:r>
+              <a:rPr lang="en-US" sz="4267" b="1" dirty="0">
+                <a:solidFill>
+                  <a:srgbClr val="00C896"/>
+                </a:solidFill>
+                <a:latin typeface="Calibri" pitchFamily="34" charset="0"/>
+                <a:ea typeface="Calibri" pitchFamily="34" charset="-122"/>
+                <a:cs typeface="Calibri" pitchFamily="34" charset="-120"/>
+              </a:rPr>
+              <a:t>6</a:t>
+            </a:r>
+            <a:endParaRPr lang="en-US" sz="4267" dirty="0">
+              <a:solidFill>
+                <a:prstClr val="black"/>
+              </a:solidFill>
+              <a:latin typeface="Calibri" panose="020F0502020204030204"/>
+            </a:endParaRPr>
+          </a:p>
+        </p:txBody>
+      </p:sp>
+      <p:sp>
+        <p:nvSpPr>
+          <p:cNvPr id="20" name="Text 10">
+            <a:extLst>
+              <a:ext uri="{FF2B5EF4-FFF2-40B4-BE49-F238E27FC236}">
+                <a16:creationId xmlns:a16="http://schemas.microsoft.com/office/drawing/2014/main" id="{8F8207D0-4A1E-09AB-17DC-50F165DA1315}"/>
+              </a:ext>
+            </a:extLst>
+          </p:cNvPr>
+          <p:cNvSpPr/>
+          <p:nvPr/>
+        </p:nvSpPr>
+        <p:spPr>
+          <a:xfrm>
+            <a:off x="7254240" y="2462784"/>
+            <a:ext cx="4511040" cy="365760"/>
+          </a:xfrm>
+          <a:prstGeom prst="rect">
+            <a:avLst/>
+          </a:prstGeom>
+          <a:noFill/>
+          <a:ln/>
+        </p:spPr>
+        <p:txBody>
+          <a:bodyPr wrap="square" rtlCol="0" anchor="ctr"/>
+          <a:lstStyle/>
+          <a:p>
+            <a:pPr algn="ctr" defTabSz="1219170"/>
+            <a:r>
+              <a:rPr lang="en-US" sz="1467" dirty="0">
+                <a:solidFill>
+                  <a:srgbClr val="5A7A9A"/>
+                </a:solidFill>
+                <a:latin typeface="Calibri" pitchFamily="34" charset="0"/>
+                <a:ea typeface="Calibri" pitchFamily="34" charset="-122"/>
+                <a:cs typeface="Calibri" pitchFamily="34" charset="-120"/>
+              </a:rPr>
+              <a:t>coins watched live</a:t>
+            </a:r>
+            <a:endParaRPr lang="en-US" sz="1467" dirty="0">
+              <a:solidFill>
+                <a:prstClr val="black"/>
+              </a:solidFill>
+              <a:latin typeface="Calibri" panose="020F0502020204030204"/>
+            </a:endParaRPr>
+          </a:p>
+        </p:txBody>
+      </p:sp>
+      <p:graphicFrame>
+        <p:nvGraphicFramePr>
+          <p:cNvPr id="24" name="Table 23">
+            <a:extLst>
+              <a:ext uri="{FF2B5EF4-FFF2-40B4-BE49-F238E27FC236}">
+                <a16:creationId xmlns:a16="http://schemas.microsoft.com/office/drawing/2014/main" id="{85955F2B-176B-5F0E-5698-11BFA624D206}"/>
+              </a:ext>
+            </a:extLst>
+          </p:cNvPr>
+          <p:cNvGraphicFramePr>
+            <a:graphicFrameLocks noGrp="1"/>
+          </p:cNvGraphicFramePr>
+          <p:nvPr>
+            <p:extLst>
+              <p:ext uri="{D42A27DB-BD31-4B8C-83A1-F6EECF244321}">
+                <p14:modId xmlns:p14="http://schemas.microsoft.com/office/powerpoint/2010/main" val="170250850"/>
+              </p:ext>
+            </p:extLst>
+          </p:nvPr>
+        </p:nvGraphicFramePr>
+        <p:xfrm>
+          <a:off x="7524601" y="3194363"/>
+          <a:ext cx="4037162" cy="2560320"/>
+        </p:xfrm>
+        <a:graphic>
+          <a:graphicData uri="http://schemas.openxmlformats.org/drawingml/2006/table">
+            <a:tbl>
+              <a:tblPr>
+                <a:tableStyleId>{22838BEF-8BB2-4498-84A7-C5851F593DF1}</a:tableStyleId>
+              </a:tblPr>
+              <a:tblGrid>
+                <a:gridCol w="2018581">
+                  <a:extLst>
+                    <a:ext uri="{9D8B030D-6E8A-4147-A177-3AD203B41FA5}">
+                      <a16:colId xmlns:a16="http://schemas.microsoft.com/office/drawing/2014/main" val="3075627746"/>
+                    </a:ext>
+                  </a:extLst>
+                </a:gridCol>
+                <a:gridCol w="2018581">
+                  <a:extLst>
+                    <a:ext uri="{9D8B030D-6E8A-4147-A177-3AD203B41FA5}">
+                      <a16:colId xmlns:a16="http://schemas.microsoft.com/office/drawing/2014/main" val="2335410888"/>
+                    </a:ext>
+                  </a:extLst>
+                </a:gridCol>
+              </a:tblGrid>
+              <a:tr h="0">
+                <a:tc>
+                  <a:txBody>
+                    <a:bodyPr/>
+                    <a:lstStyle/>
+                    <a:p>
+                      <a:pPr algn="ctr">
+                        <a:buNone/>
+                      </a:pPr>
+                      <a:r>
+                        <a:rPr lang="en-IN" b="1" dirty="0"/>
+                        <a:t>Symbol</a:t>
+                      </a:r>
+                    </a:p>
+                  </a:txBody>
+                  <a:tcPr anchor="ctr"/>
+                </a:tc>
+                <a:tc>
+                  <a:txBody>
+                    <a:bodyPr/>
+                    <a:lstStyle/>
+                    <a:p>
+                      <a:pPr algn="ctr">
+                        <a:buNone/>
+                      </a:pPr>
+                      <a:r>
+                        <a:rPr lang="en-IN" b="1" dirty="0"/>
+                        <a:t>Name</a:t>
+                      </a:r>
+                    </a:p>
+                  </a:txBody>
+                  <a:tcPr anchor="ctr"/>
+                </a:tc>
+                <a:extLst>
+                  <a:ext uri="{0D108BD9-81ED-4DB2-BD59-A6C34878D82A}">
+                    <a16:rowId xmlns:a16="http://schemas.microsoft.com/office/drawing/2014/main" val="3752469429"/>
+                  </a:ext>
+                </a:extLst>
+              </a:tr>
+              <a:tr h="0">
+                <a:tc>
+                  <a:txBody>
+                    <a:bodyPr/>
+                    <a:lstStyle/>
+                    <a:p>
+                      <a:pPr algn="ctr">
+                        <a:buNone/>
+                      </a:pPr>
+                      <a:r>
+                        <a:rPr lang="en-IN" dirty="0"/>
+                        <a:t>BTCUSDT</a:t>
+                      </a:r>
+                    </a:p>
+                  </a:txBody>
+                  <a:tcPr anchor="ctr"/>
+                </a:tc>
+                <a:tc>
+                  <a:txBody>
+                    <a:bodyPr/>
+                    <a:lstStyle/>
+                    <a:p>
+                      <a:pPr algn="ctr">
+                        <a:buNone/>
+                      </a:pPr>
+                      <a:r>
+                        <a:rPr lang="en-IN"/>
+                        <a:t>Bitcoin</a:t>
+                      </a:r>
+                    </a:p>
+                  </a:txBody>
+                  <a:tcPr anchor="ctr"/>
+                </a:tc>
+                <a:extLst>
+                  <a:ext uri="{0D108BD9-81ED-4DB2-BD59-A6C34878D82A}">
+                    <a16:rowId xmlns:a16="http://schemas.microsoft.com/office/drawing/2014/main" val="1719694532"/>
+                  </a:ext>
+                </a:extLst>
+              </a:tr>
+              <a:tr h="0">
+                <a:tc>
+                  <a:txBody>
+                    <a:bodyPr/>
+                    <a:lstStyle/>
+                    <a:p>
+                      <a:pPr algn="ctr">
+                        <a:buNone/>
+                      </a:pPr>
+                      <a:r>
+                        <a:rPr lang="en-IN" dirty="0"/>
+                        <a:t>ETHUSDT</a:t>
+                      </a:r>
+                    </a:p>
+                  </a:txBody>
+                  <a:tcPr anchor="ctr"/>
+                </a:tc>
+                <a:tc>
+                  <a:txBody>
+                    <a:bodyPr/>
+                    <a:lstStyle/>
+                    <a:p>
+                      <a:pPr algn="ctr">
+                        <a:buNone/>
+                      </a:pPr>
+                      <a:r>
+                        <a:rPr lang="en-IN"/>
+                        <a:t>Ethereum</a:t>
+                      </a:r>
+                    </a:p>
+                  </a:txBody>
+                  <a:tcPr anchor="ctr"/>
+                </a:tc>
+                <a:extLst>
+                  <a:ext uri="{0D108BD9-81ED-4DB2-BD59-A6C34878D82A}">
+                    <a16:rowId xmlns:a16="http://schemas.microsoft.com/office/drawing/2014/main" val="2394009338"/>
+                  </a:ext>
+                </a:extLst>
+              </a:tr>
+              <a:tr h="0">
+                <a:tc>
+                  <a:txBody>
+                    <a:bodyPr/>
+                    <a:lstStyle/>
+                    <a:p>
+                      <a:pPr algn="ctr">
+                        <a:buNone/>
+                      </a:pPr>
+                      <a:r>
+                        <a:rPr lang="en-IN" dirty="0"/>
+                        <a:t>BNBUSDT</a:t>
+                      </a:r>
+                    </a:p>
+                  </a:txBody>
+                  <a:tcPr anchor="ctr"/>
+                </a:tc>
+                <a:tc>
+                  <a:txBody>
+                    <a:bodyPr/>
+                    <a:lstStyle/>
+                    <a:p>
+                      <a:pPr algn="ctr">
+                        <a:buNone/>
+                      </a:pPr>
+                      <a:r>
+                        <a:rPr lang="en-IN"/>
+                        <a:t>BNB (Binance Coin)</a:t>
+                      </a:r>
+                    </a:p>
+                  </a:txBody>
+                  <a:tcPr anchor="ctr"/>
+                </a:tc>
+                <a:extLst>
+                  <a:ext uri="{0D108BD9-81ED-4DB2-BD59-A6C34878D82A}">
+                    <a16:rowId xmlns:a16="http://schemas.microsoft.com/office/drawing/2014/main" val="3718288494"/>
+                  </a:ext>
+                </a:extLst>
+              </a:tr>
+              <a:tr h="0">
+                <a:tc>
+                  <a:txBody>
+                    <a:bodyPr/>
+                    <a:lstStyle/>
+                    <a:p>
+                      <a:pPr algn="ctr">
+                        <a:buNone/>
+                      </a:pPr>
+                      <a:r>
+                        <a:rPr lang="en-IN" dirty="0"/>
+                        <a:t>SOLUSDT</a:t>
+                      </a:r>
+                    </a:p>
+                  </a:txBody>
+                  <a:tcPr anchor="ctr"/>
+                </a:tc>
+                <a:tc>
+                  <a:txBody>
+                    <a:bodyPr/>
+                    <a:lstStyle/>
+                    <a:p>
+                      <a:pPr algn="ctr">
+                        <a:buNone/>
+                      </a:pPr>
+                      <a:r>
+                        <a:rPr lang="en-IN"/>
+                        <a:t>Solana</a:t>
+                      </a:r>
+                    </a:p>
+                  </a:txBody>
+                  <a:tcPr anchor="ctr"/>
+                </a:tc>
+                <a:extLst>
+                  <a:ext uri="{0D108BD9-81ED-4DB2-BD59-A6C34878D82A}">
+                    <a16:rowId xmlns:a16="http://schemas.microsoft.com/office/drawing/2014/main" val="202687009"/>
+                  </a:ext>
+                </a:extLst>
+              </a:tr>
+              <a:tr h="0">
+                <a:tc>
+                  <a:txBody>
+                    <a:bodyPr/>
+                    <a:lstStyle/>
+                    <a:p>
+                      <a:pPr algn="ctr">
+                        <a:buNone/>
+                      </a:pPr>
+                      <a:r>
+                        <a:rPr lang="en-IN" dirty="0"/>
+                        <a:t>DOGEUSDT</a:t>
+                      </a:r>
+                    </a:p>
+                  </a:txBody>
+                  <a:tcPr anchor="ctr"/>
+                </a:tc>
+                <a:tc>
+                  <a:txBody>
+                    <a:bodyPr/>
+                    <a:lstStyle/>
+                    <a:p>
+                      <a:pPr algn="ctr">
+                        <a:buNone/>
+                      </a:pPr>
+                      <a:r>
+                        <a:rPr lang="en-IN"/>
+                        <a:t>Dogecoin</a:t>
+                      </a:r>
+                    </a:p>
+                  </a:txBody>
+                  <a:tcPr anchor="ctr"/>
+                </a:tc>
+                <a:extLst>
+                  <a:ext uri="{0D108BD9-81ED-4DB2-BD59-A6C34878D82A}">
+                    <a16:rowId xmlns:a16="http://schemas.microsoft.com/office/drawing/2014/main" val="3422500677"/>
+                  </a:ext>
+                </a:extLst>
+              </a:tr>
+              <a:tr h="0">
+                <a:tc>
+                  <a:txBody>
+                    <a:bodyPr/>
+                    <a:lstStyle/>
+                    <a:p>
+                      <a:pPr algn="ctr">
+                        <a:buNone/>
+                      </a:pPr>
+                      <a:r>
+                        <a:rPr lang="en-IN" dirty="0"/>
+                        <a:t>XRPUSDT</a:t>
+                      </a:r>
+                    </a:p>
+                  </a:txBody>
+                  <a:tcPr anchor="ctr"/>
+                </a:tc>
+                <a:tc>
+                  <a:txBody>
+                    <a:bodyPr/>
+                    <a:lstStyle/>
+                    <a:p>
+                      <a:pPr algn="ctr">
+                        <a:buNone/>
+                      </a:pPr>
+                      <a:r>
+                        <a:rPr lang="en-IN" dirty="0"/>
+                        <a:t>XRP (Ripple)</a:t>
+                      </a:r>
+                    </a:p>
+                  </a:txBody>
+                  <a:tcPr anchor="ctr"/>
+                </a:tc>
+                <a:extLst>
+                  <a:ext uri="{0D108BD9-81ED-4DB2-BD59-A6C34878D82A}">
+                    <a16:rowId xmlns:a16="http://schemas.microsoft.com/office/drawing/2014/main" val="3409459833"/>
+                  </a:ext>
+                </a:extLst>
+              </a:tr>
+            </a:tbl>
+          </a:graphicData>
+        </a:graphic>
+      </p:graphicFrame>
     </p:spTree>
   </p:cSld>
   <p:clrMapOvr>
@@ -12388,7 +13564,7 @@
         </p:nvSpPr>
         <p:spPr>
           <a:xfrm>
-            <a:off x="-15088" y="0"/>
+            <a:off x="0" y="0"/>
             <a:ext cx="12191695" cy="6858000"/>
           </a:xfrm>
           <a:prstGeom prst="rect">
@@ -12459,13 +13635,13 @@
               </a:spcAft>
             </a:pPr>
             <a:r>
-              <a:rPr sz="1300" b="1" i="0">
+              <a:rPr sz="1300" b="1" i="0" dirty="0">
                 <a:solidFill>
                   <a:srgbClr val="2EE6A6"/>
                 </a:solidFill>
                 <a:latin typeface="Calibri"/>
               </a:rPr>
-              <a:t>THE DATA</a:t>
+              <a:t>THE BIG PICTURE</a:t>
             </a:r>
           </a:p>
         </p:txBody>
@@ -12504,123 +13680,35 @@
               </a:spcAft>
             </a:pPr>
             <a:r>
-              <a:rPr sz="3000" b="1" i="0">
+              <a:rPr sz="3000" b="1" i="0" dirty="0">
                 <a:solidFill>
                   <a:srgbClr val="FFFFFF"/>
                 </a:solidFill>
                 <a:latin typeface="Cambria"/>
               </a:rPr>
-              <a:t>Live trades from Binance — free, no key</a:t>
-            </a:r>
-          </a:p>
-        </p:txBody>
-      </p:sp>
-      <p:sp>
-        <p:nvSpPr>
-          <p:cNvPr id="5" name="TextBox 4"/>
-          <p:cNvSpPr txBox="1"/>
-          <p:nvPr/>
-        </p:nvSpPr>
-        <p:spPr>
-          <a:xfrm>
-            <a:off x="777240" y="1874519"/>
-            <a:ext cx="10607040" cy="548640"/>
-          </a:xfrm>
-          <a:prstGeom prst="rect">
-            <a:avLst/>
-          </a:prstGeom>
-          <a:noFill/>
-        </p:spPr>
-        <p:txBody>
-          <a:bodyPr wrap="square" lIns="0" tIns="0" rIns="0" bIns="0" anchor="t">
-            <a:spAutoFit/>
-          </a:bodyPr>
-          <a:lstStyle/>
-          <a:p>
-            <a:pPr algn="l">
-              <a:lnSpc>
-                <a:spcPct val="100000"/>
-              </a:lnSpc>
-              <a:spcBef>
-                <a:spcPts val="0"/>
-              </a:spcBef>
-              <a:spcAft>
-                <a:spcPts val="600"/>
-              </a:spcAft>
-            </a:pPr>
-            <a:r>
-              <a:rPr sz="1600" b="0" i="0">
-                <a:solidFill>
-                  <a:srgbClr val="EAF0F8"/>
-                </a:solidFill>
-                <a:latin typeface="Calibri"/>
-              </a:rPr>
-              <a:t>One always-open connection gives us every trade for all six coins.</a:t>
-            </a:r>
-          </a:p>
-        </p:txBody>
-      </p:sp>
-      <p:sp>
-        <p:nvSpPr>
-          <p:cNvPr id="6" name="TextBox 5"/>
-          <p:cNvSpPr txBox="1"/>
-          <p:nvPr/>
-        </p:nvSpPr>
-        <p:spPr>
-          <a:xfrm>
-            <a:off x="777240" y="2514600"/>
-            <a:ext cx="10607040" cy="411480"/>
-          </a:xfrm>
-          <a:prstGeom prst="rect">
-            <a:avLst/>
-          </a:prstGeom>
-          <a:noFill/>
-        </p:spPr>
-        <p:txBody>
-          <a:bodyPr wrap="square" lIns="0" tIns="0" rIns="0" bIns="0" anchor="t">
-            <a:spAutoFit/>
-          </a:bodyPr>
-          <a:lstStyle/>
-          <a:p>
-            <a:pPr algn="l">
-              <a:lnSpc>
-                <a:spcPct val="100000"/>
-              </a:lnSpc>
-              <a:spcBef>
-                <a:spcPts val="0"/>
-              </a:spcBef>
-              <a:spcAft>
-                <a:spcPts val="600"/>
-              </a:spcAft>
-            </a:pPr>
-            <a:r>
-              <a:rPr sz="1400" b="0" i="0">
-                <a:solidFill>
-                  <a:srgbClr val="2EE6A6"/>
-                </a:solidFill>
-                <a:latin typeface="Consolas"/>
-              </a:rPr>
-              <a:t>symbol · price · amount · exact time (to the millisecond)</a:t>
-            </a:r>
-          </a:p>
-        </p:txBody>
-      </p:sp>
-      <p:sp>
-        <p:nvSpPr>
-          <p:cNvPr id="7" name="Oval 6"/>
+              <a:t>What it does, in six simple steps</a:t>
+            </a:r>
+          </a:p>
+        </p:txBody>
+      </p:sp>
+      <p:sp>
+        <p:nvSpPr>
+          <p:cNvPr id="5" name="Rounded Rectangle 4"/>
           <p:cNvSpPr/>
           <p:nvPr/>
         </p:nvSpPr>
         <p:spPr>
           <a:xfrm>
-            <a:off x="777240" y="3246120"/>
-            <a:ext cx="457200" cy="457200"/>
-          </a:xfrm>
-          <a:prstGeom prst="ellipse">
-            <a:avLst/>
+            <a:off x="716663" y="1810512"/>
+            <a:ext cx="10728192" cy="3328415"/>
+          </a:xfrm>
+          <a:prstGeom prst="roundRect">
+            <a:avLst>
+              <a:gd name="adj" fmla="val 6000"/>
+            </a:avLst>
           </a:prstGeom>
           <a:solidFill>
-            <a:srgbClr val="2EE6A6"/>
+            <a:srgbClr val="FFFFFF"/>
           </a:solidFill>
           <a:ln>
             <a:noFill/>
@@ -12642,7 +13730,7 @@
           </a:fontRef>
         </p:style>
         <p:txBody>
-          <a:bodyPr wrap="none" lIns="0" tIns="0" rIns="0" bIns="0" rtlCol="0" anchor="ctr"/>
+          <a:bodyPr rtlCol="0" anchor="ctr"/>
           <a:lstStyle/>
           <a:p>
             <a:pPr algn="ctr"/>
@@ -12650,16 +13738,40 @@
           </a:p>
         </p:txBody>
       </p:sp>
-      <p:sp>
-        <p:nvSpPr>
-          <p:cNvPr id="8" name="TextBox 7"/>
+      <p:pic>
+        <p:nvPicPr>
+          <p:cNvPr id="6" name="Picture 5" descr="fig_flow.png"/>
+          <p:cNvPicPr>
+            <a:picLocks noChangeAspect="1"/>
+          </p:cNvPicPr>
+          <p:nvPr/>
+        </p:nvPicPr>
+        <p:blipFill>
+          <a:blip r:embed="rId3"/>
+          <a:stretch>
+            <a:fillRect/>
+          </a:stretch>
+        </p:blipFill>
+        <p:spPr>
+          <a:xfrm>
+            <a:off x="826391" y="1920240"/>
+            <a:ext cx="10508736" cy="3108960"/>
+          </a:xfrm>
+          <a:prstGeom prst="rect">
+            <a:avLst/>
+          </a:prstGeom>
+        </p:spPr>
+      </p:pic>
+      <p:sp>
+        <p:nvSpPr>
+          <p:cNvPr id="7" name="TextBox 6"/>
           <p:cNvSpPr txBox="1"/>
           <p:nvPr/>
         </p:nvSpPr>
         <p:spPr>
           <a:xfrm>
-            <a:off x="1417320" y="3089812"/>
-            <a:ext cx="9966960" cy="731520"/>
+            <a:off x="777240" y="5577840"/>
+            <a:ext cx="10607040" cy="731520"/>
           </a:xfrm>
           <a:prstGeom prst="rect">
             <a:avLst/>
@@ -12667,12 +13779,12 @@
           <a:noFill/>
         </p:spPr>
         <p:txBody>
-          <a:bodyPr wrap="square" lIns="0" tIns="0" rIns="0" bIns="0" anchor="ctr">
+          <a:bodyPr wrap="square" lIns="0" tIns="0" rIns="0" bIns="0" anchor="t">
             <a:spAutoFit/>
           </a:bodyPr>
           <a:lstStyle/>
           <a:p>
-            <a:pPr algn="l">
+            <a:pPr algn="ctr">
               <a:lnSpc>
                 <a:spcPct val="100000"/>
               </a:lnSpc>
@@ -12684,319 +13796,13 @@
               </a:spcAft>
             </a:pPr>
             <a:r>
-              <a:rPr sz="1600" b="1" i="0" dirty="0">
-                <a:solidFill>
-                  <a:srgbClr val="2EE6A6"/>
+              <a:rPr sz="1500" b="0" i="1">
+                <a:solidFill>
+                  <a:srgbClr val="9AA8BD"/>
                 </a:solidFill>
                 <a:latin typeface="Calibri"/>
               </a:rPr>
-              <a:t>Fast   </a:t>
-            </a:r>
-            <a:r>
-              <a:rPr sz="1500" b="0" i="0" dirty="0">
-                <a:solidFill>
-                  <a:srgbClr val="EAF0F8"/>
-                </a:solidFill>
-                <a:latin typeface="Calibri"/>
-              </a:rPr>
-              <a:t>never stops — 50 to 200 trades per second, per coin</a:t>
-            </a:r>
-          </a:p>
-        </p:txBody>
-      </p:sp>
-      <p:sp>
-        <p:nvSpPr>
-          <p:cNvPr id="9" name="Oval 8"/>
-          <p:cNvSpPr/>
-          <p:nvPr/>
-        </p:nvSpPr>
-        <p:spPr>
-          <a:xfrm>
-            <a:off x="777240" y="4023359"/>
-            <a:ext cx="457200" cy="457200"/>
-          </a:xfrm>
-          <a:prstGeom prst="ellipse">
-            <a:avLst/>
-          </a:prstGeom>
-          <a:solidFill>
-            <a:srgbClr val="3B9EFF"/>
-          </a:solidFill>
-          <a:ln>
-            <a:noFill/>
-          </a:ln>
-          <a:effectLst/>
-        </p:spPr>
-        <p:style>
-          <a:lnRef idx="1">
-            <a:schemeClr val="accent1"/>
-          </a:lnRef>
-          <a:fillRef idx="3">
-            <a:schemeClr val="accent1"/>
-          </a:fillRef>
-          <a:effectRef idx="2">
-            <a:schemeClr val="accent1"/>
-          </a:effectRef>
-          <a:fontRef idx="minor">
-            <a:schemeClr val="lt1"/>
-          </a:fontRef>
-        </p:style>
-        <p:txBody>
-          <a:bodyPr wrap="none" lIns="0" tIns="0" rIns="0" bIns="0" rtlCol="0" anchor="ctr"/>
-          <a:lstStyle/>
-          <a:p>
-            <a:pPr algn="ctr"/>
-            <a:endParaRPr/>
-          </a:p>
-        </p:txBody>
-      </p:sp>
-      <p:sp>
-        <p:nvSpPr>
-          <p:cNvPr id="10" name="TextBox 9"/>
-          <p:cNvSpPr txBox="1"/>
-          <p:nvPr/>
-        </p:nvSpPr>
-        <p:spPr>
-          <a:xfrm>
-            <a:off x="1417320" y="3867052"/>
-            <a:ext cx="9966960" cy="731520"/>
-          </a:xfrm>
-          <a:prstGeom prst="rect">
-            <a:avLst/>
-          </a:prstGeom>
-          <a:noFill/>
-        </p:spPr>
-        <p:txBody>
-          <a:bodyPr wrap="square" lIns="0" tIns="0" rIns="0" bIns="0" anchor="ctr">
-            <a:spAutoFit/>
-          </a:bodyPr>
-          <a:lstStyle/>
-          <a:p>
-            <a:pPr algn="l">
-              <a:lnSpc>
-                <a:spcPct val="100000"/>
-              </a:lnSpc>
-              <a:spcBef>
-                <a:spcPts val="0"/>
-              </a:spcBef>
-              <a:spcAft>
-                <a:spcPts val="600"/>
-              </a:spcAft>
-            </a:pPr>
-            <a:r>
-              <a:rPr sz="1600" b="1" i="0">
-                <a:solidFill>
-                  <a:srgbClr val="3B9EFF"/>
-                </a:solidFill>
-                <a:latin typeface="Calibri"/>
-              </a:rPr>
-              <a:t>Enough   </a:t>
-            </a:r>
-            <a:r>
-              <a:rPr sz="1500" b="0" i="0">
-                <a:solidFill>
-                  <a:srgbClr val="EAF0F8"/>
-                </a:solidFill>
-                <a:latin typeface="Calibri"/>
-              </a:rPr>
-              <a:t>hundreds of trades a second in total — real stream load</a:t>
-            </a:r>
-          </a:p>
-        </p:txBody>
-      </p:sp>
-      <p:sp>
-        <p:nvSpPr>
-          <p:cNvPr id="11" name="Oval 10"/>
-          <p:cNvSpPr/>
-          <p:nvPr/>
-        </p:nvSpPr>
-        <p:spPr>
-          <a:xfrm>
-            <a:off x="777240" y="4800600"/>
-            <a:ext cx="457200" cy="457200"/>
-          </a:xfrm>
-          <a:prstGeom prst="ellipse">
-            <a:avLst/>
-          </a:prstGeom>
-          <a:solidFill>
-            <a:srgbClr val="F2A93B"/>
-          </a:solidFill>
-          <a:ln>
-            <a:noFill/>
-          </a:ln>
-          <a:effectLst/>
-        </p:spPr>
-        <p:style>
-          <a:lnRef idx="1">
-            <a:schemeClr val="accent1"/>
-          </a:lnRef>
-          <a:fillRef idx="3">
-            <a:schemeClr val="accent1"/>
-          </a:fillRef>
-          <a:effectRef idx="2">
-            <a:schemeClr val="accent1"/>
-          </a:effectRef>
-          <a:fontRef idx="minor">
-            <a:schemeClr val="lt1"/>
-          </a:fontRef>
-        </p:style>
-        <p:txBody>
-          <a:bodyPr wrap="none" lIns="0" tIns="0" rIns="0" bIns="0" rtlCol="0" anchor="ctr"/>
-          <a:lstStyle/>
-          <a:p>
-            <a:pPr algn="ctr"/>
-            <a:endParaRPr/>
-          </a:p>
-        </p:txBody>
-      </p:sp>
-      <p:sp>
-        <p:nvSpPr>
-          <p:cNvPr id="12" name="TextBox 11"/>
-          <p:cNvSpPr txBox="1"/>
-          <p:nvPr/>
-        </p:nvSpPr>
-        <p:spPr>
-          <a:xfrm>
-            <a:off x="1417320" y="4644292"/>
-            <a:ext cx="9966960" cy="731520"/>
-          </a:xfrm>
-          <a:prstGeom prst="rect">
-            <a:avLst/>
-          </a:prstGeom>
-          <a:noFill/>
-        </p:spPr>
-        <p:txBody>
-          <a:bodyPr wrap="square" lIns="0" tIns="0" rIns="0" bIns="0" anchor="ctr">
-            <a:spAutoFit/>
-          </a:bodyPr>
-          <a:lstStyle/>
-          <a:p>
-            <a:pPr algn="l">
-              <a:lnSpc>
-                <a:spcPct val="100000"/>
-              </a:lnSpc>
-              <a:spcBef>
-                <a:spcPts val="0"/>
-              </a:spcBef>
-              <a:spcAft>
-                <a:spcPts val="600"/>
-              </a:spcAft>
-            </a:pPr>
-            <a:r>
-              <a:rPr sz="1600" b="1" i="0">
-                <a:solidFill>
-                  <a:srgbClr val="F2A93B"/>
-                </a:solidFill>
-                <a:latin typeface="Calibri"/>
-              </a:rPr>
-              <a:t>A bit messy   </a:t>
-            </a:r>
-            <a:r>
-              <a:rPr sz="1500" b="0" i="0">
-                <a:solidFill>
-                  <a:srgbClr val="EAF0F8"/>
-                </a:solidFill>
-                <a:latin typeface="Calibri"/>
-              </a:rPr>
-              <a:t>trades can arrive slightly out of order — we handle that</a:t>
-            </a:r>
-          </a:p>
-        </p:txBody>
-      </p:sp>
-      <p:sp>
-        <p:nvSpPr>
-          <p:cNvPr id="13" name="Oval 12"/>
-          <p:cNvSpPr/>
-          <p:nvPr/>
-        </p:nvSpPr>
-        <p:spPr>
-          <a:xfrm>
-            <a:off x="777240" y="5577840"/>
-            <a:ext cx="457200" cy="457200"/>
-          </a:xfrm>
-          <a:prstGeom prst="ellipse">
-            <a:avLst/>
-          </a:prstGeom>
-          <a:solidFill>
-            <a:srgbClr val="E84749"/>
-          </a:solidFill>
-          <a:ln>
-            <a:noFill/>
-          </a:ln>
-          <a:effectLst/>
-        </p:spPr>
-        <p:style>
-          <a:lnRef idx="1">
-            <a:schemeClr val="accent1"/>
-          </a:lnRef>
-          <a:fillRef idx="3">
-            <a:schemeClr val="accent1"/>
-          </a:fillRef>
-          <a:effectRef idx="2">
-            <a:schemeClr val="accent1"/>
-          </a:effectRef>
-          <a:fontRef idx="minor">
-            <a:schemeClr val="lt1"/>
-          </a:fontRef>
-        </p:style>
-        <p:txBody>
-          <a:bodyPr wrap="none" lIns="0" tIns="0" rIns="0" bIns="0" rtlCol="0" anchor="ctr"/>
-          <a:lstStyle/>
-          <a:p>
-            <a:pPr algn="ctr"/>
-            <a:endParaRPr/>
-          </a:p>
-        </p:txBody>
-      </p:sp>
-      <p:sp>
-        <p:nvSpPr>
-          <p:cNvPr id="14" name="TextBox 13"/>
-          <p:cNvSpPr txBox="1"/>
-          <p:nvPr/>
-        </p:nvSpPr>
-        <p:spPr>
-          <a:xfrm>
-            <a:off x="1417320" y="5421532"/>
-            <a:ext cx="9966960" cy="731520"/>
-          </a:xfrm>
-          <a:prstGeom prst="rect">
-            <a:avLst/>
-          </a:prstGeom>
-          <a:noFill/>
-        </p:spPr>
-        <p:txBody>
-          <a:bodyPr wrap="square" lIns="0" tIns="0" rIns="0" bIns="0" anchor="ctr">
-            <a:spAutoFit/>
-          </a:bodyPr>
-          <a:lstStyle/>
-          <a:p>
-            <a:pPr algn="l">
-              <a:lnSpc>
-                <a:spcPct val="100000"/>
-              </a:lnSpc>
-              <a:spcBef>
-                <a:spcPts val="0"/>
-              </a:spcBef>
-              <a:spcAft>
-                <a:spcPts val="600"/>
-              </a:spcAft>
-            </a:pPr>
-            <a:r>
-              <a:rPr sz="1600" b="1" i="0">
-                <a:solidFill>
-                  <a:srgbClr val="E84749"/>
-                </a:solidFill>
-                <a:latin typeface="Calibri"/>
-              </a:rPr>
-              <a:t>Tiny   </a:t>
-            </a:r>
-            <a:r>
-              <a:rPr sz="1500" b="0" i="0">
-                <a:solidFill>
-                  <a:srgbClr val="EAF0F8"/>
-                </a:solidFill>
-                <a:latin typeface="Calibri"/>
-              </a:rPr>
-              <a:t>each message is small and simple to read</a:t>
+              <a:t>Live trades come in on the left and become a live dashboard on the right. Each step is a small, well-known tool.</a:t>
             </a:r>
           </a:p>
         </p:txBody>
@@ -15498,8 +16304,8 @@
         </p:nvSpPr>
         <p:spPr>
           <a:xfrm>
-            <a:off x="777240" y="502920"/>
-            <a:ext cx="10058400" cy="365760"/>
+            <a:off x="785866" y="502920"/>
+            <a:ext cx="10058400" cy="200055"/>
           </a:xfrm>
           <a:prstGeom prst="rect">
             <a:avLst/>
@@ -15524,14 +16330,20 @@
               </a:spcAft>
             </a:pPr>
             <a:r>
-              <a:rPr sz="1300" b="1" i="0" dirty="0">
+              <a:rPr lang="en-US" sz="1300" b="1" dirty="0">
                 <a:solidFill>
                   <a:srgbClr val="2EE6A6"/>
                 </a:solidFill>
                 <a:latin typeface="Calibri"/>
               </a:rPr>
-              <a:t>IDEA 1</a:t>
-            </a:r>
+              <a:t>Kafka</a:t>
+            </a:r>
+            <a:endParaRPr sz="1300" b="1" i="0" dirty="0">
+              <a:solidFill>
+                <a:srgbClr val="2EE6A6"/>
+              </a:solidFill>
+              <a:latin typeface="Calibri"/>
+            </a:endParaRPr>
           </a:p>
         </p:txBody>
       </p:sp>
@@ -15875,7 +16687,7 @@
         </p:blipFill>
         <p:spPr>
           <a:xfrm>
-            <a:off x="1530138" y="1697258"/>
+            <a:off x="1461557" y="1867237"/>
             <a:ext cx="4040084" cy="4663441"/>
           </a:xfrm>
           <a:prstGeom prst="rect">
